--- a/presentations/branding-jas-2026/Branding_JAS2026_Review_OND_Plan.pptx
+++ b/presentations/branding-jas-2026/Branding_JAS2026_Review_OND_Plan.pptx
@@ -17,9 +17,10 @@
     <p:sldId id="265" r:id="rId11"/>
     <p:sldId id="266" r:id="rId12"/>
     <p:sldId id="267" r:id="rId13"/>
+    <p:sldId id="268" r:id="rId14"/>
   </p:sldIdLst>
   <p:notesMasterIdLst>
-    <p:notesMasterId r:id="rId14"/>
+    <p:notesMasterId r:id="rId15"/>
   </p:notesMasterIdLst>
   <p:sldSz cx="12192000" cy="6858000"/>
   <p:notesSz cx="6858000" cy="12192000"/>
@@ -118,12 +119,12 @@
   <p:extLst>
     <p:ext uri="{521415D9-36F7-43E2-AB2F-B90AF26B5E84}">
       <p14:sectionLst xmlns:p14="http://schemas.microsoft.com/office/powerpoint/2010/main">
-        <p14:section name="Opening" id="{c13dcd63-8ee6-d999-8446-2b1f99eb0e68}">
+        <p14:section name="Opening" id="{450ac56e-da51-5314-30f4-ce681e4fbdf4}">
           <p14:sldIdLst>
             <p14:sldId id="256"/>
           </p14:sldIdLst>
         </p14:section>
-        <p14:section name="JAS review" id="{41d7d654-2646-64ee-1a4b-f93a325ed49d}">
+        <p14:section name="JAS review" id="{097c5be1-c6bb-55c1-ff44-36a1eb55c77b}">
           <p14:sldIdLst>
             <p14:sldId id="257"/>
             <p14:sldId id="258"/>
@@ -132,22 +133,23 @@
             <p14:sldId id="261"/>
             <p14:sldId id="262"/>
             <p14:sldId id="263"/>
-          </p14:sldIdLst>
-        </p14:section>
-        <p14:section name="OND plan" id="{4f25ef01-02cf-41d6-bdf4-4ddef462c379}">
-          <p14:sldIdLst>
             <p14:sldId id="264"/>
           </p14:sldIdLst>
         </p14:section>
-        <p14:section name="Close" id="{b5bffec0-f2dd-f313-da03-a643743c7331}">
+        <p14:section name="OND plan" id="{9d4f7701-851e-69c9-fc8b-e669feaf4b08}">
           <p14:sldIdLst>
             <p14:sldId id="265"/>
           </p14:sldIdLst>
         </p14:section>
-        <p14:section name="Appendix" id="{19884cc6-99b4-ff78-577b-f3f51295aa49}">
+        <p14:section name="Close" id="{bd4ab3cc-2a06-650a-7afc-f2f291e5ea28}">
           <p14:sldIdLst>
             <p14:sldId id="266"/>
+          </p14:sldIdLst>
+        </p14:section>
+        <p14:section name="Appendix" id="{8a734bc8-23d5-d5bb-7874-4bafe72ff549}">
+          <p14:sldIdLst>
             <p14:sldId id="267"/>
+            <p14:sldId id="268"/>
           </p14:sldIdLst>
         </p14:section>
       </p14:sectionLst>
@@ -1779,7 +1781,7 @@
           <a:p>
             <a:r>
               <a:rPr lang="en-US" dirty="0"/>
-              <a:t>Close on the OND commitments. Supporting data is in the appendix if asked.</a:t>
+              <a:t>~75 sec. October is almost over, so the Oct column should be actuals, not a plan. Give each AI target a number and an owner. If there's an ask (tools budget, a hire, a decision on billing TMB's over-scope work), say it here.</a:t>
             </a:r>
             <a:endParaRPr lang="en-US" dirty="0"/>
           </a:p>
@@ -1867,7 +1869,7 @@
           <a:p>
             <a:r>
               <a:rPr lang="en-US" dirty="0"/>
-              <a:t>Backup only. 12 others: Checkpoint 10, Skylink 13, JMI 12, SBJH 12, TVS Green 12, Rakki 8, DBS pitch 8, VKS 7, Xylemx 4, Athmalaya 3, Care AKPS 1, Apollo pitch 1.</a:t>
+              <a:t>Close on the OND commitments. Supporting data is in the appendix if asked.</a:t>
             </a:r>
             <a:endParaRPr lang="en-US" dirty="0"/>
           </a:p>
@@ -1955,7 +1957,7 @@
           <a:p>
             <a:r>
               <a:rPr lang="en-US" dirty="0"/>
-              <a:t>Covers the agenda item 'Documentation &amp; supporting metrics'. Keep the links ready on the laptop in case someone asks to see the source.</a:t>
+              <a:t>Backup only. 12 others: Checkpoint 10, Skylink 13, JMI 12, SBJH 12, TVS Green 12, Rakki 8, DBS pitch 8, VKS 7, Xylemx 4, Athmalaya 3, Care AKPS 1, Apollo pitch 1.</a:t>
             </a:r>
             <a:endParaRPr lang="en-US" dirty="0"/>
           </a:p>
@@ -1979,6 +1981,94 @@
             <a:fld id="{F7021451-1387-4CA6-816F-3879F97B5CBC}" type="slidenum">
               <a:rPr lang="en-US"/>
               <a:t>12</a:t>
+            </a:fld>
+            <a:endParaRPr lang="en-US"/>
+          </a:p>
+        </p:txBody>
+      </p:sp>
+    </p:spTree>
+    <p:extLst>
+      <p:ext uri="{BB962C8B-B14F-4D97-AF65-F5344CB8AC3E}">
+        <p14:creationId xmlns:p14="http://schemas.microsoft.com/office/powerpoint/2010/main" val="1024086991"/>
+      </p:ext>
+    </p:extLst>
+  </p:cSld>
+  <p:clrMapOvr>
+    <a:masterClrMapping/>
+  </p:clrMapOvr>
+</p:notes>
+</file>
+
+<file path=ppt/notesSlides/notesSlide13.xml><?xml version="1.0" encoding="utf-8"?>
+<p:notes xmlns:a="http://schemas.openxmlformats.org/drawingml/2006/main" xmlns:r="http://schemas.openxmlformats.org/officeDocument/2006/relationships" xmlns:p="http://schemas.openxmlformats.org/presentationml/2006/main">
+  <p:cSld>
+    <p:spTree>
+      <p:nvGrpSpPr>
+        <p:cNvPr id="1" name=""/>
+        <p:cNvGrpSpPr/>
+        <p:nvPr/>
+      </p:nvGrpSpPr>
+      <p:grpSpPr>
+        <a:xfrm>
+          <a:off x="0" y="0"/>
+          <a:ext cx="0" cy="0"/>
+          <a:chOff x="0" y="0"/>
+          <a:chExt cx="0" cy="0"/>
+        </a:xfrm>
+      </p:grpSpPr>
+      <p:sp>
+        <p:nvSpPr>
+          <p:cNvPr id="2" name="Slide Image Placeholder 1"/>
+          <p:cNvSpPr>
+            <a:spLocks noGrp="1" noRot="1" noChangeAspect="1"/>
+          </p:cNvSpPr>
+          <p:nvPr>
+            <p:ph type="sldImg"/>
+          </p:nvPr>
+        </p:nvSpPr>
+        <p:spPr/>
+      </p:sp>
+      <p:sp>
+        <p:nvSpPr>
+          <p:cNvPr id="3" name="Notes Placeholder 2"/>
+          <p:cNvSpPr>
+            <a:spLocks noGrp="1"/>
+          </p:cNvSpPr>
+          <p:nvPr>
+            <p:ph type="body" idx="1"/>
+          </p:nvPr>
+        </p:nvSpPr>
+        <p:spPr/>
+        <p:txBody>
+          <a:bodyPr/>
+          <a:lstStyle/>
+          <a:p>
+            <a:r>
+              <a:rPr lang="en-US" dirty="0"/>
+              <a:t>Covers the agenda item 'Documentation &amp; supporting metrics'. Keep the links ready on the laptop in case someone asks to see the source.</a:t>
+            </a:r>
+            <a:endParaRPr lang="en-US" dirty="0"/>
+          </a:p>
+        </p:txBody>
+      </p:sp>
+      <p:sp>
+        <p:nvSpPr>
+          <p:cNvPr id="4" name="Slide Number Placeholder 3"/>
+          <p:cNvSpPr>
+            <a:spLocks noGrp="1"/>
+          </p:cNvSpPr>
+          <p:nvPr>
+            <p:ph type="sldNum" sz="quarter" idx="10"/>
+          </p:nvPr>
+        </p:nvSpPr>
+        <p:spPr/>
+        <p:txBody>
+          <a:bodyPr/>
+          <a:lstStyle/>
+          <a:p>
+            <a:fld id="{F7021451-1387-4CA6-816F-3879F97B5CBC}" type="slidenum">
+              <a:rPr lang="en-US"/>
+              <a:t>13</a:t>
             </a:fld>
             <a:endParaRPr lang="en-US"/>
           </a:p>
@@ -2131,7 +2221,7 @@
           <a:p>
             <a:r>
               <a:rPr lang="en-US" dirty="0"/>
-              <a:t>~75 sec. This is the story to land. 'This was promised last quarter. We carried it over and delivered it this quarter.' Show the stills or clip. CHECK BEFORE PRESENTING: the project tracker still lists TVS Green 'TVC Commercial Ads - 3' as Oct / In-progress. Update the tracker to Completed or someone will catch the mismatch.</a:t>
+              <a:t>~60 sec. Leadership saw the Feb roadmap ('Scaling the Right Way'), so they will judge JAS against it. Say it before they do. Volume: the Feb deck said 200–250/month and 'close to optimal capacity'; JAS ran at ~370/month with the same 4 people. If the resource ask is still pending, that is your argument for it. KIMS was a Type 2 retainer in Feb and is not in the current retainer list, so confirm whether it was lost and be ready to say why. Annual reports / white papers had no movement: say whether it's parked or planned for OND.</a:t>
             </a:r>
             <a:endParaRPr lang="en-US" dirty="0"/>
           </a:p>
@@ -2219,7 +2309,7 @@
           <a:p>
             <a:r>
               <a:rPr lang="en-US" dirty="0"/>
-              <a:t>~60 sec. Projects by start month, from the project tracker. July: SBJH Founders Day, VKS Builders, SIP Academy 23-yr, Wewin Coimbatore (all done). August: JMI done; Checkpoint Diagnostic and Xylemx still in progress. September: Wewin Bangalore done. Fill the creatives table from a month-filtered pivot.</a:t>
+              <a:t>~75 sec. This is the story to land. 'This was promised last quarter. We carried it over and delivered it this quarter.' Show the stills or clip. CHECK BEFORE PRESENTING: the project tracker still lists TVS Green 'TVC Commercial Ads - 3' as Oct / In-progress. Update the tracker to Completed or someone will catch the mismatch.</a:t>
             </a:r>
             <a:endParaRPr lang="en-US" dirty="0"/>
           </a:p>
@@ -2307,7 +2397,7 @@
           <a:p>
             <a:r>
               <a:rPr lang="en-US" dirty="0"/>
-              <a:t>~75 sec. KPI method = projection vs. actually done. On-time: 8 projects in JAS, 6 on time; Checkpoint Diagnostic and Xylemx slipped. Design &amp; Creatives: planned = retainer scope (561 units), done = 841. Upsell, Project Retention and CSAT are deliberately left off this slide. Be ready if asked: 'We start tracking them from OND with a defined source.'</a:t>
+              <a:t>~60 sec. Projects by start month, from the project tracker. July: SBJH Founders Day, VKS Builders, SIP Academy 23-yr, Wewin Coimbatore (all done). August: JMI done; Checkpoint Diagnostic and Xylemx still in progress. September: Wewin Bangalore done. Fill the creatives table from a month-filtered pivot.</a:t>
             </a:r>
             <a:endParaRPr lang="en-US" dirty="0"/>
           </a:p>
@@ -2395,7 +2485,7 @@
           <a:p>
             <a:r>
               <a:rPr lang="en-US" dirty="0"/>
-              <a:t>~75 sec. Scope comes from the retainer tracker × 3 months. Delivered = JAS creative pivot by client. Present ONE of the two % columns once the definition is agreed, and delete the other. Athmalaya at 3 of 6 posts is a real shortfall either way. Have the reason ready. Star Health's scope says '70 creative units = 35–40 creatives', so confirm how a unit is counted.</a:t>
+              <a:t>~75 sec. KPI method = projection vs. actually done. On-time: 8 projects in JAS, 6 on time; Checkpoint Diagnostic and Xylemx slipped. Design &amp; Creatives: planned = retainer scope (561 units), done = 841. Upsell, Project Retention and CSAT are deliberately left off this slide. Be ready if asked: 'We start tracking them from OND with a defined source.'</a:t>
             </a:r>
             <a:endParaRPr lang="en-US" dirty="0"/>
           </a:p>
@@ -2483,7 +2573,7 @@
           <a:p>
             <a:r>
               <a:rPr lang="en-US" dirty="0"/>
-              <a:t>~60 sec. Totals: Ezhumalai 199, Gowtham 199, Keerthana 399, Naresh 312. Don't rank people by raw volume: a master creative is not equal to an adaptation. If asked for a ranking, use a weighting agreed with leadership beforehand. Key-person risk: name the OND mitigation (e.g., a second designer pairs on concepts).</a:t>
+              <a:t>~75 sec. Scope comes from the retainer tracker × 3 months. Delivered = JAS creative pivot by client. Present ONE of the two % columns once the definition is agreed, and delete the other. Athmalaya at 3 of 6 posts is a real shortfall either way. Have the reason ready. Star Health's scope says '70 creative units = 35–40 creatives', so confirm how a unit is counted.</a:t>
             </a:r>
             <a:endParaRPr lang="en-US" dirty="0"/>
           </a:p>
@@ -2571,7 +2661,7 @@
           <a:p>
             <a:r>
               <a:rPr lang="en-US" dirty="0"/>
-              <a:t>~60 sec. 6 of 8 projects closed. Checkpoint Diagnostic and Xylemx started in August and are still open at the end of October. Give the reason and the new close date, not an apology. The pitch work (Apollo, DBS) used real concept capacity. Say whether it converted.</a:t>
+              <a:t>~60 sec. Totals: Ezhumalai 199, Gowtham 199, Keerthana 399, Naresh 312. Don't rank people by raw volume: a master creative is not equal to an adaptation. If asked for a ranking, use a weighting agreed with leadership beforehand. Key-person risk: name the OND mitigation (e.g., a second designer pairs on concepts).</a:t>
             </a:r>
             <a:endParaRPr lang="en-US" dirty="0"/>
           </a:p>
@@ -2659,7 +2749,7 @@
           <a:p>
             <a:r>
               <a:rPr lang="en-US" dirty="0"/>
-              <a:t>~75 sec. October is almost over, so the Oct column should be actuals, not a plan. Give each AI target a number and an owner. If there's an ask (tools budget, a hire, a decision on billing TMB's over-scope work), say it here.</a:t>
+              <a:t>~60 sec. 6 of 8 projects closed. Checkpoint Diagnostic and Xylemx started in August and are still open at the end of October. Give the reason and the new close date, not an apology. The pitch work (Apollo, DBS) used real concept capacity. Say whether it converted.</a:t>
             </a:r>
             <a:endParaRPr lang="en-US" dirty="0"/>
           </a:p>
@@ -3916,6 +4006,2066 @@
       <p:sp>
         <p:nvSpPr>
           <p:cNvPr id="2" name="Text 0"/>
+          <p:cNvSpPr/>
+          <p:nvPr>
+            <p:ph idx="100" type="title" hasCustomPrompt="1"/>
+          </p:nvPr>
+        </p:nvSpPr>
+        <p:spPr>
+          <a:xfrm>
+            <a:off x="548640" y="320040"/>
+            <a:ext cx="11064240" cy="822960"/>
+          </a:xfrm>
+          <a:prstGeom prst="rect">
+            <a:avLst/>
+          </a:prstGeom>
+          <a:noFill/>
+          <a:ln/>
+        </p:spPr>
+        <p:txBody>
+          <a:bodyPr wrap="square" lIns="0" tIns="0" rIns="0" bIns="0" rtlCol="0" anchor="ctr"/>
+          <a:lstStyle/>
+          <a:p>
+            <a:pPr algn="l" indent="0" marL="0">
+              <a:buNone/>
+            </a:pPr>
+            <a:r>
+              <a:rPr lang="en-US" sz="2800" b="1" dirty="0">
+                <a:solidFill>
+                  <a:schemeClr val="tx1"/>
+                </a:solidFill>
+              </a:rPr>
+              <a:t>OND focus: real-estate AI videos and AI-led creative</a:t>
+            </a:r>
+            <a:endParaRPr lang="en-US" sz="2800" dirty="0"/>
+          </a:p>
+        </p:txBody>
+      </p:sp>
+      <p:sp>
+        <p:nvSpPr>
+          <p:cNvPr id="3" name="Pillar card"/>
+          <p:cNvSpPr/>
+          <p:nvPr/>
+        </p:nvSpPr>
+        <p:spPr>
+          <a:xfrm>
+            <a:off x="548640" y="1325880"/>
+            <a:ext cx="3474720" cy="2103120"/>
+          </a:xfrm>
+          <a:prstGeom prst="roundRect">
+            <a:avLst>
+              <a:gd name="adj" fmla="val 5217"/>
+            </a:avLst>
+          </a:prstGeom>
+          <a:solidFill>
+            <a:schemeClr val="bg1"/>
+          </a:solidFill>
+          <a:ln w="15875">
+            <a:solidFill>
+              <a:schemeClr val="tx1"/>
+            </a:solidFill>
+            <a:prstDash val="solid"/>
+          </a:ln>
+          <a:effectLst>
+            <a:outerShdw sx="100000" sy="100000" kx="0" ky="0" algn="bl" rotWithShape="0" blurRad="76200" dist="38100" dir="5400000">
+              <a:srgbClr val="000000">
+                <a:alpha val="12000"/>
+              </a:srgbClr>
+            </a:outerShdw>
+          </a:effectLst>
+        </p:spPr>
+      </p:sp>
+      <p:sp>
+        <p:nvSpPr>
+          <p:cNvPr id="4" name="Window dot"/>
+          <p:cNvSpPr/>
+          <p:nvPr/>
+        </p:nvSpPr>
+        <p:spPr>
+          <a:xfrm>
+            <a:off x="3154680" y="1463040"/>
+            <a:ext cx="128016" cy="128016"/>
+          </a:xfrm>
+          <a:prstGeom prst="ellipse">
+            <a:avLst/>
+          </a:prstGeom>
+          <a:solidFill>
+            <a:schemeClr val="tx2"/>
+          </a:solidFill>
+          <a:ln w="12700">
+            <a:solidFill>
+              <a:schemeClr val="tx2"/>
+            </a:solidFill>
+            <a:prstDash val="solid"/>
+          </a:ln>
+        </p:spPr>
+      </p:sp>
+      <p:sp>
+        <p:nvSpPr>
+          <p:cNvPr id="5" name="Window dot"/>
+          <p:cNvSpPr/>
+          <p:nvPr/>
+        </p:nvSpPr>
+        <p:spPr>
+          <a:xfrm>
+            <a:off x="3383280" y="1463040"/>
+            <a:ext cx="128016" cy="128016"/>
+          </a:xfrm>
+          <a:prstGeom prst="ellipse">
+            <a:avLst/>
+          </a:prstGeom>
+          <a:solidFill>
+            <a:schemeClr val="accent4"/>
+          </a:solidFill>
+          <a:ln w="12700">
+            <a:solidFill>
+              <a:schemeClr val="accent4"/>
+            </a:solidFill>
+            <a:prstDash val="solid"/>
+          </a:ln>
+        </p:spPr>
+      </p:sp>
+      <p:sp>
+        <p:nvSpPr>
+          <p:cNvPr id="6" name="Window dot"/>
+          <p:cNvSpPr/>
+          <p:nvPr/>
+        </p:nvSpPr>
+        <p:spPr>
+          <a:xfrm>
+            <a:off x="3611880" y="1463040"/>
+            <a:ext cx="128016" cy="128016"/>
+          </a:xfrm>
+          <a:prstGeom prst="ellipse">
+            <a:avLst/>
+          </a:prstGeom>
+          <a:solidFill>
+            <a:schemeClr val="accent3"/>
+          </a:solidFill>
+          <a:ln w="12700">
+            <a:solidFill>
+              <a:schemeClr val="accent3"/>
+            </a:solidFill>
+            <a:prstDash val="solid"/>
+          </a:ln>
+        </p:spPr>
+      </p:sp>
+      <p:sp>
+        <p:nvSpPr>
+          <p:cNvPr id="7" name="Icon circle"/>
+          <p:cNvSpPr/>
+          <p:nvPr/>
+        </p:nvSpPr>
+        <p:spPr>
+          <a:xfrm>
+            <a:off x="777240" y="1554480"/>
+            <a:ext cx="548640" cy="548640"/>
+          </a:xfrm>
+          <a:prstGeom prst="ellipse">
+            <a:avLst/>
+          </a:prstGeom>
+          <a:solidFill>
+            <a:schemeClr val="accent1"/>
+          </a:solidFill>
+          <a:ln w="12700">
+            <a:solidFill>
+              <a:schemeClr val="accent1"/>
+            </a:solidFill>
+            <a:prstDash val="solid"/>
+          </a:ln>
+        </p:spPr>
+      </p:sp>
+      <p:pic>
+        <p:nvPicPr>
+          <p:cNvPr id="8" name="Image 0" descr="icon">    </p:cNvPr>
+          <p:cNvPicPr>
+            <a:picLocks noChangeAspect="1"/>
+          </p:cNvPicPr>
+          <p:nvPr/>
+        </p:nvPicPr>
+        <p:blipFill>
+          <a:blip r:embed="rId1"/>
+          <a:stretch>
+            <a:fillRect/>
+          </a:stretch>
+        </p:blipFill>
+        <p:spPr>
+          <a:xfrm>
+            <a:off x="914400" y="1691640"/>
+            <a:ext cx="274320" cy="274320"/>
+          </a:xfrm>
+          <a:prstGeom prst="rect">
+            <a:avLst/>
+          </a:prstGeom>
+        </p:spPr>
+      </p:pic>
+      <p:sp>
+        <p:nvSpPr>
+          <p:cNvPr id="9" name="Text 6"/>
+          <p:cNvSpPr txBox="1"/>
+          <p:nvPr/>
+        </p:nvSpPr>
+        <p:spPr>
+          <a:xfrm>
+            <a:off x="1463040" y="1554480"/>
+            <a:ext cx="2377440" cy="548640"/>
+          </a:xfrm>
+          <a:prstGeom prst="rect">
+            <a:avLst/>
+          </a:prstGeom>
+          <a:noFill/>
+          <a:ln/>
+        </p:spPr>
+        <p:txBody>
+          <a:bodyPr wrap="square" lIns="0" tIns="0" rIns="0" bIns="0" rtlCol="0" anchor="ctr"/>
+          <a:lstStyle/>
+          <a:p>
+            <a:pPr indent="0" marL="0">
+              <a:buNone/>
+            </a:pPr>
+            <a:r>
+              <a:rPr lang="en-US" sz="1700" b="1" dirty="0">
+                <a:solidFill>
+                  <a:schemeClr val="tx1"/>
+                </a:solidFill>
+              </a:rPr>
+              <a:t>Real-estate AI videos</a:t>
+            </a:r>
+            <a:endParaRPr lang="en-US" sz="1700" dirty="0"/>
+          </a:p>
+        </p:txBody>
+      </p:sp>
+      <p:sp>
+        <p:nvSpPr>
+          <p:cNvPr id="10" name="Text 7"/>
+          <p:cNvSpPr txBox="1"/>
+          <p:nvPr/>
+        </p:nvSpPr>
+        <p:spPr>
+          <a:xfrm>
+            <a:off x="777240" y="2240280"/>
+            <a:ext cx="3017520" cy="1051560"/>
+          </a:xfrm>
+          <a:prstGeom prst="rect">
+            <a:avLst/>
+          </a:prstGeom>
+          <a:noFill/>
+          <a:ln/>
+        </p:spPr>
+        <p:txBody>
+          <a:bodyPr wrap="square" lIns="0" tIns="0" rIns="0" bIns="0" rtlCol="0" anchor="t"/>
+          <a:lstStyle/>
+          <a:p>
+            <a:pPr indent="0" marL="0">
+              <a:buNone/>
+            </a:pPr>
+            <a:r>
+              <a:rPr lang="en-US" sz="1300" dirty="0">
+                <a:solidFill>
+                  <a:schemeClr val="accent5"/>
+                </a:solidFill>
+              </a:rPr>
+              <a:t>Turn the TVS TVC capability and 3D rendering into AI video offers for real-estate clients.</a:t>
+            </a:r>
+            <a:endParaRPr lang="en-US" sz="1300" dirty="0"/>
+          </a:p>
+        </p:txBody>
+      </p:sp>
+      <p:sp>
+        <p:nvSpPr>
+          <p:cNvPr id="11" name="Pillar card"/>
+          <p:cNvSpPr/>
+          <p:nvPr/>
+        </p:nvSpPr>
+        <p:spPr>
+          <a:xfrm>
+            <a:off x="4297680" y="1325880"/>
+            <a:ext cx="3474720" cy="2103120"/>
+          </a:xfrm>
+          <a:prstGeom prst="roundRect">
+            <a:avLst>
+              <a:gd name="adj" fmla="val 5217"/>
+            </a:avLst>
+          </a:prstGeom>
+          <a:solidFill>
+            <a:schemeClr val="bg1"/>
+          </a:solidFill>
+          <a:ln w="15875">
+            <a:solidFill>
+              <a:schemeClr val="tx1"/>
+            </a:solidFill>
+            <a:prstDash val="solid"/>
+          </a:ln>
+          <a:effectLst>
+            <a:outerShdw sx="100000" sy="100000" kx="0" ky="0" algn="bl" rotWithShape="0" blurRad="76200" dist="38100" dir="5400000">
+              <a:srgbClr val="000000">
+                <a:alpha val="12000"/>
+              </a:srgbClr>
+            </a:outerShdw>
+          </a:effectLst>
+        </p:spPr>
+      </p:sp>
+      <p:sp>
+        <p:nvSpPr>
+          <p:cNvPr id="12" name="Window dot"/>
+          <p:cNvSpPr/>
+          <p:nvPr/>
+        </p:nvSpPr>
+        <p:spPr>
+          <a:xfrm>
+            <a:off x="6903720" y="1463040"/>
+            <a:ext cx="128016" cy="128016"/>
+          </a:xfrm>
+          <a:prstGeom prst="ellipse">
+            <a:avLst/>
+          </a:prstGeom>
+          <a:solidFill>
+            <a:schemeClr val="tx2"/>
+          </a:solidFill>
+          <a:ln w="12700">
+            <a:solidFill>
+              <a:schemeClr val="tx2"/>
+            </a:solidFill>
+            <a:prstDash val="solid"/>
+          </a:ln>
+        </p:spPr>
+      </p:sp>
+      <p:sp>
+        <p:nvSpPr>
+          <p:cNvPr id="13" name="Window dot"/>
+          <p:cNvSpPr/>
+          <p:nvPr/>
+        </p:nvSpPr>
+        <p:spPr>
+          <a:xfrm>
+            <a:off x="7132320" y="1463040"/>
+            <a:ext cx="128016" cy="128016"/>
+          </a:xfrm>
+          <a:prstGeom prst="ellipse">
+            <a:avLst/>
+          </a:prstGeom>
+          <a:solidFill>
+            <a:schemeClr val="accent4"/>
+          </a:solidFill>
+          <a:ln w="12700">
+            <a:solidFill>
+              <a:schemeClr val="accent4"/>
+            </a:solidFill>
+            <a:prstDash val="solid"/>
+          </a:ln>
+        </p:spPr>
+      </p:sp>
+      <p:sp>
+        <p:nvSpPr>
+          <p:cNvPr id="14" name="Window dot"/>
+          <p:cNvSpPr/>
+          <p:nvPr/>
+        </p:nvSpPr>
+        <p:spPr>
+          <a:xfrm>
+            <a:off x="7360920" y="1463040"/>
+            <a:ext cx="128016" cy="128016"/>
+          </a:xfrm>
+          <a:prstGeom prst="ellipse">
+            <a:avLst/>
+          </a:prstGeom>
+          <a:solidFill>
+            <a:schemeClr val="accent3"/>
+          </a:solidFill>
+          <a:ln w="12700">
+            <a:solidFill>
+              <a:schemeClr val="accent3"/>
+            </a:solidFill>
+            <a:prstDash val="solid"/>
+          </a:ln>
+        </p:spPr>
+      </p:sp>
+      <p:sp>
+        <p:nvSpPr>
+          <p:cNvPr id="15" name="Icon circle"/>
+          <p:cNvSpPr/>
+          <p:nvPr/>
+        </p:nvSpPr>
+        <p:spPr>
+          <a:xfrm>
+            <a:off x="4526280" y="1554480"/>
+            <a:ext cx="548640" cy="548640"/>
+          </a:xfrm>
+          <a:prstGeom prst="ellipse">
+            <a:avLst/>
+          </a:prstGeom>
+          <a:solidFill>
+            <a:schemeClr val="tx2"/>
+          </a:solidFill>
+          <a:ln w="12700">
+            <a:solidFill>
+              <a:schemeClr val="tx2"/>
+            </a:solidFill>
+            <a:prstDash val="solid"/>
+          </a:ln>
+        </p:spPr>
+      </p:sp>
+      <p:pic>
+        <p:nvPicPr>
+          <p:cNvPr id="16" name="Image 1" descr="icon">    </p:cNvPr>
+          <p:cNvPicPr>
+            <a:picLocks noChangeAspect="1"/>
+          </p:cNvPicPr>
+          <p:nvPr/>
+        </p:nvPicPr>
+        <p:blipFill>
+          <a:blip r:embed="rId2"/>
+          <a:stretch>
+            <a:fillRect/>
+          </a:stretch>
+        </p:blipFill>
+        <p:spPr>
+          <a:xfrm>
+            <a:off x="4663440" y="1691640"/>
+            <a:ext cx="274320" cy="274320"/>
+          </a:xfrm>
+          <a:prstGeom prst="rect">
+            <a:avLst/>
+          </a:prstGeom>
+        </p:spPr>
+      </p:pic>
+      <p:sp>
+        <p:nvSpPr>
+          <p:cNvPr id="17" name="Text 13"/>
+          <p:cNvSpPr txBox="1"/>
+          <p:nvPr/>
+        </p:nvSpPr>
+        <p:spPr>
+          <a:xfrm>
+            <a:off x="5212080" y="1554480"/>
+            <a:ext cx="2377440" cy="548640"/>
+          </a:xfrm>
+          <a:prstGeom prst="rect">
+            <a:avLst/>
+          </a:prstGeom>
+          <a:noFill/>
+          <a:ln/>
+        </p:spPr>
+        <p:txBody>
+          <a:bodyPr wrap="square" lIns="0" tIns="0" rIns="0" bIns="0" rtlCol="0" anchor="ctr"/>
+          <a:lstStyle/>
+          <a:p>
+            <a:pPr indent="0" marL="0">
+              <a:buNone/>
+            </a:pPr>
+            <a:r>
+              <a:rPr lang="en-US" sz="1700" b="1" dirty="0">
+                <a:solidFill>
+                  <a:schemeClr val="tx1"/>
+                </a:solidFill>
+              </a:rPr>
+              <a:t>AI-led creative</a:t>
+            </a:r>
+            <a:endParaRPr lang="en-US" sz="1700" dirty="0"/>
+          </a:p>
+        </p:txBody>
+      </p:sp>
+      <p:sp>
+        <p:nvSpPr>
+          <p:cNvPr id="18" name="Text 14"/>
+          <p:cNvSpPr txBox="1"/>
+          <p:nvPr/>
+        </p:nvSpPr>
+        <p:spPr>
+          <a:xfrm>
+            <a:off x="4526280" y="2240280"/>
+            <a:ext cx="3017520" cy="1051560"/>
+          </a:xfrm>
+          <a:prstGeom prst="rect">
+            <a:avLst/>
+          </a:prstGeom>
+          <a:noFill/>
+          <a:ln/>
+        </p:spPr>
+        <p:txBody>
+          <a:bodyPr wrap="square" lIns="0" tIns="0" rIns="0" bIns="0" rtlCol="0" anchor="t"/>
+          <a:lstStyle/>
+          <a:p>
+            <a:pPr indent="0" marL="0">
+              <a:buNone/>
+            </a:pPr>
+            <a:r>
+              <a:rPr lang="en-US" sz="1300" dirty="0">
+                <a:solidFill>
+                  <a:schemeClr val="accent5"/>
+                </a:solidFill>
+              </a:rPr>
+              <a:t>Use AI tools to speed up concepts and adaptations, and package them as new deliverables.</a:t>
+            </a:r>
+            <a:endParaRPr lang="en-US" sz="1300" dirty="0"/>
+          </a:p>
+        </p:txBody>
+      </p:sp>
+      <p:sp>
+        <p:nvSpPr>
+          <p:cNvPr id="19" name="Pillar card"/>
+          <p:cNvSpPr/>
+          <p:nvPr/>
+        </p:nvSpPr>
+        <p:spPr>
+          <a:xfrm>
+            <a:off x="8046720" y="1325880"/>
+            <a:ext cx="3474720" cy="2103120"/>
+          </a:xfrm>
+          <a:prstGeom prst="roundRect">
+            <a:avLst>
+              <a:gd name="adj" fmla="val 5217"/>
+            </a:avLst>
+          </a:prstGeom>
+          <a:solidFill>
+            <a:schemeClr val="bg1"/>
+          </a:solidFill>
+          <a:ln w="15875">
+            <a:solidFill>
+              <a:schemeClr val="tx1"/>
+            </a:solidFill>
+            <a:prstDash val="solid"/>
+          </a:ln>
+          <a:effectLst>
+            <a:outerShdw sx="100000" sy="100000" kx="0" ky="0" algn="bl" rotWithShape="0" blurRad="76200" dist="38100" dir="5400000">
+              <a:srgbClr val="000000">
+                <a:alpha val="12000"/>
+              </a:srgbClr>
+            </a:outerShdw>
+          </a:effectLst>
+        </p:spPr>
+      </p:sp>
+      <p:sp>
+        <p:nvSpPr>
+          <p:cNvPr id="20" name="Window dot"/>
+          <p:cNvSpPr/>
+          <p:nvPr/>
+        </p:nvSpPr>
+        <p:spPr>
+          <a:xfrm>
+            <a:off x="10652760" y="1463040"/>
+            <a:ext cx="128016" cy="128016"/>
+          </a:xfrm>
+          <a:prstGeom prst="ellipse">
+            <a:avLst/>
+          </a:prstGeom>
+          <a:solidFill>
+            <a:schemeClr val="tx2"/>
+          </a:solidFill>
+          <a:ln w="12700">
+            <a:solidFill>
+              <a:schemeClr val="tx2"/>
+            </a:solidFill>
+            <a:prstDash val="solid"/>
+          </a:ln>
+        </p:spPr>
+      </p:sp>
+      <p:sp>
+        <p:nvSpPr>
+          <p:cNvPr id="21" name="Window dot"/>
+          <p:cNvSpPr/>
+          <p:nvPr/>
+        </p:nvSpPr>
+        <p:spPr>
+          <a:xfrm>
+            <a:off x="10881360" y="1463040"/>
+            <a:ext cx="128016" cy="128016"/>
+          </a:xfrm>
+          <a:prstGeom prst="ellipse">
+            <a:avLst/>
+          </a:prstGeom>
+          <a:solidFill>
+            <a:schemeClr val="accent4"/>
+          </a:solidFill>
+          <a:ln w="12700">
+            <a:solidFill>
+              <a:schemeClr val="accent4"/>
+            </a:solidFill>
+            <a:prstDash val="solid"/>
+          </a:ln>
+        </p:spPr>
+      </p:sp>
+      <p:sp>
+        <p:nvSpPr>
+          <p:cNvPr id="22" name="Window dot"/>
+          <p:cNvSpPr/>
+          <p:nvPr/>
+        </p:nvSpPr>
+        <p:spPr>
+          <a:xfrm>
+            <a:off x="11109960" y="1463040"/>
+            <a:ext cx="128016" cy="128016"/>
+          </a:xfrm>
+          <a:prstGeom prst="ellipse">
+            <a:avLst/>
+          </a:prstGeom>
+          <a:solidFill>
+            <a:schemeClr val="accent3"/>
+          </a:solidFill>
+          <a:ln w="12700">
+            <a:solidFill>
+              <a:schemeClr val="accent3"/>
+            </a:solidFill>
+            <a:prstDash val="solid"/>
+          </a:ln>
+        </p:spPr>
+      </p:sp>
+      <p:sp>
+        <p:nvSpPr>
+          <p:cNvPr id="23" name="Icon circle"/>
+          <p:cNvSpPr/>
+          <p:nvPr/>
+        </p:nvSpPr>
+        <p:spPr>
+          <a:xfrm>
+            <a:off x="8275320" y="1554480"/>
+            <a:ext cx="548640" cy="548640"/>
+          </a:xfrm>
+          <a:prstGeom prst="ellipse">
+            <a:avLst/>
+          </a:prstGeom>
+          <a:solidFill>
+            <a:schemeClr val="accent1"/>
+          </a:solidFill>
+          <a:ln w="12700">
+            <a:solidFill>
+              <a:schemeClr val="accent1"/>
+            </a:solidFill>
+            <a:prstDash val="solid"/>
+          </a:ln>
+        </p:spPr>
+      </p:sp>
+      <p:pic>
+        <p:nvPicPr>
+          <p:cNvPr id="24" name="Image 2" descr="icon">    </p:cNvPr>
+          <p:cNvPicPr>
+            <a:picLocks noChangeAspect="1"/>
+          </p:cNvPicPr>
+          <p:nvPr/>
+        </p:nvPicPr>
+        <p:blipFill>
+          <a:blip r:embed="rId3"/>
+          <a:stretch>
+            <a:fillRect/>
+          </a:stretch>
+        </p:blipFill>
+        <p:spPr>
+          <a:xfrm>
+            <a:off x="8412480" y="1691640"/>
+            <a:ext cx="274320" cy="274320"/>
+          </a:xfrm>
+          <a:prstGeom prst="rect">
+            <a:avLst/>
+          </a:prstGeom>
+        </p:spPr>
+      </p:pic>
+      <p:sp>
+        <p:nvSpPr>
+          <p:cNvPr id="25" name="Text 20"/>
+          <p:cNvSpPr txBox="1"/>
+          <p:nvPr/>
+        </p:nvSpPr>
+        <p:spPr>
+          <a:xfrm>
+            <a:off x="8961120" y="1554480"/>
+            <a:ext cx="2377440" cy="548640"/>
+          </a:xfrm>
+          <a:prstGeom prst="rect">
+            <a:avLst/>
+          </a:prstGeom>
+          <a:noFill/>
+          <a:ln/>
+        </p:spPr>
+        <p:txBody>
+          <a:bodyPr wrap="square" lIns="0" tIns="0" rIns="0" bIns="0" rtlCol="0" anchor="ctr"/>
+          <a:lstStyle/>
+          <a:p>
+            <a:pPr indent="0" marL="0">
+              <a:buNone/>
+            </a:pPr>
+            <a:r>
+              <a:rPr lang="en-US" sz="1700" b="1" dirty="0">
+                <a:solidFill>
+                  <a:schemeClr val="tx1"/>
+                </a:solidFill>
+              </a:rPr>
+              <a:t>Close &amp; protect</a:t>
+            </a:r>
+            <a:endParaRPr lang="en-US" sz="1700" dirty="0"/>
+          </a:p>
+        </p:txBody>
+      </p:sp>
+      <p:sp>
+        <p:nvSpPr>
+          <p:cNvPr id="26" name="Text 21"/>
+          <p:cNvSpPr txBox="1"/>
+          <p:nvPr/>
+        </p:nvSpPr>
+        <p:spPr>
+          <a:xfrm>
+            <a:off x="8275320" y="2240280"/>
+            <a:ext cx="3017520" cy="1051560"/>
+          </a:xfrm>
+          <a:prstGeom prst="rect">
+            <a:avLst/>
+          </a:prstGeom>
+          <a:noFill/>
+          <a:ln/>
+        </p:spPr>
+        <p:txBody>
+          <a:bodyPr wrap="square" lIns="0" tIns="0" rIns="0" bIns="0" rtlCol="0" anchor="t"/>
+          <a:lstStyle/>
+          <a:p>
+            <a:pPr indent="0" marL="0">
+              <a:buNone/>
+            </a:pPr>
+            <a:r>
+              <a:rPr lang="en-US" sz="1300" dirty="0">
+                <a:solidFill>
+                  <a:schemeClr val="accent5"/>
+                </a:solidFill>
+              </a:rPr>
+              <a:t>Close Checkpoint, Xylemx and TVS Green; keep every retainer on scope.</a:t>
+            </a:r>
+            <a:endParaRPr lang="en-US" sz="1300" dirty="0"/>
+          </a:p>
+        </p:txBody>
+      </p:sp>
+      <p:graphicFrame>
+        <p:nvGraphicFramePr>
+          <p:cNvPr id="11" name="Table 0"/>
+          <p:cNvGraphicFramePr>
+            <a:graphicFrameLocks noGrp="1"/>
+          </p:cNvGraphicFramePr>
+          <p:nvPr>
+            <p:extLst>
+              <p:ext uri="{D42A27DB-BD31-4B8C-83A1-F6EECF244321}">
+                <p14:modId xmlns:p14="http://schemas.microsoft.com/office/powerpoint/2010/main" val="1579011935"/>
+              </p:ext>
+            </p:extLst>
+          </p:nvPr>
+        </p:nvGraphicFramePr>
+        <p:xfrm>
+          <a:off x="548640" y="3703320"/>
+          <a:ext cx="11064240" cy="914400"/>
+        </p:xfrm>
+        <a:graphic>
+          <a:graphicData uri="http://schemas.openxmlformats.org/drawingml/2006/table">
+            <a:tbl>
+              <a:tblPr/>
+              <a:tblGrid>
+                <a:gridCol w="4206240"/>
+                <a:gridCol w="2286000"/>
+                <a:gridCol w="2286000"/>
+                <a:gridCol w="2286000"/>
+              </a:tblGrid>
+              <a:tr h="475488">
+                <a:tc>
+                  <a:txBody>
+                    <a:bodyPr/>
+                    <a:lstStyle/>
+                    <a:p>
+                      <a:pPr algn="l" indent="0" marL="0">
+                        <a:buNone/>
+                      </a:pPr>
+                      <a:r>
+                        <a:rPr lang="en-US" sz="1400" b="1" dirty="0">
+                          <a:solidFill>
+                            <a:schemeClr val="bg1"/>
+                          </a:solidFill>
+                        </a:rPr>
+                        <a:t>Target</a:t>
+                      </a:r>
+                      <a:endParaRPr lang="en-US" sz="1400" dirty="0"/>
+                    </a:p>
+                  </a:txBody>
+                  <a:tcPr marL="73152" marR="73152" marT="73152" marB="73152" anchor="ctr">
+                    <a:lnL w="12700" cap="flat" cmpd="sng" algn="ctr">
+                      <a:solidFill>
+                        <a:srgbClr val="FFF7EC"/>
+                      </a:solidFill>
+                      <a:prstDash val="solid"/>
+                      <a:round/>
+                      <a:headEnd type="none" w="med" len="med"/>
+                      <a:tailEnd type="none" w="med" len="med"/>
+                    </a:lnL>
+                    <a:lnR w="12700" cap="flat" cmpd="sng" algn="ctr">
+                      <a:solidFill>
+                        <a:srgbClr val="FFF7EC"/>
+                      </a:solidFill>
+                      <a:prstDash val="solid"/>
+                      <a:round/>
+                      <a:headEnd type="none" w="med" len="med"/>
+                      <a:tailEnd type="none" w="med" len="med"/>
+                    </a:lnR>
+                    <a:lnT w="12700" cap="flat" cmpd="sng" algn="ctr">
+                      <a:solidFill>
+                        <a:srgbClr val="FFF7EC"/>
+                      </a:solidFill>
+                      <a:prstDash val="solid"/>
+                      <a:round/>
+                      <a:headEnd type="none" w="med" len="med"/>
+                      <a:tailEnd type="none" w="med" len="med"/>
+                    </a:lnT>
+                    <a:lnB w="12700" cap="flat" cmpd="sng" algn="ctr">
+                      <a:solidFill>
+                        <a:srgbClr val="FFF7EC"/>
+                      </a:solidFill>
+                      <a:prstDash val="solid"/>
+                      <a:round/>
+                      <a:headEnd type="none" w="med" len="med"/>
+                      <a:tailEnd type="none" w="med" len="med"/>
+                    </a:lnB>
+                    <a:solidFill>
+                      <a:schemeClr val="tx2"/>
+                    </a:solidFill>
+                  </a:tcPr>
+                </a:tc>
+                <a:tc>
+                  <a:txBody>
+                    <a:bodyPr/>
+                    <a:lstStyle/>
+                    <a:p>
+                      <a:pPr algn="ctr" indent="0" marL="0">
+                        <a:buNone/>
+                      </a:pPr>
+                      <a:r>
+                        <a:rPr lang="en-US" sz="1400" b="1" dirty="0">
+                          <a:solidFill>
+                            <a:schemeClr val="bg1"/>
+                          </a:solidFill>
+                        </a:rPr>
+                        <a:t>Oct (actual)</a:t>
+                      </a:r>
+                      <a:endParaRPr lang="en-US" sz="1400" dirty="0"/>
+                    </a:p>
+                  </a:txBody>
+                  <a:tcPr marL="73152" marR="73152" marT="73152" marB="73152" anchor="ctr">
+                    <a:lnL w="12700" cap="flat" cmpd="sng" algn="ctr">
+                      <a:solidFill>
+                        <a:srgbClr val="FFF7EC"/>
+                      </a:solidFill>
+                      <a:prstDash val="solid"/>
+                      <a:round/>
+                      <a:headEnd type="none" w="med" len="med"/>
+                      <a:tailEnd type="none" w="med" len="med"/>
+                    </a:lnL>
+                    <a:lnR w="12700" cap="flat" cmpd="sng" algn="ctr">
+                      <a:solidFill>
+                        <a:srgbClr val="FFF7EC"/>
+                      </a:solidFill>
+                      <a:prstDash val="solid"/>
+                      <a:round/>
+                      <a:headEnd type="none" w="med" len="med"/>
+                      <a:tailEnd type="none" w="med" len="med"/>
+                    </a:lnR>
+                    <a:lnT w="12700" cap="flat" cmpd="sng" algn="ctr">
+                      <a:solidFill>
+                        <a:srgbClr val="FFF7EC"/>
+                      </a:solidFill>
+                      <a:prstDash val="solid"/>
+                      <a:round/>
+                      <a:headEnd type="none" w="med" len="med"/>
+                      <a:tailEnd type="none" w="med" len="med"/>
+                    </a:lnT>
+                    <a:lnB w="12700" cap="flat" cmpd="sng" algn="ctr">
+                      <a:solidFill>
+                        <a:srgbClr val="FFF7EC"/>
+                      </a:solidFill>
+                      <a:prstDash val="solid"/>
+                      <a:round/>
+                      <a:headEnd type="none" w="med" len="med"/>
+                      <a:tailEnd type="none" w="med" len="med"/>
+                    </a:lnB>
+                    <a:solidFill>
+                      <a:schemeClr val="tx2"/>
+                    </a:solidFill>
+                  </a:tcPr>
+                </a:tc>
+                <a:tc>
+                  <a:txBody>
+                    <a:bodyPr/>
+                    <a:lstStyle/>
+                    <a:p>
+                      <a:pPr algn="ctr" indent="0" marL="0">
+                        <a:buNone/>
+                      </a:pPr>
+                      <a:r>
+                        <a:rPr lang="en-US" sz="1400" b="1" dirty="0">
+                          <a:solidFill>
+                            <a:schemeClr val="bg1"/>
+                          </a:solidFill>
+                        </a:rPr>
+                        <a:t>Nov</a:t>
+                      </a:r>
+                      <a:endParaRPr lang="en-US" sz="1400" dirty="0"/>
+                    </a:p>
+                  </a:txBody>
+                  <a:tcPr marL="73152" marR="73152" marT="73152" marB="73152" anchor="ctr">
+                    <a:lnL w="12700" cap="flat" cmpd="sng" algn="ctr">
+                      <a:solidFill>
+                        <a:srgbClr val="FFF7EC"/>
+                      </a:solidFill>
+                      <a:prstDash val="solid"/>
+                      <a:round/>
+                      <a:headEnd type="none" w="med" len="med"/>
+                      <a:tailEnd type="none" w="med" len="med"/>
+                    </a:lnL>
+                    <a:lnR w="12700" cap="flat" cmpd="sng" algn="ctr">
+                      <a:solidFill>
+                        <a:srgbClr val="FFF7EC"/>
+                      </a:solidFill>
+                      <a:prstDash val="solid"/>
+                      <a:round/>
+                      <a:headEnd type="none" w="med" len="med"/>
+                      <a:tailEnd type="none" w="med" len="med"/>
+                    </a:lnR>
+                    <a:lnT w="12700" cap="flat" cmpd="sng" algn="ctr">
+                      <a:solidFill>
+                        <a:srgbClr val="FFF7EC"/>
+                      </a:solidFill>
+                      <a:prstDash val="solid"/>
+                      <a:round/>
+                      <a:headEnd type="none" w="med" len="med"/>
+                      <a:tailEnd type="none" w="med" len="med"/>
+                    </a:lnT>
+                    <a:lnB w="12700" cap="flat" cmpd="sng" algn="ctr">
+                      <a:solidFill>
+                        <a:srgbClr val="FFF7EC"/>
+                      </a:solidFill>
+                      <a:prstDash val="solid"/>
+                      <a:round/>
+                      <a:headEnd type="none" w="med" len="med"/>
+                      <a:tailEnd type="none" w="med" len="med"/>
+                    </a:lnB>
+                    <a:solidFill>
+                      <a:schemeClr val="tx2"/>
+                    </a:solidFill>
+                  </a:tcPr>
+                </a:tc>
+                <a:tc>
+                  <a:txBody>
+                    <a:bodyPr/>
+                    <a:lstStyle/>
+                    <a:p>
+                      <a:pPr algn="ctr" indent="0" marL="0">
+                        <a:buNone/>
+                      </a:pPr>
+                      <a:r>
+                        <a:rPr lang="en-US" sz="1400" b="1" dirty="0">
+                          <a:solidFill>
+                            <a:schemeClr val="bg1"/>
+                          </a:solidFill>
+                        </a:rPr>
+                        <a:t>Dec</a:t>
+                      </a:r>
+                      <a:endParaRPr lang="en-US" sz="1400" dirty="0"/>
+                    </a:p>
+                  </a:txBody>
+                  <a:tcPr marL="73152" marR="73152" marT="73152" marB="73152" anchor="ctr">
+                    <a:lnL w="12700" cap="flat" cmpd="sng" algn="ctr">
+                      <a:solidFill>
+                        <a:srgbClr val="FFF7EC"/>
+                      </a:solidFill>
+                      <a:prstDash val="solid"/>
+                      <a:round/>
+                      <a:headEnd type="none" w="med" len="med"/>
+                      <a:tailEnd type="none" w="med" len="med"/>
+                    </a:lnL>
+                    <a:lnR w="12700" cap="flat" cmpd="sng" algn="ctr">
+                      <a:solidFill>
+                        <a:srgbClr val="FFF7EC"/>
+                      </a:solidFill>
+                      <a:prstDash val="solid"/>
+                      <a:round/>
+                      <a:headEnd type="none" w="med" len="med"/>
+                      <a:tailEnd type="none" w="med" len="med"/>
+                    </a:lnR>
+                    <a:lnT w="12700" cap="flat" cmpd="sng" algn="ctr">
+                      <a:solidFill>
+                        <a:srgbClr val="FFF7EC"/>
+                      </a:solidFill>
+                      <a:prstDash val="solid"/>
+                      <a:round/>
+                      <a:headEnd type="none" w="med" len="med"/>
+                      <a:tailEnd type="none" w="med" len="med"/>
+                    </a:lnT>
+                    <a:lnB w="12700" cap="flat" cmpd="sng" algn="ctr">
+                      <a:solidFill>
+                        <a:srgbClr val="FFF7EC"/>
+                      </a:solidFill>
+                      <a:prstDash val="solid"/>
+                      <a:round/>
+                      <a:headEnd type="none" w="med" len="med"/>
+                      <a:tailEnd type="none" w="med" len="med"/>
+                    </a:lnB>
+                    <a:solidFill>
+                      <a:schemeClr val="tx2"/>
+                    </a:solidFill>
+                  </a:tcPr>
+                </a:tc>
+              </a:tr>
+              <a:tr h="475488">
+                <a:tc>
+                  <a:txBody>
+                    <a:bodyPr/>
+                    <a:lstStyle/>
+                    <a:p>
+                      <a:pPr indent="0" marL="0">
+                        <a:buNone/>
+                      </a:pPr>
+                      <a:r>
+                        <a:rPr lang="en-US" sz="1400" b="1" dirty="0">
+                          <a:solidFill>
+                            <a:schemeClr val="tx1"/>
+                          </a:solidFill>
+                        </a:rPr>
+                        <a:t>Real-estate AI videos delivered</a:t>
+                      </a:r>
+                      <a:endParaRPr lang="en-US" sz="1400" dirty="0"/>
+                    </a:p>
+                  </a:txBody>
+                  <a:tcPr marL="73152" marR="73152" marT="73152" marB="73152" anchor="ctr">
+                    <a:lnL w="12700" cap="flat" cmpd="sng" algn="ctr">
+                      <a:solidFill>
+                        <a:srgbClr val="FFF7EC"/>
+                      </a:solidFill>
+                      <a:prstDash val="solid"/>
+                      <a:round/>
+                      <a:headEnd type="none" w="med" len="med"/>
+                      <a:tailEnd type="none" w="med" len="med"/>
+                    </a:lnL>
+                    <a:lnR w="12700" cap="flat" cmpd="sng" algn="ctr">
+                      <a:solidFill>
+                        <a:srgbClr val="FFF7EC"/>
+                      </a:solidFill>
+                      <a:prstDash val="solid"/>
+                      <a:round/>
+                      <a:headEnd type="none" w="med" len="med"/>
+                      <a:tailEnd type="none" w="med" len="med"/>
+                    </a:lnR>
+                    <a:lnT w="12700" cap="flat" cmpd="sng" algn="ctr">
+                      <a:solidFill>
+                        <a:srgbClr val="FFF7EC"/>
+                      </a:solidFill>
+                      <a:prstDash val="solid"/>
+                      <a:round/>
+                      <a:headEnd type="none" w="med" len="med"/>
+                      <a:tailEnd type="none" w="med" len="med"/>
+                    </a:lnT>
+                    <a:lnB w="12700" cap="flat" cmpd="sng" algn="ctr">
+                      <a:solidFill>
+                        <a:srgbClr val="FFF7EC"/>
+                      </a:solidFill>
+                      <a:prstDash val="solid"/>
+                      <a:round/>
+                      <a:headEnd type="none" w="med" len="med"/>
+                      <a:tailEnd type="none" w="med" len="med"/>
+                    </a:lnB>
+                    <a:solidFill>
+                      <a:schemeClr val="bg1"/>
+                    </a:solidFill>
+                  </a:tcPr>
+                </a:tc>
+                <a:tc>
+                  <a:txBody>
+                    <a:bodyPr/>
+                    <a:lstStyle/>
+                    <a:p>
+                      <a:pPr algn="ctr" indent="0" marL="0">
+                        <a:buNone/>
+                      </a:pPr>
+                      <a:r>
+                        <a:rPr lang="en-US" sz="1400" i="1" dirty="0">
+                          <a:solidFill>
+                            <a:srgbClr val="B3561A"/>
+                          </a:solidFill>
+                        </a:rPr>
+                        <a:t>[add]</a:t>
+                      </a:r>
+                      <a:endParaRPr lang="en-US" sz="1400" dirty="0"/>
+                    </a:p>
+                  </a:txBody>
+                  <a:tcPr marL="73152" marR="73152" marT="73152" marB="73152" anchor="ctr">
+                    <a:lnL w="12700" cap="flat" cmpd="sng" algn="ctr">
+                      <a:solidFill>
+                        <a:srgbClr val="FFF7EC"/>
+                      </a:solidFill>
+                      <a:prstDash val="solid"/>
+                      <a:round/>
+                      <a:headEnd type="none" w="med" len="med"/>
+                      <a:tailEnd type="none" w="med" len="med"/>
+                    </a:lnL>
+                    <a:lnR w="12700" cap="flat" cmpd="sng" algn="ctr">
+                      <a:solidFill>
+                        <a:srgbClr val="FFF7EC"/>
+                      </a:solidFill>
+                      <a:prstDash val="solid"/>
+                      <a:round/>
+                      <a:headEnd type="none" w="med" len="med"/>
+                      <a:tailEnd type="none" w="med" len="med"/>
+                    </a:lnR>
+                    <a:lnT w="12700" cap="flat" cmpd="sng" algn="ctr">
+                      <a:solidFill>
+                        <a:srgbClr val="FFF7EC"/>
+                      </a:solidFill>
+                      <a:prstDash val="solid"/>
+                      <a:round/>
+                      <a:headEnd type="none" w="med" len="med"/>
+                      <a:tailEnd type="none" w="med" len="med"/>
+                    </a:lnT>
+                    <a:lnB w="12700" cap="flat" cmpd="sng" algn="ctr">
+                      <a:solidFill>
+                        <a:srgbClr val="FFF7EC"/>
+                      </a:solidFill>
+                      <a:prstDash val="solid"/>
+                      <a:round/>
+                      <a:headEnd type="none" w="med" len="med"/>
+                      <a:tailEnd type="none" w="med" len="med"/>
+                    </a:lnB>
+                    <a:solidFill>
+                      <a:srgbClr val="FDE5CC"/>
+                    </a:solidFill>
+                  </a:tcPr>
+                </a:tc>
+                <a:tc>
+                  <a:txBody>
+                    <a:bodyPr/>
+                    <a:lstStyle/>
+                    <a:p>
+                      <a:pPr algn="ctr" indent="0" marL="0">
+                        <a:buNone/>
+                      </a:pPr>
+                      <a:r>
+                        <a:rPr lang="en-US" sz="1400" i="1" dirty="0">
+                          <a:solidFill>
+                            <a:srgbClr val="B3561A"/>
+                          </a:solidFill>
+                        </a:rPr>
+                        <a:t>[add]</a:t>
+                      </a:r>
+                      <a:endParaRPr lang="en-US" sz="1400" dirty="0"/>
+                    </a:p>
+                  </a:txBody>
+                  <a:tcPr marL="73152" marR="73152" marT="73152" marB="73152" anchor="ctr">
+                    <a:lnL w="12700" cap="flat" cmpd="sng" algn="ctr">
+                      <a:solidFill>
+                        <a:srgbClr val="FFF7EC"/>
+                      </a:solidFill>
+                      <a:prstDash val="solid"/>
+                      <a:round/>
+                      <a:headEnd type="none" w="med" len="med"/>
+                      <a:tailEnd type="none" w="med" len="med"/>
+                    </a:lnL>
+                    <a:lnR w="12700" cap="flat" cmpd="sng" algn="ctr">
+                      <a:solidFill>
+                        <a:srgbClr val="FFF7EC"/>
+                      </a:solidFill>
+                      <a:prstDash val="solid"/>
+                      <a:round/>
+                      <a:headEnd type="none" w="med" len="med"/>
+                      <a:tailEnd type="none" w="med" len="med"/>
+                    </a:lnR>
+                    <a:lnT w="12700" cap="flat" cmpd="sng" algn="ctr">
+                      <a:solidFill>
+                        <a:srgbClr val="FFF7EC"/>
+                      </a:solidFill>
+                      <a:prstDash val="solid"/>
+                      <a:round/>
+                      <a:headEnd type="none" w="med" len="med"/>
+                      <a:tailEnd type="none" w="med" len="med"/>
+                    </a:lnT>
+                    <a:lnB w="12700" cap="flat" cmpd="sng" algn="ctr">
+                      <a:solidFill>
+                        <a:srgbClr val="FFF7EC"/>
+                      </a:solidFill>
+                      <a:prstDash val="solid"/>
+                      <a:round/>
+                      <a:headEnd type="none" w="med" len="med"/>
+                      <a:tailEnd type="none" w="med" len="med"/>
+                    </a:lnB>
+                    <a:solidFill>
+                      <a:srgbClr val="FDE5CC"/>
+                    </a:solidFill>
+                  </a:tcPr>
+                </a:tc>
+                <a:tc>
+                  <a:txBody>
+                    <a:bodyPr/>
+                    <a:lstStyle/>
+                    <a:p>
+                      <a:pPr algn="ctr" indent="0" marL="0">
+                        <a:buNone/>
+                      </a:pPr>
+                      <a:r>
+                        <a:rPr lang="en-US" sz="1400" i="1" dirty="0">
+                          <a:solidFill>
+                            <a:srgbClr val="B3561A"/>
+                          </a:solidFill>
+                        </a:rPr>
+                        <a:t>[add]</a:t>
+                      </a:r>
+                      <a:endParaRPr lang="en-US" sz="1400" dirty="0"/>
+                    </a:p>
+                  </a:txBody>
+                  <a:tcPr marL="73152" marR="73152" marT="73152" marB="73152" anchor="ctr">
+                    <a:lnL w="12700" cap="flat" cmpd="sng" algn="ctr">
+                      <a:solidFill>
+                        <a:srgbClr val="FFF7EC"/>
+                      </a:solidFill>
+                      <a:prstDash val="solid"/>
+                      <a:round/>
+                      <a:headEnd type="none" w="med" len="med"/>
+                      <a:tailEnd type="none" w="med" len="med"/>
+                    </a:lnL>
+                    <a:lnR w="12700" cap="flat" cmpd="sng" algn="ctr">
+                      <a:solidFill>
+                        <a:srgbClr val="FFF7EC"/>
+                      </a:solidFill>
+                      <a:prstDash val="solid"/>
+                      <a:round/>
+                      <a:headEnd type="none" w="med" len="med"/>
+                      <a:tailEnd type="none" w="med" len="med"/>
+                    </a:lnR>
+                    <a:lnT w="12700" cap="flat" cmpd="sng" algn="ctr">
+                      <a:solidFill>
+                        <a:srgbClr val="FFF7EC"/>
+                      </a:solidFill>
+                      <a:prstDash val="solid"/>
+                      <a:round/>
+                      <a:headEnd type="none" w="med" len="med"/>
+                      <a:tailEnd type="none" w="med" len="med"/>
+                    </a:lnT>
+                    <a:lnB w="12700" cap="flat" cmpd="sng" algn="ctr">
+                      <a:solidFill>
+                        <a:srgbClr val="FFF7EC"/>
+                      </a:solidFill>
+                      <a:prstDash val="solid"/>
+                      <a:round/>
+                      <a:headEnd type="none" w="med" len="med"/>
+                      <a:tailEnd type="none" w="med" len="med"/>
+                    </a:lnB>
+                    <a:solidFill>
+                      <a:srgbClr val="FDE5CC"/>
+                    </a:solidFill>
+                  </a:tcPr>
+                </a:tc>
+              </a:tr>
+              <a:tr h="475488">
+                <a:tc>
+                  <a:txBody>
+                    <a:bodyPr/>
+                    <a:lstStyle/>
+                    <a:p>
+                      <a:pPr indent="0" marL="0">
+                        <a:buNone/>
+                      </a:pPr>
+                      <a:r>
+                        <a:rPr lang="en-US" sz="1400" b="1" dirty="0">
+                          <a:solidFill>
+                            <a:schemeClr val="tx1"/>
+                          </a:solidFill>
+                        </a:rPr>
+                        <a:t>AI-led creative deliverables</a:t>
+                      </a:r>
+                      <a:endParaRPr lang="en-US" sz="1400" dirty="0"/>
+                    </a:p>
+                  </a:txBody>
+                  <a:tcPr marL="73152" marR="73152" marT="73152" marB="73152" anchor="ctr">
+                    <a:lnL w="12700" cap="flat" cmpd="sng" algn="ctr">
+                      <a:solidFill>
+                        <a:srgbClr val="FFF7EC"/>
+                      </a:solidFill>
+                      <a:prstDash val="solid"/>
+                      <a:round/>
+                      <a:headEnd type="none" w="med" len="med"/>
+                      <a:tailEnd type="none" w="med" len="med"/>
+                    </a:lnL>
+                    <a:lnR w="12700" cap="flat" cmpd="sng" algn="ctr">
+                      <a:solidFill>
+                        <a:srgbClr val="FFF7EC"/>
+                      </a:solidFill>
+                      <a:prstDash val="solid"/>
+                      <a:round/>
+                      <a:headEnd type="none" w="med" len="med"/>
+                      <a:tailEnd type="none" w="med" len="med"/>
+                    </a:lnR>
+                    <a:lnT w="12700" cap="flat" cmpd="sng" algn="ctr">
+                      <a:solidFill>
+                        <a:srgbClr val="FFF7EC"/>
+                      </a:solidFill>
+                      <a:prstDash val="solid"/>
+                      <a:round/>
+                      <a:headEnd type="none" w="med" len="med"/>
+                      <a:tailEnd type="none" w="med" len="med"/>
+                    </a:lnT>
+                    <a:lnB w="12700" cap="flat" cmpd="sng" algn="ctr">
+                      <a:solidFill>
+                        <a:srgbClr val="FFF7EC"/>
+                      </a:solidFill>
+                      <a:prstDash val="solid"/>
+                      <a:round/>
+                      <a:headEnd type="none" w="med" len="med"/>
+                      <a:tailEnd type="none" w="med" len="med"/>
+                    </a:lnB>
+                    <a:solidFill>
+                      <a:schemeClr val="bg1"/>
+                    </a:solidFill>
+                  </a:tcPr>
+                </a:tc>
+                <a:tc>
+                  <a:txBody>
+                    <a:bodyPr/>
+                    <a:lstStyle/>
+                    <a:p>
+                      <a:pPr algn="ctr" indent="0" marL="0">
+                        <a:buNone/>
+                      </a:pPr>
+                      <a:r>
+                        <a:rPr lang="en-US" sz="1400" i="1" dirty="0">
+                          <a:solidFill>
+                            <a:srgbClr val="B3561A"/>
+                          </a:solidFill>
+                        </a:rPr>
+                        <a:t>[add]</a:t>
+                      </a:r>
+                      <a:endParaRPr lang="en-US" sz="1400" dirty="0"/>
+                    </a:p>
+                  </a:txBody>
+                  <a:tcPr marL="73152" marR="73152" marT="73152" marB="73152" anchor="ctr">
+                    <a:lnL w="12700" cap="flat" cmpd="sng" algn="ctr">
+                      <a:solidFill>
+                        <a:srgbClr val="FFF7EC"/>
+                      </a:solidFill>
+                      <a:prstDash val="solid"/>
+                      <a:round/>
+                      <a:headEnd type="none" w="med" len="med"/>
+                      <a:tailEnd type="none" w="med" len="med"/>
+                    </a:lnL>
+                    <a:lnR w="12700" cap="flat" cmpd="sng" algn="ctr">
+                      <a:solidFill>
+                        <a:srgbClr val="FFF7EC"/>
+                      </a:solidFill>
+                      <a:prstDash val="solid"/>
+                      <a:round/>
+                      <a:headEnd type="none" w="med" len="med"/>
+                      <a:tailEnd type="none" w="med" len="med"/>
+                    </a:lnR>
+                    <a:lnT w="12700" cap="flat" cmpd="sng" algn="ctr">
+                      <a:solidFill>
+                        <a:srgbClr val="FFF7EC"/>
+                      </a:solidFill>
+                      <a:prstDash val="solid"/>
+                      <a:round/>
+                      <a:headEnd type="none" w="med" len="med"/>
+                      <a:tailEnd type="none" w="med" len="med"/>
+                    </a:lnT>
+                    <a:lnB w="12700" cap="flat" cmpd="sng" algn="ctr">
+                      <a:solidFill>
+                        <a:srgbClr val="FFF7EC"/>
+                      </a:solidFill>
+                      <a:prstDash val="solid"/>
+                      <a:round/>
+                      <a:headEnd type="none" w="med" len="med"/>
+                      <a:tailEnd type="none" w="med" len="med"/>
+                    </a:lnB>
+                    <a:solidFill>
+                      <a:srgbClr val="FDE5CC"/>
+                    </a:solidFill>
+                  </a:tcPr>
+                </a:tc>
+                <a:tc>
+                  <a:txBody>
+                    <a:bodyPr/>
+                    <a:lstStyle/>
+                    <a:p>
+                      <a:pPr algn="ctr" indent="0" marL="0">
+                        <a:buNone/>
+                      </a:pPr>
+                      <a:r>
+                        <a:rPr lang="en-US" sz="1400" i="1" dirty="0">
+                          <a:solidFill>
+                            <a:srgbClr val="B3561A"/>
+                          </a:solidFill>
+                        </a:rPr>
+                        <a:t>[add]</a:t>
+                      </a:r>
+                      <a:endParaRPr lang="en-US" sz="1400" dirty="0"/>
+                    </a:p>
+                  </a:txBody>
+                  <a:tcPr marL="73152" marR="73152" marT="73152" marB="73152" anchor="ctr">
+                    <a:lnL w="12700" cap="flat" cmpd="sng" algn="ctr">
+                      <a:solidFill>
+                        <a:srgbClr val="FFF7EC"/>
+                      </a:solidFill>
+                      <a:prstDash val="solid"/>
+                      <a:round/>
+                      <a:headEnd type="none" w="med" len="med"/>
+                      <a:tailEnd type="none" w="med" len="med"/>
+                    </a:lnL>
+                    <a:lnR w="12700" cap="flat" cmpd="sng" algn="ctr">
+                      <a:solidFill>
+                        <a:srgbClr val="FFF7EC"/>
+                      </a:solidFill>
+                      <a:prstDash val="solid"/>
+                      <a:round/>
+                      <a:headEnd type="none" w="med" len="med"/>
+                      <a:tailEnd type="none" w="med" len="med"/>
+                    </a:lnR>
+                    <a:lnT w="12700" cap="flat" cmpd="sng" algn="ctr">
+                      <a:solidFill>
+                        <a:srgbClr val="FFF7EC"/>
+                      </a:solidFill>
+                      <a:prstDash val="solid"/>
+                      <a:round/>
+                      <a:headEnd type="none" w="med" len="med"/>
+                      <a:tailEnd type="none" w="med" len="med"/>
+                    </a:lnT>
+                    <a:lnB w="12700" cap="flat" cmpd="sng" algn="ctr">
+                      <a:solidFill>
+                        <a:srgbClr val="FFF7EC"/>
+                      </a:solidFill>
+                      <a:prstDash val="solid"/>
+                      <a:round/>
+                      <a:headEnd type="none" w="med" len="med"/>
+                      <a:tailEnd type="none" w="med" len="med"/>
+                    </a:lnB>
+                    <a:solidFill>
+                      <a:srgbClr val="FDE5CC"/>
+                    </a:solidFill>
+                  </a:tcPr>
+                </a:tc>
+                <a:tc>
+                  <a:txBody>
+                    <a:bodyPr/>
+                    <a:lstStyle/>
+                    <a:p>
+                      <a:pPr algn="ctr" indent="0" marL="0">
+                        <a:buNone/>
+                      </a:pPr>
+                      <a:r>
+                        <a:rPr lang="en-US" sz="1400" i="1" dirty="0">
+                          <a:solidFill>
+                            <a:srgbClr val="B3561A"/>
+                          </a:solidFill>
+                        </a:rPr>
+                        <a:t>[add]</a:t>
+                      </a:r>
+                      <a:endParaRPr lang="en-US" sz="1400" dirty="0"/>
+                    </a:p>
+                  </a:txBody>
+                  <a:tcPr marL="73152" marR="73152" marT="73152" marB="73152" anchor="ctr">
+                    <a:lnL w="12700" cap="flat" cmpd="sng" algn="ctr">
+                      <a:solidFill>
+                        <a:srgbClr val="FFF7EC"/>
+                      </a:solidFill>
+                      <a:prstDash val="solid"/>
+                      <a:round/>
+                      <a:headEnd type="none" w="med" len="med"/>
+                      <a:tailEnd type="none" w="med" len="med"/>
+                    </a:lnL>
+                    <a:lnR w="12700" cap="flat" cmpd="sng" algn="ctr">
+                      <a:solidFill>
+                        <a:srgbClr val="FFF7EC"/>
+                      </a:solidFill>
+                      <a:prstDash val="solid"/>
+                      <a:round/>
+                      <a:headEnd type="none" w="med" len="med"/>
+                      <a:tailEnd type="none" w="med" len="med"/>
+                    </a:lnR>
+                    <a:lnT w="12700" cap="flat" cmpd="sng" algn="ctr">
+                      <a:solidFill>
+                        <a:srgbClr val="FFF7EC"/>
+                      </a:solidFill>
+                      <a:prstDash val="solid"/>
+                      <a:round/>
+                      <a:headEnd type="none" w="med" len="med"/>
+                      <a:tailEnd type="none" w="med" len="med"/>
+                    </a:lnT>
+                    <a:lnB w="12700" cap="flat" cmpd="sng" algn="ctr">
+                      <a:solidFill>
+                        <a:srgbClr val="FFF7EC"/>
+                      </a:solidFill>
+                      <a:prstDash val="solid"/>
+                      <a:round/>
+                      <a:headEnd type="none" w="med" len="med"/>
+                      <a:tailEnd type="none" w="med" len="med"/>
+                    </a:lnB>
+                    <a:solidFill>
+                      <a:srgbClr val="FDE5CC"/>
+                    </a:solidFill>
+                  </a:tcPr>
+                </a:tc>
+              </a:tr>
+              <a:tr h="475488">
+                <a:tc>
+                  <a:txBody>
+                    <a:bodyPr/>
+                    <a:lstStyle/>
+                    <a:p>
+                      <a:pPr indent="0" marL="0">
+                        <a:buNone/>
+                      </a:pPr>
+                      <a:r>
+                        <a:rPr lang="en-US" sz="1400" b="1" dirty="0">
+                          <a:solidFill>
+                            <a:schemeClr val="tx1"/>
+                          </a:solidFill>
+                        </a:rPr>
+                        <a:t>Retainer delivery vs. scope</a:t>
+                      </a:r>
+                      <a:endParaRPr lang="en-US" sz="1400" dirty="0"/>
+                    </a:p>
+                  </a:txBody>
+                  <a:tcPr marL="73152" marR="73152" marT="73152" marB="73152" anchor="ctr">
+                    <a:lnL w="12700" cap="flat" cmpd="sng" algn="ctr">
+                      <a:solidFill>
+                        <a:srgbClr val="FFF7EC"/>
+                      </a:solidFill>
+                      <a:prstDash val="solid"/>
+                      <a:round/>
+                      <a:headEnd type="none" w="med" len="med"/>
+                      <a:tailEnd type="none" w="med" len="med"/>
+                    </a:lnL>
+                    <a:lnR w="12700" cap="flat" cmpd="sng" algn="ctr">
+                      <a:solidFill>
+                        <a:srgbClr val="FFF7EC"/>
+                      </a:solidFill>
+                      <a:prstDash val="solid"/>
+                      <a:round/>
+                      <a:headEnd type="none" w="med" len="med"/>
+                      <a:tailEnd type="none" w="med" len="med"/>
+                    </a:lnR>
+                    <a:lnT w="12700" cap="flat" cmpd="sng" algn="ctr">
+                      <a:solidFill>
+                        <a:srgbClr val="FFF7EC"/>
+                      </a:solidFill>
+                      <a:prstDash val="solid"/>
+                      <a:round/>
+                      <a:headEnd type="none" w="med" len="med"/>
+                      <a:tailEnd type="none" w="med" len="med"/>
+                    </a:lnT>
+                    <a:lnB w="12700" cap="flat" cmpd="sng" algn="ctr">
+                      <a:solidFill>
+                        <a:srgbClr val="FFF7EC"/>
+                      </a:solidFill>
+                      <a:prstDash val="solid"/>
+                      <a:round/>
+                      <a:headEnd type="none" w="med" len="med"/>
+                      <a:tailEnd type="none" w="med" len="med"/>
+                    </a:lnB>
+                    <a:solidFill>
+                      <a:schemeClr val="bg1"/>
+                    </a:solidFill>
+                  </a:tcPr>
+                </a:tc>
+                <a:tc>
+                  <a:txBody>
+                    <a:bodyPr/>
+                    <a:lstStyle/>
+                    <a:p>
+                      <a:pPr algn="ctr" indent="0" marL="0">
+                        <a:buNone/>
+                      </a:pPr>
+                      <a:r>
+                        <a:rPr lang="en-US" sz="1400" i="1" dirty="0">
+                          <a:solidFill>
+                            <a:srgbClr val="B3561A"/>
+                          </a:solidFill>
+                        </a:rPr>
+                        <a:t>[add]</a:t>
+                      </a:r>
+                      <a:endParaRPr lang="en-US" sz="1400" dirty="0"/>
+                    </a:p>
+                  </a:txBody>
+                  <a:tcPr marL="73152" marR="73152" marT="73152" marB="73152" anchor="ctr">
+                    <a:lnL w="12700" cap="flat" cmpd="sng" algn="ctr">
+                      <a:solidFill>
+                        <a:srgbClr val="FFF7EC"/>
+                      </a:solidFill>
+                      <a:prstDash val="solid"/>
+                      <a:round/>
+                      <a:headEnd type="none" w="med" len="med"/>
+                      <a:tailEnd type="none" w="med" len="med"/>
+                    </a:lnL>
+                    <a:lnR w="12700" cap="flat" cmpd="sng" algn="ctr">
+                      <a:solidFill>
+                        <a:srgbClr val="FFF7EC"/>
+                      </a:solidFill>
+                      <a:prstDash val="solid"/>
+                      <a:round/>
+                      <a:headEnd type="none" w="med" len="med"/>
+                      <a:tailEnd type="none" w="med" len="med"/>
+                    </a:lnR>
+                    <a:lnT w="12700" cap="flat" cmpd="sng" algn="ctr">
+                      <a:solidFill>
+                        <a:srgbClr val="FFF7EC"/>
+                      </a:solidFill>
+                      <a:prstDash val="solid"/>
+                      <a:round/>
+                      <a:headEnd type="none" w="med" len="med"/>
+                      <a:tailEnd type="none" w="med" len="med"/>
+                    </a:lnT>
+                    <a:lnB w="12700" cap="flat" cmpd="sng" algn="ctr">
+                      <a:solidFill>
+                        <a:srgbClr val="FFF7EC"/>
+                      </a:solidFill>
+                      <a:prstDash val="solid"/>
+                      <a:round/>
+                      <a:headEnd type="none" w="med" len="med"/>
+                      <a:tailEnd type="none" w="med" len="med"/>
+                    </a:lnB>
+                    <a:solidFill>
+                      <a:srgbClr val="FDE5CC"/>
+                    </a:solidFill>
+                  </a:tcPr>
+                </a:tc>
+                <a:tc>
+                  <a:txBody>
+                    <a:bodyPr/>
+                    <a:lstStyle/>
+                    <a:p>
+                      <a:pPr algn="ctr" indent="0" marL="0">
+                        <a:buNone/>
+                      </a:pPr>
+                      <a:r>
+                        <a:rPr lang="en-US" sz="1400" i="1" dirty="0">
+                          <a:solidFill>
+                            <a:srgbClr val="B3561A"/>
+                          </a:solidFill>
+                        </a:rPr>
+                        <a:t>[add]</a:t>
+                      </a:r>
+                      <a:endParaRPr lang="en-US" sz="1400" dirty="0"/>
+                    </a:p>
+                  </a:txBody>
+                  <a:tcPr marL="73152" marR="73152" marT="73152" marB="73152" anchor="ctr">
+                    <a:lnL w="12700" cap="flat" cmpd="sng" algn="ctr">
+                      <a:solidFill>
+                        <a:srgbClr val="FFF7EC"/>
+                      </a:solidFill>
+                      <a:prstDash val="solid"/>
+                      <a:round/>
+                      <a:headEnd type="none" w="med" len="med"/>
+                      <a:tailEnd type="none" w="med" len="med"/>
+                    </a:lnL>
+                    <a:lnR w="12700" cap="flat" cmpd="sng" algn="ctr">
+                      <a:solidFill>
+                        <a:srgbClr val="FFF7EC"/>
+                      </a:solidFill>
+                      <a:prstDash val="solid"/>
+                      <a:round/>
+                      <a:headEnd type="none" w="med" len="med"/>
+                      <a:tailEnd type="none" w="med" len="med"/>
+                    </a:lnR>
+                    <a:lnT w="12700" cap="flat" cmpd="sng" algn="ctr">
+                      <a:solidFill>
+                        <a:srgbClr val="FFF7EC"/>
+                      </a:solidFill>
+                      <a:prstDash val="solid"/>
+                      <a:round/>
+                      <a:headEnd type="none" w="med" len="med"/>
+                      <a:tailEnd type="none" w="med" len="med"/>
+                    </a:lnT>
+                    <a:lnB w="12700" cap="flat" cmpd="sng" algn="ctr">
+                      <a:solidFill>
+                        <a:srgbClr val="FFF7EC"/>
+                      </a:solidFill>
+                      <a:prstDash val="solid"/>
+                      <a:round/>
+                      <a:headEnd type="none" w="med" len="med"/>
+                      <a:tailEnd type="none" w="med" len="med"/>
+                    </a:lnB>
+                    <a:solidFill>
+                      <a:srgbClr val="FDE5CC"/>
+                    </a:solidFill>
+                  </a:tcPr>
+                </a:tc>
+                <a:tc>
+                  <a:txBody>
+                    <a:bodyPr/>
+                    <a:lstStyle/>
+                    <a:p>
+                      <a:pPr algn="ctr" indent="0" marL="0">
+                        <a:buNone/>
+                      </a:pPr>
+                      <a:r>
+                        <a:rPr lang="en-US" sz="1400" i="1" dirty="0">
+                          <a:solidFill>
+                            <a:srgbClr val="B3561A"/>
+                          </a:solidFill>
+                        </a:rPr>
+                        <a:t>[add]</a:t>
+                      </a:r>
+                      <a:endParaRPr lang="en-US" sz="1400" dirty="0"/>
+                    </a:p>
+                  </a:txBody>
+                  <a:tcPr marL="73152" marR="73152" marT="73152" marB="73152" anchor="ctr">
+                    <a:lnL w="12700" cap="flat" cmpd="sng" algn="ctr">
+                      <a:solidFill>
+                        <a:srgbClr val="FFF7EC"/>
+                      </a:solidFill>
+                      <a:prstDash val="solid"/>
+                      <a:round/>
+                      <a:headEnd type="none" w="med" len="med"/>
+                      <a:tailEnd type="none" w="med" len="med"/>
+                    </a:lnL>
+                    <a:lnR w="12700" cap="flat" cmpd="sng" algn="ctr">
+                      <a:solidFill>
+                        <a:srgbClr val="FFF7EC"/>
+                      </a:solidFill>
+                      <a:prstDash val="solid"/>
+                      <a:round/>
+                      <a:headEnd type="none" w="med" len="med"/>
+                      <a:tailEnd type="none" w="med" len="med"/>
+                    </a:lnR>
+                    <a:lnT w="12700" cap="flat" cmpd="sng" algn="ctr">
+                      <a:solidFill>
+                        <a:srgbClr val="FFF7EC"/>
+                      </a:solidFill>
+                      <a:prstDash val="solid"/>
+                      <a:round/>
+                      <a:headEnd type="none" w="med" len="med"/>
+                      <a:tailEnd type="none" w="med" len="med"/>
+                    </a:lnT>
+                    <a:lnB w="12700" cap="flat" cmpd="sng" algn="ctr">
+                      <a:solidFill>
+                        <a:srgbClr val="FFF7EC"/>
+                      </a:solidFill>
+                      <a:prstDash val="solid"/>
+                      <a:round/>
+                      <a:headEnd type="none" w="med" len="med"/>
+                      <a:tailEnd type="none" w="med" len="med"/>
+                    </a:lnB>
+                    <a:solidFill>
+                      <a:srgbClr val="FDE5CC"/>
+                    </a:solidFill>
+                  </a:tcPr>
+                </a:tc>
+              </a:tr>
+              <a:tr h="475488">
+                <a:tc>
+                  <a:txBody>
+                    <a:bodyPr/>
+                    <a:lstStyle/>
+                    <a:p>
+                      <a:pPr indent="0" marL="0">
+                        <a:buNone/>
+                      </a:pPr>
+                      <a:r>
+                        <a:rPr lang="en-US" sz="1400" b="1" dirty="0">
+                          <a:solidFill>
+                            <a:schemeClr val="tx1"/>
+                          </a:solidFill>
+                        </a:rPr>
+                        <a:t>On-time project delivery</a:t>
+                      </a:r>
+                      <a:endParaRPr lang="en-US" sz="1400" dirty="0"/>
+                    </a:p>
+                  </a:txBody>
+                  <a:tcPr marL="73152" marR="73152" marT="73152" marB="73152" anchor="ctr">
+                    <a:lnL w="12700" cap="flat" cmpd="sng" algn="ctr">
+                      <a:solidFill>
+                        <a:srgbClr val="FFF7EC"/>
+                      </a:solidFill>
+                      <a:prstDash val="solid"/>
+                      <a:round/>
+                      <a:headEnd type="none" w="med" len="med"/>
+                      <a:tailEnd type="none" w="med" len="med"/>
+                    </a:lnL>
+                    <a:lnR w="12700" cap="flat" cmpd="sng" algn="ctr">
+                      <a:solidFill>
+                        <a:srgbClr val="FFF7EC"/>
+                      </a:solidFill>
+                      <a:prstDash val="solid"/>
+                      <a:round/>
+                      <a:headEnd type="none" w="med" len="med"/>
+                      <a:tailEnd type="none" w="med" len="med"/>
+                    </a:lnR>
+                    <a:lnT w="12700" cap="flat" cmpd="sng" algn="ctr">
+                      <a:solidFill>
+                        <a:srgbClr val="FFF7EC"/>
+                      </a:solidFill>
+                      <a:prstDash val="solid"/>
+                      <a:round/>
+                      <a:headEnd type="none" w="med" len="med"/>
+                      <a:tailEnd type="none" w="med" len="med"/>
+                    </a:lnT>
+                    <a:lnB w="12700" cap="flat" cmpd="sng" algn="ctr">
+                      <a:solidFill>
+                        <a:srgbClr val="FFF7EC"/>
+                      </a:solidFill>
+                      <a:prstDash val="solid"/>
+                      <a:round/>
+                      <a:headEnd type="none" w="med" len="med"/>
+                      <a:tailEnd type="none" w="med" len="med"/>
+                    </a:lnB>
+                    <a:solidFill>
+                      <a:schemeClr val="bg1"/>
+                    </a:solidFill>
+                  </a:tcPr>
+                </a:tc>
+                <a:tc>
+                  <a:txBody>
+                    <a:bodyPr/>
+                    <a:lstStyle/>
+                    <a:p>
+                      <a:pPr algn="ctr" indent="0" marL="0">
+                        <a:buNone/>
+                      </a:pPr>
+                      <a:r>
+                        <a:rPr lang="en-US" sz="1400" i="1" dirty="0">
+                          <a:solidFill>
+                            <a:srgbClr val="B3561A"/>
+                          </a:solidFill>
+                        </a:rPr>
+                        <a:t>[add]</a:t>
+                      </a:r>
+                      <a:endParaRPr lang="en-US" sz="1400" dirty="0"/>
+                    </a:p>
+                  </a:txBody>
+                  <a:tcPr marL="73152" marR="73152" marT="73152" marB="73152" anchor="ctr">
+                    <a:lnL w="12700" cap="flat" cmpd="sng" algn="ctr">
+                      <a:solidFill>
+                        <a:srgbClr val="FFF7EC"/>
+                      </a:solidFill>
+                      <a:prstDash val="solid"/>
+                      <a:round/>
+                      <a:headEnd type="none" w="med" len="med"/>
+                      <a:tailEnd type="none" w="med" len="med"/>
+                    </a:lnL>
+                    <a:lnR w="12700" cap="flat" cmpd="sng" algn="ctr">
+                      <a:solidFill>
+                        <a:srgbClr val="FFF7EC"/>
+                      </a:solidFill>
+                      <a:prstDash val="solid"/>
+                      <a:round/>
+                      <a:headEnd type="none" w="med" len="med"/>
+                      <a:tailEnd type="none" w="med" len="med"/>
+                    </a:lnR>
+                    <a:lnT w="12700" cap="flat" cmpd="sng" algn="ctr">
+                      <a:solidFill>
+                        <a:srgbClr val="FFF7EC"/>
+                      </a:solidFill>
+                      <a:prstDash val="solid"/>
+                      <a:round/>
+                      <a:headEnd type="none" w="med" len="med"/>
+                      <a:tailEnd type="none" w="med" len="med"/>
+                    </a:lnT>
+                    <a:lnB w="12700" cap="flat" cmpd="sng" algn="ctr">
+                      <a:solidFill>
+                        <a:srgbClr val="FFF7EC"/>
+                      </a:solidFill>
+                      <a:prstDash val="solid"/>
+                      <a:round/>
+                      <a:headEnd type="none" w="med" len="med"/>
+                      <a:tailEnd type="none" w="med" len="med"/>
+                    </a:lnB>
+                    <a:solidFill>
+                      <a:srgbClr val="FDE5CC"/>
+                    </a:solidFill>
+                  </a:tcPr>
+                </a:tc>
+                <a:tc>
+                  <a:txBody>
+                    <a:bodyPr/>
+                    <a:lstStyle/>
+                    <a:p>
+                      <a:pPr algn="ctr" indent="0" marL="0">
+                        <a:buNone/>
+                      </a:pPr>
+                      <a:r>
+                        <a:rPr lang="en-US" sz="1400" i="1" dirty="0">
+                          <a:solidFill>
+                            <a:srgbClr val="B3561A"/>
+                          </a:solidFill>
+                        </a:rPr>
+                        <a:t>[add]</a:t>
+                      </a:r>
+                      <a:endParaRPr lang="en-US" sz="1400" dirty="0"/>
+                    </a:p>
+                  </a:txBody>
+                  <a:tcPr marL="73152" marR="73152" marT="73152" marB="73152" anchor="ctr">
+                    <a:lnL w="12700" cap="flat" cmpd="sng" algn="ctr">
+                      <a:solidFill>
+                        <a:srgbClr val="FFF7EC"/>
+                      </a:solidFill>
+                      <a:prstDash val="solid"/>
+                      <a:round/>
+                      <a:headEnd type="none" w="med" len="med"/>
+                      <a:tailEnd type="none" w="med" len="med"/>
+                    </a:lnL>
+                    <a:lnR w="12700" cap="flat" cmpd="sng" algn="ctr">
+                      <a:solidFill>
+                        <a:srgbClr val="FFF7EC"/>
+                      </a:solidFill>
+                      <a:prstDash val="solid"/>
+                      <a:round/>
+                      <a:headEnd type="none" w="med" len="med"/>
+                      <a:tailEnd type="none" w="med" len="med"/>
+                    </a:lnR>
+                    <a:lnT w="12700" cap="flat" cmpd="sng" algn="ctr">
+                      <a:solidFill>
+                        <a:srgbClr val="FFF7EC"/>
+                      </a:solidFill>
+                      <a:prstDash val="solid"/>
+                      <a:round/>
+                      <a:headEnd type="none" w="med" len="med"/>
+                      <a:tailEnd type="none" w="med" len="med"/>
+                    </a:lnT>
+                    <a:lnB w="12700" cap="flat" cmpd="sng" algn="ctr">
+                      <a:solidFill>
+                        <a:srgbClr val="FFF7EC"/>
+                      </a:solidFill>
+                      <a:prstDash val="solid"/>
+                      <a:round/>
+                      <a:headEnd type="none" w="med" len="med"/>
+                      <a:tailEnd type="none" w="med" len="med"/>
+                    </a:lnB>
+                    <a:solidFill>
+                      <a:srgbClr val="FDE5CC"/>
+                    </a:solidFill>
+                  </a:tcPr>
+                </a:tc>
+                <a:tc>
+                  <a:txBody>
+                    <a:bodyPr/>
+                    <a:lstStyle/>
+                    <a:p>
+                      <a:pPr algn="ctr" indent="0" marL="0">
+                        <a:buNone/>
+                      </a:pPr>
+                      <a:r>
+                        <a:rPr lang="en-US" sz="1400" i="1" dirty="0">
+                          <a:solidFill>
+                            <a:srgbClr val="B3561A"/>
+                          </a:solidFill>
+                        </a:rPr>
+                        <a:t>[add]</a:t>
+                      </a:r>
+                      <a:endParaRPr lang="en-US" sz="1400" dirty="0"/>
+                    </a:p>
+                  </a:txBody>
+                  <a:tcPr marL="73152" marR="73152" marT="73152" marB="73152" anchor="ctr">
+                    <a:lnL w="12700" cap="flat" cmpd="sng" algn="ctr">
+                      <a:solidFill>
+                        <a:srgbClr val="FFF7EC"/>
+                      </a:solidFill>
+                      <a:prstDash val="solid"/>
+                      <a:round/>
+                      <a:headEnd type="none" w="med" len="med"/>
+                      <a:tailEnd type="none" w="med" len="med"/>
+                    </a:lnL>
+                    <a:lnR w="12700" cap="flat" cmpd="sng" algn="ctr">
+                      <a:solidFill>
+                        <a:srgbClr val="FFF7EC"/>
+                      </a:solidFill>
+                      <a:prstDash val="solid"/>
+                      <a:round/>
+                      <a:headEnd type="none" w="med" len="med"/>
+                      <a:tailEnd type="none" w="med" len="med"/>
+                    </a:lnR>
+                    <a:lnT w="12700" cap="flat" cmpd="sng" algn="ctr">
+                      <a:solidFill>
+                        <a:srgbClr val="FFF7EC"/>
+                      </a:solidFill>
+                      <a:prstDash val="solid"/>
+                      <a:round/>
+                      <a:headEnd type="none" w="med" len="med"/>
+                      <a:tailEnd type="none" w="med" len="med"/>
+                    </a:lnT>
+                    <a:lnB w="12700" cap="flat" cmpd="sng" algn="ctr">
+                      <a:solidFill>
+                        <a:srgbClr val="FFF7EC"/>
+                      </a:solidFill>
+                      <a:prstDash val="solid"/>
+                      <a:round/>
+                      <a:headEnd type="none" w="med" len="med"/>
+                      <a:tailEnd type="none" w="med" len="med"/>
+                    </a:lnB>
+                    <a:solidFill>
+                      <a:srgbClr val="FDE5CC"/>
+                    </a:solidFill>
+                  </a:tcPr>
+                </a:tc>
+              </a:tr>
+            </a:tbl>
+          </a:graphicData>
+        </a:graphic>
+      </p:graphicFrame>
+      <p:sp>
+        <p:nvSpPr>
+          <p:cNvPr id="25" name="Slide Number Placeholder 0"/>
+          <p:cNvSpPr>
+            <a:spLocks noGrp="1"/>
+          </p:cNvSpPr>
+          <p:nvPr>
+            <p:ph type="sldNum" sz="quarter" idx="4294967295"/>
+          </p:nvPr>
+        </p:nvSpPr>
+        <p:spPr>
+          <a:xfrm>
+            <a:off x="11247120" y="6400800"/>
+            <a:ext cx="365760" cy="274320"/>
+          </a:xfrm>
+          <a:prstGeom prst="rect">
+            <a:avLst/>
+          </a:prstGeom>
+          <a:extLst>
+            <a:ext uri="{C572A759-6A51-4108-AA02-DFA0A04FC94B}">
+              <ma14:wrappingTextBoxFlag xmlns:ma14="http://schemas.microsoft.com/office/mac/drawingml/2011/main" val="0"/>
+            </a:ext>
+          </a:extLst>
+        </p:spPr>
+        <p:txBody>
+          <a:bodyPr/>
+          <a:lstStyle>
+            <a:lvl1pPr>
+              <a:defRPr sz="1000">
+                <a:solidFill>
+                  <a:schemeClr val="accent5"/>
+                </a:solidFill>
+              </a:defRPr>
+            </a:lvl1pPr>
+          </a:lstStyle>
+          <a:p>
+            <a:pPr algn="r"/>
+            <a:fld id="{F7021451-1387-4CA6-816F-3879F97B5CBC}" type="slidenum">
+              <a:rPr b="0" lang="en-US"/>
+              <a:t>10</a:t>
+            </a:fld>
+            <a:endParaRPr lang="en-US"/>
+          </a:p>
+        </p:txBody>
+      </p:sp>
+    </p:spTree>
+  </p:cSld>
+  <p:clrMapOvr>
+    <a:masterClrMapping/>
+  </p:clrMapOvr>
+</p:sld>
+</file>
+
+<file path=ppt/slides/slide11.xml><?xml version="1.0" encoding="utf-8"?>
+<p:sld xmlns:a="http://schemas.openxmlformats.org/drawingml/2006/main" xmlns:r="http://schemas.openxmlformats.org/officeDocument/2006/relationships" xmlns:p="http://schemas.openxmlformats.org/presentationml/2006/main">
+  <p:cSld name="Slide 11">
+    <p:spTree>
+      <p:nvGrpSpPr>
+        <p:cNvPr id="1" name=""/>
+        <p:cNvGrpSpPr/>
+        <p:nvPr/>
+      </p:nvGrpSpPr>
+      <p:grpSpPr>
+        <a:xfrm>
+          <a:off x="0" y="0"/>
+          <a:ext cx="0" cy="0"/>
+          <a:chOff x="0" y="0"/>
+          <a:chExt cx="0" cy="0"/>
+        </a:xfrm>
+      </p:grpSpPr>
+      <p:sp>
+        <p:nvSpPr>
+          <p:cNvPr id="2" name="Text 0"/>
           <p:cNvSpPr txBox="1"/>
           <p:nvPr/>
         </p:nvSpPr>
@@ -4328,9 +6478,9 @@
 </p:sld>
 </file>
 
-<file path=ppt/slides/slide11.xml><?xml version="1.0" encoding="utf-8"?>
+<file path=ppt/slides/slide12.xml><?xml version="1.0" encoding="utf-8"?>
 <p:sld xmlns:a="http://schemas.openxmlformats.org/drawingml/2006/main" xmlns:r="http://schemas.openxmlformats.org/officeDocument/2006/relationships" xmlns:p="http://schemas.openxmlformats.org/presentationml/2006/main">
-  <p:cSld name="Slide 11">
+  <p:cSld name="Slide 12">
     <p:spTree>
       <p:nvGrpSpPr>
         <p:cNvPr id="1" name=""/>
@@ -4547,7 +6697,7 @@
             <a:pPr algn="r"/>
             <a:fld id="{F7021451-1387-4CA6-816F-3879F97B5CBC}" type="slidenum">
               <a:rPr b="0" lang="en-US"/>
-              <a:t>11</a:t>
+              <a:t>12</a:t>
             </a:fld>
             <a:endParaRPr lang="en-US"/>
           </a:p>
@@ -4561,9 +6711,9 @@
 </p:sld>
 </file>
 
-<file path=ppt/slides/slide12.xml><?xml version="1.0" encoding="utf-8"?>
+<file path=ppt/slides/slide13.xml><?xml version="1.0" encoding="utf-8"?>
 <p:sld xmlns:a="http://schemas.openxmlformats.org/drawingml/2006/main" xmlns:r="http://schemas.openxmlformats.org/officeDocument/2006/relationships" xmlns:p="http://schemas.openxmlformats.org/presentationml/2006/main">
-  <p:cSld name="Slide 12">
+  <p:cSld name="Slide 13">
     <p:spTree>
       <p:nvGrpSpPr>
         <p:cNvPr id="1" name=""/>
@@ -4618,7 +6768,7 @@
       </p:sp>
       <p:graphicFrame>
         <p:nvGraphicFramePr>
-          <p:cNvPr id="13" name="Table 0"/>
+          <p:cNvPr id="14" name="Table 0"/>
           <p:cNvGraphicFramePr>
             <a:graphicFrameLocks noGrp="1"/>
           </p:cNvGraphicFramePr>
@@ -5994,7 +8144,7 @@
             <a:pPr algn="r"/>
             <a:fld id="{F7021451-1387-4CA6-816F-3879F97B5CBC}" type="slidenum">
               <a:rPr b="0" lang="en-US"/>
-              <a:t>12</a:t>
+              <a:t>13</a:t>
             </a:fld>
             <a:endParaRPr lang="en-US"/>
           </a:p>
@@ -7442,6 +9592,2360 @@
 <file path=ppt/slides/slide3.xml><?xml version="1.0" encoding="utf-8"?>
 <p:sld xmlns:a="http://schemas.openxmlformats.org/drawingml/2006/main" xmlns:r="http://schemas.openxmlformats.org/officeDocument/2006/relationships" xmlns:p="http://schemas.openxmlformats.org/presentationml/2006/main">
   <p:cSld name="Slide 3">
+    <p:spTree>
+      <p:nvGrpSpPr>
+        <p:cNvPr id="1" name=""/>
+        <p:cNvGrpSpPr/>
+        <p:nvPr/>
+      </p:nvGrpSpPr>
+      <p:grpSpPr>
+        <a:xfrm>
+          <a:off x="0" y="0"/>
+          <a:ext cx="0" cy="0"/>
+          <a:chOff x="0" y="0"/>
+          <a:chExt cx="0" cy="0"/>
+        </a:xfrm>
+      </p:grpSpPr>
+      <p:sp>
+        <p:nvSpPr>
+          <p:cNvPr id="2" name="Text 0"/>
+          <p:cNvSpPr/>
+          <p:nvPr>
+            <p:ph idx="100" type="title" hasCustomPrompt="1"/>
+          </p:nvPr>
+        </p:nvSpPr>
+        <p:spPr>
+          <a:xfrm>
+            <a:off x="548640" y="320040"/>
+            <a:ext cx="11064240" cy="822960"/>
+          </a:xfrm>
+          <a:prstGeom prst="rect">
+            <a:avLst/>
+          </a:prstGeom>
+          <a:noFill/>
+          <a:ln/>
+        </p:spPr>
+        <p:txBody>
+          <a:bodyPr wrap="square" lIns="0" tIns="0" rIns="0" bIns="0" rtlCol="0" anchor="ctr"/>
+          <a:lstStyle/>
+          <a:p>
+            <a:pPr algn="l" indent="0" marL="0">
+              <a:buNone/>
+            </a:pPr>
+            <a:r>
+              <a:rPr lang="en-US" sz="2800" b="1" dirty="0">
+                <a:solidFill>
+                  <a:schemeClr val="tx1"/>
+                </a:solidFill>
+              </a:rPr>
+              <a:t>Feb roadmap check: volume beat it, new lines lag</a:t>
+            </a:r>
+            <a:endParaRPr lang="en-US" sz="2800" dirty="0"/>
+          </a:p>
+        </p:txBody>
+      </p:sp>
+      <p:graphicFrame>
+        <p:nvGraphicFramePr>
+          <p:cNvPr id="4" name="Table 0"/>
+          <p:cNvGraphicFramePr>
+            <a:graphicFrameLocks noGrp="1"/>
+          </p:cNvGraphicFramePr>
+          <p:nvPr>
+            <p:extLst>
+              <p:ext uri="{D42A27DB-BD31-4B8C-83A1-F6EECF244321}">
+                <p14:modId xmlns:p14="http://schemas.microsoft.com/office/powerpoint/2010/main" val="1579011935"/>
+              </p:ext>
+            </p:extLst>
+          </p:nvPr>
+        </p:nvGraphicFramePr>
+        <p:xfrm>
+          <a:off x="548640" y="1325880"/>
+          <a:ext cx="11064240" cy="914400"/>
+        </p:xfrm>
+        <a:graphic>
+          <a:graphicData uri="http://schemas.openxmlformats.org/drawingml/2006/table">
+            <a:tbl>
+              <a:tblPr/>
+              <a:tblGrid>
+                <a:gridCol w="2926080"/>
+                <a:gridCol w="3017520"/>
+                <a:gridCol w="3657600"/>
+                <a:gridCol w="1463040"/>
+              </a:tblGrid>
+              <a:tr h="512064">
+                <a:tc>
+                  <a:txBody>
+                    <a:bodyPr/>
+                    <a:lstStyle/>
+                    <a:p>
+                      <a:pPr indent="0" marL="0">
+                        <a:buNone/>
+                      </a:pPr>
+                      <a:r>
+                        <a:rPr lang="en-US" sz="1300" b="1" dirty="0">
+                          <a:solidFill>
+                            <a:schemeClr val="bg1"/>
+                          </a:solidFill>
+                        </a:rPr>
+                        <a:t>Roadmap line (26 Feb 2026)</a:t>
+                      </a:r>
+                      <a:endParaRPr lang="en-US" sz="1300" dirty="0"/>
+                    </a:p>
+                  </a:txBody>
+                  <a:tcPr marL="73152" marR="73152" marT="73152" marB="73152" anchor="ctr">
+                    <a:lnL w="12700" cap="flat" cmpd="sng" algn="ctr">
+                      <a:solidFill>
+                        <a:srgbClr val="FFF7EC"/>
+                      </a:solidFill>
+                      <a:prstDash val="solid"/>
+                      <a:round/>
+                      <a:headEnd type="none" w="med" len="med"/>
+                      <a:tailEnd type="none" w="med" len="med"/>
+                    </a:lnL>
+                    <a:lnR w="12700" cap="flat" cmpd="sng" algn="ctr">
+                      <a:solidFill>
+                        <a:srgbClr val="FFF7EC"/>
+                      </a:solidFill>
+                      <a:prstDash val="solid"/>
+                      <a:round/>
+                      <a:headEnd type="none" w="med" len="med"/>
+                      <a:tailEnd type="none" w="med" len="med"/>
+                    </a:lnR>
+                    <a:lnT w="12700" cap="flat" cmpd="sng" algn="ctr">
+                      <a:solidFill>
+                        <a:srgbClr val="FFF7EC"/>
+                      </a:solidFill>
+                      <a:prstDash val="solid"/>
+                      <a:round/>
+                      <a:headEnd type="none" w="med" len="med"/>
+                      <a:tailEnd type="none" w="med" len="med"/>
+                    </a:lnT>
+                    <a:lnB w="12700" cap="flat" cmpd="sng" algn="ctr">
+                      <a:solidFill>
+                        <a:srgbClr val="FFF7EC"/>
+                      </a:solidFill>
+                      <a:prstDash val="solid"/>
+                      <a:round/>
+                      <a:headEnd type="none" w="med" len="med"/>
+                      <a:tailEnd type="none" w="med" len="med"/>
+                    </a:lnB>
+                    <a:solidFill>
+                      <a:schemeClr val="tx2"/>
+                    </a:solidFill>
+                  </a:tcPr>
+                </a:tc>
+                <a:tc>
+                  <a:txBody>
+                    <a:bodyPr/>
+                    <a:lstStyle/>
+                    <a:p>
+                      <a:pPr indent="0" marL="0">
+                        <a:buNone/>
+                      </a:pPr>
+                      <a:r>
+                        <a:rPr lang="en-US" sz="1300" b="1" dirty="0">
+                          <a:solidFill>
+                            <a:schemeClr val="bg1"/>
+                          </a:solidFill>
+                        </a:rPr>
+                        <a:t>What we said</a:t>
+                      </a:r>
+                      <a:endParaRPr lang="en-US" sz="1300" dirty="0"/>
+                    </a:p>
+                  </a:txBody>
+                  <a:tcPr marL="73152" marR="73152" marT="73152" marB="73152" anchor="ctr">
+                    <a:lnL w="12700" cap="flat" cmpd="sng" algn="ctr">
+                      <a:solidFill>
+                        <a:srgbClr val="FFF7EC"/>
+                      </a:solidFill>
+                      <a:prstDash val="solid"/>
+                      <a:round/>
+                      <a:headEnd type="none" w="med" len="med"/>
+                      <a:tailEnd type="none" w="med" len="med"/>
+                    </a:lnL>
+                    <a:lnR w="12700" cap="flat" cmpd="sng" algn="ctr">
+                      <a:solidFill>
+                        <a:srgbClr val="FFF7EC"/>
+                      </a:solidFill>
+                      <a:prstDash val="solid"/>
+                      <a:round/>
+                      <a:headEnd type="none" w="med" len="med"/>
+                      <a:tailEnd type="none" w="med" len="med"/>
+                    </a:lnR>
+                    <a:lnT w="12700" cap="flat" cmpd="sng" algn="ctr">
+                      <a:solidFill>
+                        <a:srgbClr val="FFF7EC"/>
+                      </a:solidFill>
+                      <a:prstDash val="solid"/>
+                      <a:round/>
+                      <a:headEnd type="none" w="med" len="med"/>
+                      <a:tailEnd type="none" w="med" len="med"/>
+                    </a:lnT>
+                    <a:lnB w="12700" cap="flat" cmpd="sng" algn="ctr">
+                      <a:solidFill>
+                        <a:srgbClr val="FFF7EC"/>
+                      </a:solidFill>
+                      <a:prstDash val="solid"/>
+                      <a:round/>
+                      <a:headEnd type="none" w="med" len="med"/>
+                      <a:tailEnd type="none" w="med" len="med"/>
+                    </a:lnB>
+                    <a:solidFill>
+                      <a:schemeClr val="tx2"/>
+                    </a:solidFill>
+                  </a:tcPr>
+                </a:tc>
+                <a:tc>
+                  <a:txBody>
+                    <a:bodyPr/>
+                    <a:lstStyle/>
+                    <a:p>
+                      <a:pPr indent="0" marL="0">
+                        <a:buNone/>
+                      </a:pPr>
+                      <a:r>
+                        <a:rPr lang="en-US" sz="1300" b="1" dirty="0">
+                          <a:solidFill>
+                            <a:schemeClr val="bg1"/>
+                          </a:solidFill>
+                        </a:rPr>
+                        <a:t>JAS reality</a:t>
+                      </a:r>
+                      <a:endParaRPr lang="en-US" sz="1300" dirty="0"/>
+                    </a:p>
+                  </a:txBody>
+                  <a:tcPr marL="73152" marR="73152" marT="73152" marB="73152" anchor="ctr">
+                    <a:lnL w="12700" cap="flat" cmpd="sng" algn="ctr">
+                      <a:solidFill>
+                        <a:srgbClr val="FFF7EC"/>
+                      </a:solidFill>
+                      <a:prstDash val="solid"/>
+                      <a:round/>
+                      <a:headEnd type="none" w="med" len="med"/>
+                      <a:tailEnd type="none" w="med" len="med"/>
+                    </a:lnL>
+                    <a:lnR w="12700" cap="flat" cmpd="sng" algn="ctr">
+                      <a:solidFill>
+                        <a:srgbClr val="FFF7EC"/>
+                      </a:solidFill>
+                      <a:prstDash val="solid"/>
+                      <a:round/>
+                      <a:headEnd type="none" w="med" len="med"/>
+                      <a:tailEnd type="none" w="med" len="med"/>
+                    </a:lnR>
+                    <a:lnT w="12700" cap="flat" cmpd="sng" algn="ctr">
+                      <a:solidFill>
+                        <a:srgbClr val="FFF7EC"/>
+                      </a:solidFill>
+                      <a:prstDash val="solid"/>
+                      <a:round/>
+                      <a:headEnd type="none" w="med" len="med"/>
+                      <a:tailEnd type="none" w="med" len="med"/>
+                    </a:lnT>
+                    <a:lnB w="12700" cap="flat" cmpd="sng" algn="ctr">
+                      <a:solidFill>
+                        <a:srgbClr val="FFF7EC"/>
+                      </a:solidFill>
+                      <a:prstDash val="solid"/>
+                      <a:round/>
+                      <a:headEnd type="none" w="med" len="med"/>
+                      <a:tailEnd type="none" w="med" len="med"/>
+                    </a:lnB>
+                    <a:solidFill>
+                      <a:schemeClr val="tx2"/>
+                    </a:solidFill>
+                  </a:tcPr>
+                </a:tc>
+                <a:tc>
+                  <a:txBody>
+                    <a:bodyPr/>
+                    <a:lstStyle/>
+                    <a:p>
+                      <a:pPr algn="ctr" indent="0" marL="0">
+                        <a:buNone/>
+                      </a:pPr>
+                      <a:r>
+                        <a:rPr lang="en-US" sz="1300" b="1" dirty="0">
+                          <a:solidFill>
+                            <a:schemeClr val="bg1"/>
+                          </a:solidFill>
+                        </a:rPr>
+                        <a:t>Status</a:t>
+                      </a:r>
+                      <a:endParaRPr lang="en-US" sz="1300" dirty="0"/>
+                    </a:p>
+                  </a:txBody>
+                  <a:tcPr marL="73152" marR="73152" marT="73152" marB="73152" anchor="ctr">
+                    <a:lnL w="12700" cap="flat" cmpd="sng" algn="ctr">
+                      <a:solidFill>
+                        <a:srgbClr val="FFF7EC"/>
+                      </a:solidFill>
+                      <a:prstDash val="solid"/>
+                      <a:round/>
+                      <a:headEnd type="none" w="med" len="med"/>
+                      <a:tailEnd type="none" w="med" len="med"/>
+                    </a:lnL>
+                    <a:lnR w="12700" cap="flat" cmpd="sng" algn="ctr">
+                      <a:solidFill>
+                        <a:srgbClr val="FFF7EC"/>
+                      </a:solidFill>
+                      <a:prstDash val="solid"/>
+                      <a:round/>
+                      <a:headEnd type="none" w="med" len="med"/>
+                      <a:tailEnd type="none" w="med" len="med"/>
+                    </a:lnR>
+                    <a:lnT w="12700" cap="flat" cmpd="sng" algn="ctr">
+                      <a:solidFill>
+                        <a:srgbClr val="FFF7EC"/>
+                      </a:solidFill>
+                      <a:prstDash val="solid"/>
+                      <a:round/>
+                      <a:headEnd type="none" w="med" len="med"/>
+                      <a:tailEnd type="none" w="med" len="med"/>
+                    </a:lnT>
+                    <a:lnB w="12700" cap="flat" cmpd="sng" algn="ctr">
+                      <a:solidFill>
+                        <a:srgbClr val="FFF7EC"/>
+                      </a:solidFill>
+                      <a:prstDash val="solid"/>
+                      <a:round/>
+                      <a:headEnd type="none" w="med" len="med"/>
+                      <a:tailEnd type="none" w="med" len="med"/>
+                    </a:lnB>
+                    <a:solidFill>
+                      <a:schemeClr val="tx2"/>
+                    </a:solidFill>
+                  </a:tcPr>
+                </a:tc>
+              </a:tr>
+              <a:tr h="512064">
+                <a:tc>
+                  <a:txBody>
+                    <a:bodyPr/>
+                    <a:lstStyle/>
+                    <a:p>
+                      <a:pPr indent="0" marL="0">
+                        <a:buNone/>
+                      </a:pPr>
+                      <a:r>
+                        <a:rPr lang="en-US" sz="1300" b="1" dirty="0">
+                          <a:solidFill>
+                            <a:schemeClr val="tx1"/>
+                          </a:solidFill>
+                        </a:rPr>
+                        <a:t>Creative volume</a:t>
+                      </a:r>
+                      <a:endParaRPr lang="en-US" sz="1300" dirty="0"/>
+                    </a:p>
+                  </a:txBody>
+                  <a:tcPr marL="73152" marR="73152" marT="73152" marB="73152" anchor="ctr">
+                    <a:lnL w="12700" cap="flat" cmpd="sng" algn="ctr">
+                      <a:solidFill>
+                        <a:srgbClr val="FFF7EC"/>
+                      </a:solidFill>
+                      <a:prstDash val="solid"/>
+                      <a:round/>
+                      <a:headEnd type="none" w="med" len="med"/>
+                      <a:tailEnd type="none" w="med" len="med"/>
+                    </a:lnL>
+                    <a:lnR w="12700" cap="flat" cmpd="sng" algn="ctr">
+                      <a:solidFill>
+                        <a:srgbClr val="FFF7EC"/>
+                      </a:solidFill>
+                      <a:prstDash val="solid"/>
+                      <a:round/>
+                      <a:headEnd type="none" w="med" len="med"/>
+                      <a:tailEnd type="none" w="med" len="med"/>
+                    </a:lnR>
+                    <a:lnT w="12700" cap="flat" cmpd="sng" algn="ctr">
+                      <a:solidFill>
+                        <a:srgbClr val="FFF7EC"/>
+                      </a:solidFill>
+                      <a:prstDash val="solid"/>
+                      <a:round/>
+                      <a:headEnd type="none" w="med" len="med"/>
+                      <a:tailEnd type="none" w="med" len="med"/>
+                    </a:lnT>
+                    <a:lnB w="12700" cap="flat" cmpd="sng" algn="ctr">
+                      <a:solidFill>
+                        <a:srgbClr val="FFF7EC"/>
+                      </a:solidFill>
+                      <a:prstDash val="solid"/>
+                      <a:round/>
+                      <a:headEnd type="none" w="med" len="med"/>
+                      <a:tailEnd type="none" w="med" len="med"/>
+                    </a:lnB>
+                    <a:solidFill>
+                      <a:schemeClr val="bg1"/>
+                    </a:solidFill>
+                  </a:tcPr>
+                </a:tc>
+                <a:tc>
+                  <a:txBody>
+                    <a:bodyPr/>
+                    <a:lstStyle/>
+                    <a:p>
+                      <a:pPr indent="0" marL="0">
+                        <a:buNone/>
+                      </a:pPr>
+                      <a:r>
+                        <a:rPr lang="en-US" sz="1300" dirty="0">
+                          <a:solidFill>
+                            <a:schemeClr val="tx1"/>
+                          </a:solidFill>
+                        </a:rPr>
+                        <a:t>200–250 creatives / month</a:t>
+                      </a:r>
+                      <a:endParaRPr lang="en-US" sz="1300" dirty="0"/>
+                    </a:p>
+                  </a:txBody>
+                  <a:tcPr marL="73152" marR="73152" marT="73152" marB="73152" anchor="ctr">
+                    <a:lnL w="12700" cap="flat" cmpd="sng" algn="ctr">
+                      <a:solidFill>
+                        <a:srgbClr val="FFF7EC"/>
+                      </a:solidFill>
+                      <a:prstDash val="solid"/>
+                      <a:round/>
+                      <a:headEnd type="none" w="med" len="med"/>
+                      <a:tailEnd type="none" w="med" len="med"/>
+                    </a:lnL>
+                    <a:lnR w="12700" cap="flat" cmpd="sng" algn="ctr">
+                      <a:solidFill>
+                        <a:srgbClr val="FFF7EC"/>
+                      </a:solidFill>
+                      <a:prstDash val="solid"/>
+                      <a:round/>
+                      <a:headEnd type="none" w="med" len="med"/>
+                      <a:tailEnd type="none" w="med" len="med"/>
+                    </a:lnR>
+                    <a:lnT w="12700" cap="flat" cmpd="sng" algn="ctr">
+                      <a:solidFill>
+                        <a:srgbClr val="FFF7EC"/>
+                      </a:solidFill>
+                      <a:prstDash val="solid"/>
+                      <a:round/>
+                      <a:headEnd type="none" w="med" len="med"/>
+                      <a:tailEnd type="none" w="med" len="med"/>
+                    </a:lnT>
+                    <a:lnB w="12700" cap="flat" cmpd="sng" algn="ctr">
+                      <a:solidFill>
+                        <a:srgbClr val="FFF7EC"/>
+                      </a:solidFill>
+                      <a:prstDash val="solid"/>
+                      <a:round/>
+                      <a:headEnd type="none" w="med" len="med"/>
+                      <a:tailEnd type="none" w="med" len="med"/>
+                    </a:lnB>
+                    <a:solidFill>
+                      <a:schemeClr val="bg1"/>
+                    </a:solidFill>
+                  </a:tcPr>
+                </a:tc>
+                <a:tc>
+                  <a:txBody>
+                    <a:bodyPr/>
+                    <a:lstStyle/>
+                    <a:p>
+                      <a:pPr indent="0" marL="0">
+                        <a:buNone/>
+                      </a:pPr>
+                      <a:r>
+                        <a:rPr lang="en-US" sz="1300" dirty="0">
+                          <a:solidFill>
+                            <a:schemeClr val="tx1"/>
+                          </a:solidFill>
+                        </a:rPr>
+                        <a:t>~370 / month (1,109 in 3 months)</a:t>
+                      </a:r>
+                      <a:endParaRPr lang="en-US" sz="1300" dirty="0"/>
+                    </a:p>
+                  </a:txBody>
+                  <a:tcPr marL="73152" marR="73152" marT="73152" marB="73152" anchor="ctr">
+                    <a:lnL w="12700" cap="flat" cmpd="sng" algn="ctr">
+                      <a:solidFill>
+                        <a:srgbClr val="FFF7EC"/>
+                      </a:solidFill>
+                      <a:prstDash val="solid"/>
+                      <a:round/>
+                      <a:headEnd type="none" w="med" len="med"/>
+                      <a:tailEnd type="none" w="med" len="med"/>
+                    </a:lnL>
+                    <a:lnR w="12700" cap="flat" cmpd="sng" algn="ctr">
+                      <a:solidFill>
+                        <a:srgbClr val="FFF7EC"/>
+                      </a:solidFill>
+                      <a:prstDash val="solid"/>
+                      <a:round/>
+                      <a:headEnd type="none" w="med" len="med"/>
+                      <a:tailEnd type="none" w="med" len="med"/>
+                    </a:lnR>
+                    <a:lnT w="12700" cap="flat" cmpd="sng" algn="ctr">
+                      <a:solidFill>
+                        <a:srgbClr val="FFF7EC"/>
+                      </a:solidFill>
+                      <a:prstDash val="solid"/>
+                      <a:round/>
+                      <a:headEnd type="none" w="med" len="med"/>
+                      <a:tailEnd type="none" w="med" len="med"/>
+                    </a:lnT>
+                    <a:lnB w="12700" cap="flat" cmpd="sng" algn="ctr">
+                      <a:solidFill>
+                        <a:srgbClr val="FFF7EC"/>
+                      </a:solidFill>
+                      <a:prstDash val="solid"/>
+                      <a:round/>
+                      <a:headEnd type="none" w="med" len="med"/>
+                      <a:tailEnd type="none" w="med" len="med"/>
+                    </a:lnB>
+                    <a:solidFill>
+                      <a:schemeClr val="bg1"/>
+                    </a:solidFill>
+                  </a:tcPr>
+                </a:tc>
+                <a:tc>
+                  <a:txBody>
+                    <a:bodyPr/>
+                    <a:lstStyle/>
+                    <a:p>
+                      <a:pPr algn="ctr" indent="0" marL="0">
+                        <a:buNone/>
+                      </a:pPr>
+                      <a:r>
+                        <a:rPr lang="en-US" sz="1300" b="1" dirty="0">
+                          <a:solidFill>
+                            <a:schemeClr val="tx2"/>
+                          </a:solidFill>
+                        </a:rPr>
+                        <a:t>Beat</a:t>
+                      </a:r>
+                      <a:endParaRPr lang="en-US" sz="1300" dirty="0"/>
+                    </a:p>
+                  </a:txBody>
+                  <a:tcPr marL="73152" marR="73152" marT="73152" marB="73152" anchor="ctr">
+                    <a:lnL w="12700" cap="flat" cmpd="sng" algn="ctr">
+                      <a:solidFill>
+                        <a:srgbClr val="FFF7EC"/>
+                      </a:solidFill>
+                      <a:prstDash val="solid"/>
+                      <a:round/>
+                      <a:headEnd type="none" w="med" len="med"/>
+                      <a:tailEnd type="none" w="med" len="med"/>
+                    </a:lnL>
+                    <a:lnR w="12700" cap="flat" cmpd="sng" algn="ctr">
+                      <a:solidFill>
+                        <a:srgbClr val="FFF7EC"/>
+                      </a:solidFill>
+                      <a:prstDash val="solid"/>
+                      <a:round/>
+                      <a:headEnd type="none" w="med" len="med"/>
+                      <a:tailEnd type="none" w="med" len="med"/>
+                    </a:lnR>
+                    <a:lnT w="12700" cap="flat" cmpd="sng" algn="ctr">
+                      <a:solidFill>
+                        <a:srgbClr val="FFF7EC"/>
+                      </a:solidFill>
+                      <a:prstDash val="solid"/>
+                      <a:round/>
+                      <a:headEnd type="none" w="med" len="med"/>
+                      <a:tailEnd type="none" w="med" len="med"/>
+                    </a:lnT>
+                    <a:lnB w="12700" cap="flat" cmpd="sng" algn="ctr">
+                      <a:solidFill>
+                        <a:srgbClr val="FFF7EC"/>
+                      </a:solidFill>
+                      <a:prstDash val="solid"/>
+                      <a:round/>
+                      <a:headEnd type="none" w="med" len="med"/>
+                      <a:tailEnd type="none" w="med" len="med"/>
+                    </a:lnB>
+                    <a:solidFill>
+                      <a:srgbClr val="E3F1E8"/>
+                    </a:solidFill>
+                  </a:tcPr>
+                </a:tc>
+              </a:tr>
+              <a:tr h="512064">
+                <a:tc>
+                  <a:txBody>
+                    <a:bodyPr/>
+                    <a:lstStyle/>
+                    <a:p>
+                      <a:pPr indent="0" marL="0">
+                        <a:buNone/>
+                      </a:pPr>
+                      <a:r>
+                        <a:rPr lang="en-US" sz="1300" b="1" dirty="0">
+                          <a:solidFill>
+                            <a:schemeClr val="tx1"/>
+                          </a:solidFill>
+                        </a:rPr>
+                        <a:t>Individual projects</a:t>
+                      </a:r>
+                      <a:endParaRPr lang="en-US" sz="1300" dirty="0"/>
+                    </a:p>
+                  </a:txBody>
+                  <a:tcPr marL="73152" marR="73152" marT="73152" marB="73152" anchor="ctr">
+                    <a:lnL w="12700" cap="flat" cmpd="sng" algn="ctr">
+                      <a:solidFill>
+                        <a:srgbClr val="FFF7EC"/>
+                      </a:solidFill>
+                      <a:prstDash val="solid"/>
+                      <a:round/>
+                      <a:headEnd type="none" w="med" len="med"/>
+                      <a:tailEnd type="none" w="med" len="med"/>
+                    </a:lnL>
+                    <a:lnR w="12700" cap="flat" cmpd="sng" algn="ctr">
+                      <a:solidFill>
+                        <a:srgbClr val="FFF7EC"/>
+                      </a:solidFill>
+                      <a:prstDash val="solid"/>
+                      <a:round/>
+                      <a:headEnd type="none" w="med" len="med"/>
+                      <a:tailEnd type="none" w="med" len="med"/>
+                    </a:lnR>
+                    <a:lnT w="12700" cap="flat" cmpd="sng" algn="ctr">
+                      <a:solidFill>
+                        <a:srgbClr val="FFF7EC"/>
+                      </a:solidFill>
+                      <a:prstDash val="solid"/>
+                      <a:round/>
+                      <a:headEnd type="none" w="med" len="med"/>
+                      <a:tailEnd type="none" w="med" len="med"/>
+                    </a:lnT>
+                    <a:lnB w="12700" cap="flat" cmpd="sng" algn="ctr">
+                      <a:solidFill>
+                        <a:srgbClr val="FFF7EC"/>
+                      </a:solidFill>
+                      <a:prstDash val="solid"/>
+                      <a:round/>
+                      <a:headEnd type="none" w="med" len="med"/>
+                      <a:tailEnd type="none" w="med" len="med"/>
+                    </a:lnB>
+                    <a:solidFill>
+                      <a:schemeClr val="bg1"/>
+                    </a:solidFill>
+                  </a:tcPr>
+                </a:tc>
+                <a:tc>
+                  <a:txBody>
+                    <a:bodyPr/>
+                    <a:lstStyle/>
+                    <a:p>
+                      <a:pPr indent="0" marL="0">
+                        <a:buNone/>
+                      </a:pPr>
+                      <a:r>
+                        <a:rPr lang="en-US" sz="1300" dirty="0">
+                          <a:solidFill>
+                            <a:schemeClr val="tx1"/>
+                          </a:solidFill>
+                        </a:rPr>
+                        <a:t>4–5 per month</a:t>
+                      </a:r>
+                      <a:endParaRPr lang="en-US" sz="1300" dirty="0"/>
+                    </a:p>
+                  </a:txBody>
+                  <a:tcPr marL="73152" marR="73152" marT="73152" marB="73152" anchor="ctr">
+                    <a:lnL w="12700" cap="flat" cmpd="sng" algn="ctr">
+                      <a:solidFill>
+                        <a:srgbClr val="FFF7EC"/>
+                      </a:solidFill>
+                      <a:prstDash val="solid"/>
+                      <a:round/>
+                      <a:headEnd type="none" w="med" len="med"/>
+                      <a:tailEnd type="none" w="med" len="med"/>
+                    </a:lnL>
+                    <a:lnR w="12700" cap="flat" cmpd="sng" algn="ctr">
+                      <a:solidFill>
+                        <a:srgbClr val="FFF7EC"/>
+                      </a:solidFill>
+                      <a:prstDash val="solid"/>
+                      <a:round/>
+                      <a:headEnd type="none" w="med" len="med"/>
+                      <a:tailEnd type="none" w="med" len="med"/>
+                    </a:lnR>
+                    <a:lnT w="12700" cap="flat" cmpd="sng" algn="ctr">
+                      <a:solidFill>
+                        <a:srgbClr val="FFF7EC"/>
+                      </a:solidFill>
+                      <a:prstDash val="solid"/>
+                      <a:round/>
+                      <a:headEnd type="none" w="med" len="med"/>
+                      <a:tailEnd type="none" w="med" len="med"/>
+                    </a:lnT>
+                    <a:lnB w="12700" cap="flat" cmpd="sng" algn="ctr">
+                      <a:solidFill>
+                        <a:srgbClr val="FFF7EC"/>
+                      </a:solidFill>
+                      <a:prstDash val="solid"/>
+                      <a:round/>
+                      <a:headEnd type="none" w="med" len="med"/>
+                      <a:tailEnd type="none" w="med" len="med"/>
+                    </a:lnB>
+                    <a:solidFill>
+                      <a:schemeClr val="bg1"/>
+                    </a:solidFill>
+                  </a:tcPr>
+                </a:tc>
+                <a:tc>
+                  <a:txBody>
+                    <a:bodyPr/>
+                    <a:lstStyle/>
+                    <a:p>
+                      <a:pPr indent="0" marL="0">
+                        <a:buNone/>
+                      </a:pPr>
+                      <a:r>
+                        <a:rPr lang="en-US" sz="1300" dirty="0">
+                          <a:solidFill>
+                            <a:schemeClr val="tx1"/>
+                          </a:solidFill>
+                        </a:rPr>
+                        <a:t>~2.7 per month (8 in JAS)</a:t>
+                      </a:r>
+                      <a:endParaRPr lang="en-US" sz="1300" dirty="0"/>
+                    </a:p>
+                  </a:txBody>
+                  <a:tcPr marL="73152" marR="73152" marT="73152" marB="73152" anchor="ctr">
+                    <a:lnL w="12700" cap="flat" cmpd="sng" algn="ctr">
+                      <a:solidFill>
+                        <a:srgbClr val="FFF7EC"/>
+                      </a:solidFill>
+                      <a:prstDash val="solid"/>
+                      <a:round/>
+                      <a:headEnd type="none" w="med" len="med"/>
+                      <a:tailEnd type="none" w="med" len="med"/>
+                    </a:lnL>
+                    <a:lnR w="12700" cap="flat" cmpd="sng" algn="ctr">
+                      <a:solidFill>
+                        <a:srgbClr val="FFF7EC"/>
+                      </a:solidFill>
+                      <a:prstDash val="solid"/>
+                      <a:round/>
+                      <a:headEnd type="none" w="med" len="med"/>
+                      <a:tailEnd type="none" w="med" len="med"/>
+                    </a:lnR>
+                    <a:lnT w="12700" cap="flat" cmpd="sng" algn="ctr">
+                      <a:solidFill>
+                        <a:srgbClr val="FFF7EC"/>
+                      </a:solidFill>
+                      <a:prstDash val="solid"/>
+                      <a:round/>
+                      <a:headEnd type="none" w="med" len="med"/>
+                      <a:tailEnd type="none" w="med" len="med"/>
+                    </a:lnT>
+                    <a:lnB w="12700" cap="flat" cmpd="sng" algn="ctr">
+                      <a:solidFill>
+                        <a:srgbClr val="FFF7EC"/>
+                      </a:solidFill>
+                      <a:prstDash val="solid"/>
+                      <a:round/>
+                      <a:headEnd type="none" w="med" len="med"/>
+                      <a:tailEnd type="none" w="med" len="med"/>
+                    </a:lnB>
+                    <a:solidFill>
+                      <a:schemeClr val="bg1"/>
+                    </a:solidFill>
+                  </a:tcPr>
+                </a:tc>
+                <a:tc>
+                  <a:txBody>
+                    <a:bodyPr/>
+                    <a:lstStyle/>
+                    <a:p>
+                      <a:pPr algn="ctr" indent="0" marL="0">
+                        <a:buNone/>
+                      </a:pPr>
+                      <a:r>
+                        <a:rPr lang="en-US" sz="1300" b="1" dirty="0">
+                          <a:solidFill>
+                            <a:srgbClr val="B3561A"/>
+                          </a:solidFill>
+                        </a:rPr>
+                        <a:t>Below</a:t>
+                      </a:r>
+                      <a:endParaRPr lang="en-US" sz="1300" dirty="0"/>
+                    </a:p>
+                  </a:txBody>
+                  <a:tcPr marL="73152" marR="73152" marT="73152" marB="73152" anchor="ctr">
+                    <a:lnL w="12700" cap="flat" cmpd="sng" algn="ctr">
+                      <a:solidFill>
+                        <a:srgbClr val="FFF7EC"/>
+                      </a:solidFill>
+                      <a:prstDash val="solid"/>
+                      <a:round/>
+                      <a:headEnd type="none" w="med" len="med"/>
+                      <a:tailEnd type="none" w="med" len="med"/>
+                    </a:lnL>
+                    <a:lnR w="12700" cap="flat" cmpd="sng" algn="ctr">
+                      <a:solidFill>
+                        <a:srgbClr val="FFF7EC"/>
+                      </a:solidFill>
+                      <a:prstDash val="solid"/>
+                      <a:round/>
+                      <a:headEnd type="none" w="med" len="med"/>
+                      <a:tailEnd type="none" w="med" len="med"/>
+                    </a:lnR>
+                    <a:lnT w="12700" cap="flat" cmpd="sng" algn="ctr">
+                      <a:solidFill>
+                        <a:srgbClr val="FFF7EC"/>
+                      </a:solidFill>
+                      <a:prstDash val="solid"/>
+                      <a:round/>
+                      <a:headEnd type="none" w="med" len="med"/>
+                      <a:tailEnd type="none" w="med" len="med"/>
+                    </a:lnT>
+                    <a:lnB w="12700" cap="flat" cmpd="sng" algn="ctr">
+                      <a:solidFill>
+                        <a:srgbClr val="FFF7EC"/>
+                      </a:solidFill>
+                      <a:prstDash val="solid"/>
+                      <a:round/>
+                      <a:headEnd type="none" w="med" len="med"/>
+                      <a:tailEnd type="none" w="med" len="med"/>
+                    </a:lnB>
+                    <a:solidFill>
+                      <a:srgbClr val="FDF0CF"/>
+                    </a:solidFill>
+                  </a:tcPr>
+                </a:tc>
+              </a:tr>
+              <a:tr h="512064">
+                <a:tc>
+                  <a:txBody>
+                    <a:bodyPr/>
+                    <a:lstStyle/>
+                    <a:p>
+                      <a:pPr indent="0" marL="0">
+                        <a:buNone/>
+                      </a:pPr>
+                      <a:r>
+                        <a:rPr lang="en-US" sz="1300" b="1" dirty="0">
+                          <a:solidFill>
+                            <a:schemeClr val="tx1"/>
+                          </a:solidFill>
+                        </a:rPr>
+                        <a:t>AI TVC / YouTube ads</a:t>
+                      </a:r>
+                      <a:endParaRPr lang="en-US" sz="1300" dirty="0"/>
+                    </a:p>
+                  </a:txBody>
+                  <a:tcPr marL="73152" marR="73152" marT="73152" marB="73152" anchor="ctr">
+                    <a:lnL w="12700" cap="flat" cmpd="sng" algn="ctr">
+                      <a:solidFill>
+                        <a:srgbClr val="FFF7EC"/>
+                      </a:solidFill>
+                      <a:prstDash val="solid"/>
+                      <a:round/>
+                      <a:headEnd type="none" w="med" len="med"/>
+                      <a:tailEnd type="none" w="med" len="med"/>
+                    </a:lnL>
+                    <a:lnR w="12700" cap="flat" cmpd="sng" algn="ctr">
+                      <a:solidFill>
+                        <a:srgbClr val="FFF7EC"/>
+                      </a:solidFill>
+                      <a:prstDash val="solid"/>
+                      <a:round/>
+                      <a:headEnd type="none" w="med" len="med"/>
+                      <a:tailEnd type="none" w="med" len="med"/>
+                    </a:lnR>
+                    <a:lnT w="12700" cap="flat" cmpd="sng" algn="ctr">
+                      <a:solidFill>
+                        <a:srgbClr val="FFF7EC"/>
+                      </a:solidFill>
+                      <a:prstDash val="solid"/>
+                      <a:round/>
+                      <a:headEnd type="none" w="med" len="med"/>
+                      <a:tailEnd type="none" w="med" len="med"/>
+                    </a:lnT>
+                    <a:lnB w="12700" cap="flat" cmpd="sng" algn="ctr">
+                      <a:solidFill>
+                        <a:srgbClr val="FFF7EC"/>
+                      </a:solidFill>
+                      <a:prstDash val="solid"/>
+                      <a:round/>
+                      <a:headEnd type="none" w="med" len="med"/>
+                      <a:tailEnd type="none" w="med" len="med"/>
+                    </a:lnB>
+                    <a:solidFill>
+                      <a:schemeClr val="bg1"/>
+                    </a:solidFill>
+                  </a:tcPr>
+                </a:tc>
+                <a:tc>
+                  <a:txBody>
+                    <a:bodyPr/>
+                    <a:lstStyle/>
+                    <a:p>
+                      <a:pPr indent="0" marL="0">
+                        <a:buNone/>
+                      </a:pPr>
+                      <a:r>
+                        <a:rPr lang="en-US" sz="1300" dirty="0">
+                          <a:solidFill>
+                            <a:schemeClr val="tx1"/>
+                          </a:solidFill>
+                        </a:rPr>
+                        <a:t>R&amp;D and trial run before pitching</a:t>
+                      </a:r>
+                      <a:endParaRPr lang="en-US" sz="1300" dirty="0"/>
+                    </a:p>
+                  </a:txBody>
+                  <a:tcPr marL="73152" marR="73152" marT="73152" marB="73152" anchor="ctr">
+                    <a:lnL w="12700" cap="flat" cmpd="sng" algn="ctr">
+                      <a:solidFill>
+                        <a:srgbClr val="FFF7EC"/>
+                      </a:solidFill>
+                      <a:prstDash val="solid"/>
+                      <a:round/>
+                      <a:headEnd type="none" w="med" len="med"/>
+                      <a:tailEnd type="none" w="med" len="med"/>
+                    </a:lnL>
+                    <a:lnR w="12700" cap="flat" cmpd="sng" algn="ctr">
+                      <a:solidFill>
+                        <a:srgbClr val="FFF7EC"/>
+                      </a:solidFill>
+                      <a:prstDash val="solid"/>
+                      <a:round/>
+                      <a:headEnd type="none" w="med" len="med"/>
+                      <a:tailEnd type="none" w="med" len="med"/>
+                    </a:lnR>
+                    <a:lnT w="12700" cap="flat" cmpd="sng" algn="ctr">
+                      <a:solidFill>
+                        <a:srgbClr val="FFF7EC"/>
+                      </a:solidFill>
+                      <a:prstDash val="solid"/>
+                      <a:round/>
+                      <a:headEnd type="none" w="med" len="med"/>
+                      <a:tailEnd type="none" w="med" len="med"/>
+                    </a:lnT>
+                    <a:lnB w="12700" cap="flat" cmpd="sng" algn="ctr">
+                      <a:solidFill>
+                        <a:srgbClr val="FFF7EC"/>
+                      </a:solidFill>
+                      <a:prstDash val="solid"/>
+                      <a:round/>
+                      <a:headEnd type="none" w="med" len="med"/>
+                      <a:tailEnd type="none" w="med" len="med"/>
+                    </a:lnB>
+                    <a:solidFill>
+                      <a:schemeClr val="bg1"/>
+                    </a:solidFill>
+                  </a:tcPr>
+                </a:tc>
+                <a:tc>
+                  <a:txBody>
+                    <a:bodyPr/>
+                    <a:lstStyle/>
+                    <a:p>
+                      <a:pPr indent="0" marL="0">
+                        <a:buNone/>
+                      </a:pPr>
+                      <a:r>
+                        <a:rPr lang="en-US" sz="1300" dirty="0">
+                          <a:solidFill>
+                            <a:schemeClr val="tx1"/>
+                          </a:solidFill>
+                        </a:rPr>
+                        <a:t>3 TVC ads for TVS Green</a:t>
+                      </a:r>
+                      <a:endParaRPr lang="en-US" sz="1300" dirty="0"/>
+                    </a:p>
+                  </a:txBody>
+                  <a:tcPr marL="73152" marR="73152" marT="73152" marB="73152" anchor="ctr">
+                    <a:lnL w="12700" cap="flat" cmpd="sng" algn="ctr">
+                      <a:solidFill>
+                        <a:srgbClr val="FFF7EC"/>
+                      </a:solidFill>
+                      <a:prstDash val="solid"/>
+                      <a:round/>
+                      <a:headEnd type="none" w="med" len="med"/>
+                      <a:tailEnd type="none" w="med" len="med"/>
+                    </a:lnL>
+                    <a:lnR w="12700" cap="flat" cmpd="sng" algn="ctr">
+                      <a:solidFill>
+                        <a:srgbClr val="FFF7EC"/>
+                      </a:solidFill>
+                      <a:prstDash val="solid"/>
+                      <a:round/>
+                      <a:headEnd type="none" w="med" len="med"/>
+                      <a:tailEnd type="none" w="med" len="med"/>
+                    </a:lnR>
+                    <a:lnT w="12700" cap="flat" cmpd="sng" algn="ctr">
+                      <a:solidFill>
+                        <a:srgbClr val="FFF7EC"/>
+                      </a:solidFill>
+                      <a:prstDash val="solid"/>
+                      <a:round/>
+                      <a:headEnd type="none" w="med" len="med"/>
+                      <a:tailEnd type="none" w="med" len="med"/>
+                    </a:lnT>
+                    <a:lnB w="12700" cap="flat" cmpd="sng" algn="ctr">
+                      <a:solidFill>
+                        <a:srgbClr val="FFF7EC"/>
+                      </a:solidFill>
+                      <a:prstDash val="solid"/>
+                      <a:round/>
+                      <a:headEnd type="none" w="med" len="med"/>
+                      <a:tailEnd type="none" w="med" len="med"/>
+                    </a:lnB>
+                    <a:solidFill>
+                      <a:schemeClr val="bg1"/>
+                    </a:solidFill>
+                  </a:tcPr>
+                </a:tc>
+                <a:tc>
+                  <a:txBody>
+                    <a:bodyPr/>
+                    <a:lstStyle/>
+                    <a:p>
+                      <a:pPr algn="ctr" indent="0" marL="0">
+                        <a:buNone/>
+                      </a:pPr>
+                      <a:r>
+                        <a:rPr lang="en-US" sz="1300" b="1" dirty="0">
+                          <a:solidFill>
+                            <a:schemeClr val="tx2"/>
+                          </a:solidFill>
+                        </a:rPr>
+                        <a:t>Delivered</a:t>
+                      </a:r>
+                      <a:endParaRPr lang="en-US" sz="1300" dirty="0"/>
+                    </a:p>
+                  </a:txBody>
+                  <a:tcPr marL="73152" marR="73152" marT="73152" marB="73152" anchor="ctr">
+                    <a:lnL w="12700" cap="flat" cmpd="sng" algn="ctr">
+                      <a:solidFill>
+                        <a:srgbClr val="FFF7EC"/>
+                      </a:solidFill>
+                      <a:prstDash val="solid"/>
+                      <a:round/>
+                      <a:headEnd type="none" w="med" len="med"/>
+                      <a:tailEnd type="none" w="med" len="med"/>
+                    </a:lnL>
+                    <a:lnR w="12700" cap="flat" cmpd="sng" algn="ctr">
+                      <a:solidFill>
+                        <a:srgbClr val="FFF7EC"/>
+                      </a:solidFill>
+                      <a:prstDash val="solid"/>
+                      <a:round/>
+                      <a:headEnd type="none" w="med" len="med"/>
+                      <a:tailEnd type="none" w="med" len="med"/>
+                    </a:lnR>
+                    <a:lnT w="12700" cap="flat" cmpd="sng" algn="ctr">
+                      <a:solidFill>
+                        <a:srgbClr val="FFF7EC"/>
+                      </a:solidFill>
+                      <a:prstDash val="solid"/>
+                      <a:round/>
+                      <a:headEnd type="none" w="med" len="med"/>
+                      <a:tailEnd type="none" w="med" len="med"/>
+                    </a:lnT>
+                    <a:lnB w="12700" cap="flat" cmpd="sng" algn="ctr">
+                      <a:solidFill>
+                        <a:srgbClr val="FFF7EC"/>
+                      </a:solidFill>
+                      <a:prstDash val="solid"/>
+                      <a:round/>
+                      <a:headEnd type="none" w="med" len="med"/>
+                      <a:tailEnd type="none" w="med" len="med"/>
+                    </a:lnB>
+                    <a:solidFill>
+                      <a:srgbClr val="E3F1E8"/>
+                    </a:solidFill>
+                  </a:tcPr>
+                </a:tc>
+              </a:tr>
+              <a:tr h="512064">
+                <a:tc>
+                  <a:txBody>
+                    <a:bodyPr/>
+                    <a:lstStyle/>
+                    <a:p>
+                      <a:pPr indent="0" marL="0">
+                        <a:buNone/>
+                      </a:pPr>
+                      <a:r>
+                        <a:rPr lang="en-US" sz="1300" b="1" dirty="0">
+                          <a:solidFill>
+                            <a:schemeClr val="tx1"/>
+                          </a:solidFill>
+                        </a:rPr>
+                        <a:t>Upsell: Star Health ads, TMB YouTube</a:t>
+                      </a:r>
+                      <a:endParaRPr lang="en-US" sz="1300" dirty="0"/>
+                    </a:p>
+                  </a:txBody>
+                  <a:tcPr marL="73152" marR="73152" marT="73152" marB="73152" anchor="ctr">
+                    <a:lnL w="12700" cap="flat" cmpd="sng" algn="ctr">
+                      <a:solidFill>
+                        <a:srgbClr val="FFF7EC"/>
+                      </a:solidFill>
+                      <a:prstDash val="solid"/>
+                      <a:round/>
+                      <a:headEnd type="none" w="med" len="med"/>
+                      <a:tailEnd type="none" w="med" len="med"/>
+                    </a:lnL>
+                    <a:lnR w="12700" cap="flat" cmpd="sng" algn="ctr">
+                      <a:solidFill>
+                        <a:srgbClr val="FFF7EC"/>
+                      </a:solidFill>
+                      <a:prstDash val="solid"/>
+                      <a:round/>
+                      <a:headEnd type="none" w="med" len="med"/>
+                      <a:tailEnd type="none" w="med" len="med"/>
+                    </a:lnR>
+                    <a:lnT w="12700" cap="flat" cmpd="sng" algn="ctr">
+                      <a:solidFill>
+                        <a:srgbClr val="FFF7EC"/>
+                      </a:solidFill>
+                      <a:prstDash val="solid"/>
+                      <a:round/>
+                      <a:headEnd type="none" w="med" len="med"/>
+                      <a:tailEnd type="none" w="med" len="med"/>
+                    </a:lnT>
+                    <a:lnB w="12700" cap="flat" cmpd="sng" algn="ctr">
+                      <a:solidFill>
+                        <a:srgbClr val="FFF7EC"/>
+                      </a:solidFill>
+                      <a:prstDash val="solid"/>
+                      <a:round/>
+                      <a:headEnd type="none" w="med" len="med"/>
+                      <a:tailEnd type="none" w="med" len="med"/>
+                    </a:lnB>
+                    <a:solidFill>
+                      <a:schemeClr val="bg1"/>
+                    </a:solidFill>
+                  </a:tcPr>
+                </a:tc>
+                <a:tc>
+                  <a:txBody>
+                    <a:bodyPr/>
+                    <a:lstStyle/>
+                    <a:p>
+                      <a:pPr indent="0" marL="0">
+                        <a:buNone/>
+                      </a:pPr>
+                      <a:r>
+                        <a:rPr lang="en-US" sz="1300" dirty="0">
+                          <a:solidFill>
+                            <a:schemeClr val="tx1"/>
+                          </a:solidFill>
+                        </a:rPr>
+                        <a:t>Quarterly ads / YouTube campaigns</a:t>
+                      </a:r>
+                      <a:endParaRPr lang="en-US" sz="1300" dirty="0"/>
+                    </a:p>
+                  </a:txBody>
+                  <a:tcPr marL="73152" marR="73152" marT="73152" marB="73152" anchor="ctr">
+                    <a:lnL w="12700" cap="flat" cmpd="sng" algn="ctr">
+                      <a:solidFill>
+                        <a:srgbClr val="FFF7EC"/>
+                      </a:solidFill>
+                      <a:prstDash val="solid"/>
+                      <a:round/>
+                      <a:headEnd type="none" w="med" len="med"/>
+                      <a:tailEnd type="none" w="med" len="med"/>
+                    </a:lnL>
+                    <a:lnR w="12700" cap="flat" cmpd="sng" algn="ctr">
+                      <a:solidFill>
+                        <a:srgbClr val="FFF7EC"/>
+                      </a:solidFill>
+                      <a:prstDash val="solid"/>
+                      <a:round/>
+                      <a:headEnd type="none" w="med" len="med"/>
+                      <a:tailEnd type="none" w="med" len="med"/>
+                    </a:lnR>
+                    <a:lnT w="12700" cap="flat" cmpd="sng" algn="ctr">
+                      <a:solidFill>
+                        <a:srgbClr val="FFF7EC"/>
+                      </a:solidFill>
+                      <a:prstDash val="solid"/>
+                      <a:round/>
+                      <a:headEnd type="none" w="med" len="med"/>
+                      <a:tailEnd type="none" w="med" len="med"/>
+                    </a:lnT>
+                    <a:lnB w="12700" cap="flat" cmpd="sng" algn="ctr">
+                      <a:solidFill>
+                        <a:srgbClr val="FFF7EC"/>
+                      </a:solidFill>
+                      <a:prstDash val="solid"/>
+                      <a:round/>
+                      <a:headEnd type="none" w="med" len="med"/>
+                      <a:tailEnd type="none" w="med" len="med"/>
+                    </a:lnB>
+                    <a:solidFill>
+                      <a:schemeClr val="bg1"/>
+                    </a:solidFill>
+                  </a:tcPr>
+                </a:tc>
+                <a:tc>
+                  <a:txBody>
+                    <a:bodyPr/>
+                    <a:lstStyle/>
+                    <a:p>
+                      <a:pPr indent="0" marL="0">
+                        <a:buNone/>
+                      </a:pPr>
+                      <a:r>
+                        <a:rPr lang="en-US" sz="1300" i="1" dirty="0">
+                          <a:solidFill>
+                            <a:srgbClr val="B3561A"/>
+                          </a:solidFill>
+                        </a:rPr>
+                        <a:t>[add: pitched? converted?]</a:t>
+                      </a:r>
+                      <a:endParaRPr lang="en-US" sz="1300" dirty="0"/>
+                    </a:p>
+                  </a:txBody>
+                  <a:tcPr marL="73152" marR="73152" marT="73152" marB="73152" anchor="ctr">
+                    <a:lnL w="12700" cap="flat" cmpd="sng" algn="ctr">
+                      <a:solidFill>
+                        <a:srgbClr val="FFF7EC"/>
+                      </a:solidFill>
+                      <a:prstDash val="solid"/>
+                      <a:round/>
+                      <a:headEnd type="none" w="med" len="med"/>
+                      <a:tailEnd type="none" w="med" len="med"/>
+                    </a:lnL>
+                    <a:lnR w="12700" cap="flat" cmpd="sng" algn="ctr">
+                      <a:solidFill>
+                        <a:srgbClr val="FFF7EC"/>
+                      </a:solidFill>
+                      <a:prstDash val="solid"/>
+                      <a:round/>
+                      <a:headEnd type="none" w="med" len="med"/>
+                      <a:tailEnd type="none" w="med" len="med"/>
+                    </a:lnR>
+                    <a:lnT w="12700" cap="flat" cmpd="sng" algn="ctr">
+                      <a:solidFill>
+                        <a:srgbClr val="FFF7EC"/>
+                      </a:solidFill>
+                      <a:prstDash val="solid"/>
+                      <a:round/>
+                      <a:headEnd type="none" w="med" len="med"/>
+                      <a:tailEnd type="none" w="med" len="med"/>
+                    </a:lnT>
+                    <a:lnB w="12700" cap="flat" cmpd="sng" algn="ctr">
+                      <a:solidFill>
+                        <a:srgbClr val="FFF7EC"/>
+                      </a:solidFill>
+                      <a:prstDash val="solid"/>
+                      <a:round/>
+                      <a:headEnd type="none" w="med" len="med"/>
+                      <a:tailEnd type="none" w="med" len="med"/>
+                    </a:lnB>
+                    <a:solidFill>
+                      <a:srgbClr val="FDE5CC"/>
+                    </a:solidFill>
+                  </a:tcPr>
+                </a:tc>
+                <a:tc>
+                  <a:txBody>
+                    <a:bodyPr/>
+                    <a:lstStyle/>
+                    <a:p>
+                      <a:pPr algn="ctr" indent="0" marL="0">
+                        <a:buNone/>
+                      </a:pPr>
+                      <a:r>
+                        <a:rPr lang="en-US" sz="1300" i="1" dirty="0">
+                          <a:solidFill>
+                            <a:srgbClr val="B3561A"/>
+                          </a:solidFill>
+                        </a:rPr>
+                        <a:t>[add]</a:t>
+                      </a:r>
+                      <a:endParaRPr lang="en-US" sz="1300" dirty="0"/>
+                    </a:p>
+                  </a:txBody>
+                  <a:tcPr marL="73152" marR="73152" marT="73152" marB="73152" anchor="ctr">
+                    <a:lnL w="12700" cap="flat" cmpd="sng" algn="ctr">
+                      <a:solidFill>
+                        <a:srgbClr val="FFF7EC"/>
+                      </a:solidFill>
+                      <a:prstDash val="solid"/>
+                      <a:round/>
+                      <a:headEnd type="none" w="med" len="med"/>
+                      <a:tailEnd type="none" w="med" len="med"/>
+                    </a:lnL>
+                    <a:lnR w="12700" cap="flat" cmpd="sng" algn="ctr">
+                      <a:solidFill>
+                        <a:srgbClr val="FFF7EC"/>
+                      </a:solidFill>
+                      <a:prstDash val="solid"/>
+                      <a:round/>
+                      <a:headEnd type="none" w="med" len="med"/>
+                      <a:tailEnd type="none" w="med" len="med"/>
+                    </a:lnR>
+                    <a:lnT w="12700" cap="flat" cmpd="sng" algn="ctr">
+                      <a:solidFill>
+                        <a:srgbClr val="FFF7EC"/>
+                      </a:solidFill>
+                      <a:prstDash val="solid"/>
+                      <a:round/>
+                      <a:headEnd type="none" w="med" len="med"/>
+                      <a:tailEnd type="none" w="med" len="med"/>
+                    </a:lnT>
+                    <a:lnB w="12700" cap="flat" cmpd="sng" algn="ctr">
+                      <a:solidFill>
+                        <a:srgbClr val="FFF7EC"/>
+                      </a:solidFill>
+                      <a:prstDash val="solid"/>
+                      <a:round/>
+                      <a:headEnd type="none" w="med" len="med"/>
+                      <a:tailEnd type="none" w="med" len="med"/>
+                    </a:lnB>
+                    <a:solidFill>
+                      <a:srgbClr val="FDE5CC"/>
+                    </a:solidFill>
+                  </a:tcPr>
+                </a:tc>
+              </a:tr>
+              <a:tr h="512064">
+                <a:tc>
+                  <a:txBody>
+                    <a:bodyPr/>
+                    <a:lstStyle/>
+                    <a:p>
+                      <a:pPr indent="0" marL="0">
+                        <a:buNone/>
+                      </a:pPr>
+                      <a:r>
+                        <a:rPr lang="en-US" sz="1300" b="1" dirty="0">
+                          <a:solidFill>
+                            <a:schemeClr val="tx1"/>
+                          </a:solidFill>
+                        </a:rPr>
+                        <a:t>New retainers</a:t>
+                      </a:r>
+                      <a:endParaRPr lang="en-US" sz="1300" dirty="0"/>
+                    </a:p>
+                  </a:txBody>
+                  <a:tcPr marL="73152" marR="73152" marT="73152" marB="73152" anchor="ctr">
+                    <a:lnL w="12700" cap="flat" cmpd="sng" algn="ctr">
+                      <a:solidFill>
+                        <a:srgbClr val="FFF7EC"/>
+                      </a:solidFill>
+                      <a:prstDash val="solid"/>
+                      <a:round/>
+                      <a:headEnd type="none" w="med" len="med"/>
+                      <a:tailEnd type="none" w="med" len="med"/>
+                    </a:lnL>
+                    <a:lnR w="12700" cap="flat" cmpd="sng" algn="ctr">
+                      <a:solidFill>
+                        <a:srgbClr val="FFF7EC"/>
+                      </a:solidFill>
+                      <a:prstDash val="solid"/>
+                      <a:round/>
+                      <a:headEnd type="none" w="med" len="med"/>
+                      <a:tailEnd type="none" w="med" len="med"/>
+                    </a:lnR>
+                    <a:lnT w="12700" cap="flat" cmpd="sng" algn="ctr">
+                      <a:solidFill>
+                        <a:srgbClr val="FFF7EC"/>
+                      </a:solidFill>
+                      <a:prstDash val="solid"/>
+                      <a:round/>
+                      <a:headEnd type="none" w="med" len="med"/>
+                      <a:tailEnd type="none" w="med" len="med"/>
+                    </a:lnT>
+                    <a:lnB w="12700" cap="flat" cmpd="sng" algn="ctr">
+                      <a:solidFill>
+                        <a:srgbClr val="FFF7EC"/>
+                      </a:solidFill>
+                      <a:prstDash val="solid"/>
+                      <a:round/>
+                      <a:headEnd type="none" w="med" len="med"/>
+                      <a:tailEnd type="none" w="med" len="med"/>
+                    </a:lnB>
+                    <a:solidFill>
+                      <a:schemeClr val="bg1"/>
+                    </a:solidFill>
+                  </a:tcPr>
+                </a:tc>
+                <a:tc>
+                  <a:txBody>
+                    <a:bodyPr/>
+                    <a:lstStyle/>
+                    <a:p>
+                      <a:pPr indent="0" marL="0">
+                        <a:buNone/>
+                      </a:pPr>
+                      <a:r>
+                        <a:rPr lang="en-US" sz="1300" dirty="0">
+                          <a:solidFill>
+                            <a:schemeClr val="tx1"/>
+                          </a:solidFill>
+                        </a:rPr>
+                        <a:t>+2 Type 1, +2 Type 2</a:t>
+                      </a:r>
+                      <a:endParaRPr lang="en-US" sz="1300" dirty="0"/>
+                    </a:p>
+                  </a:txBody>
+                  <a:tcPr marL="73152" marR="73152" marT="73152" marB="73152" anchor="ctr">
+                    <a:lnL w="12700" cap="flat" cmpd="sng" algn="ctr">
+                      <a:solidFill>
+                        <a:srgbClr val="FFF7EC"/>
+                      </a:solidFill>
+                      <a:prstDash val="solid"/>
+                      <a:round/>
+                      <a:headEnd type="none" w="med" len="med"/>
+                      <a:tailEnd type="none" w="med" len="med"/>
+                    </a:lnL>
+                    <a:lnR w="12700" cap="flat" cmpd="sng" algn="ctr">
+                      <a:solidFill>
+                        <a:srgbClr val="FFF7EC"/>
+                      </a:solidFill>
+                      <a:prstDash val="solid"/>
+                      <a:round/>
+                      <a:headEnd type="none" w="med" len="med"/>
+                      <a:tailEnd type="none" w="med" len="med"/>
+                    </a:lnR>
+                    <a:lnT w="12700" cap="flat" cmpd="sng" algn="ctr">
+                      <a:solidFill>
+                        <a:srgbClr val="FFF7EC"/>
+                      </a:solidFill>
+                      <a:prstDash val="solid"/>
+                      <a:round/>
+                      <a:headEnd type="none" w="med" len="med"/>
+                      <a:tailEnd type="none" w="med" len="med"/>
+                    </a:lnT>
+                    <a:lnB w="12700" cap="flat" cmpd="sng" algn="ctr">
+                      <a:solidFill>
+                        <a:srgbClr val="FFF7EC"/>
+                      </a:solidFill>
+                      <a:prstDash val="solid"/>
+                      <a:round/>
+                      <a:headEnd type="none" w="med" len="med"/>
+                      <a:tailEnd type="none" w="med" len="med"/>
+                    </a:lnB>
+                    <a:solidFill>
+                      <a:schemeClr val="bg1"/>
+                    </a:solidFill>
+                  </a:tcPr>
+                </a:tc>
+                <a:tc>
+                  <a:txBody>
+                    <a:bodyPr/>
+                    <a:lstStyle/>
+                    <a:p>
+                      <a:pPr indent="0" marL="0">
+                        <a:buNone/>
+                      </a:pPr>
+                      <a:r>
+                        <a:rPr lang="en-US" sz="1300" dirty="0">
+                          <a:solidFill>
+                            <a:schemeClr val="tx1"/>
+                          </a:solidFill>
+                        </a:rPr>
+                        <a:t>VGN Homes added  ·  [confirm: KIMS status]</a:t>
+                      </a:r>
+                      <a:endParaRPr lang="en-US" sz="1300" dirty="0"/>
+                    </a:p>
+                  </a:txBody>
+                  <a:tcPr marL="73152" marR="73152" marT="73152" marB="73152" anchor="ctr">
+                    <a:lnL w="12700" cap="flat" cmpd="sng" algn="ctr">
+                      <a:solidFill>
+                        <a:srgbClr val="FFF7EC"/>
+                      </a:solidFill>
+                      <a:prstDash val="solid"/>
+                      <a:round/>
+                      <a:headEnd type="none" w="med" len="med"/>
+                      <a:tailEnd type="none" w="med" len="med"/>
+                    </a:lnL>
+                    <a:lnR w="12700" cap="flat" cmpd="sng" algn="ctr">
+                      <a:solidFill>
+                        <a:srgbClr val="FFF7EC"/>
+                      </a:solidFill>
+                      <a:prstDash val="solid"/>
+                      <a:round/>
+                      <a:headEnd type="none" w="med" len="med"/>
+                      <a:tailEnd type="none" w="med" len="med"/>
+                    </a:lnR>
+                    <a:lnT w="12700" cap="flat" cmpd="sng" algn="ctr">
+                      <a:solidFill>
+                        <a:srgbClr val="FFF7EC"/>
+                      </a:solidFill>
+                      <a:prstDash val="solid"/>
+                      <a:round/>
+                      <a:headEnd type="none" w="med" len="med"/>
+                      <a:tailEnd type="none" w="med" len="med"/>
+                    </a:lnT>
+                    <a:lnB w="12700" cap="flat" cmpd="sng" algn="ctr">
+                      <a:solidFill>
+                        <a:srgbClr val="FFF7EC"/>
+                      </a:solidFill>
+                      <a:prstDash val="solid"/>
+                      <a:round/>
+                      <a:headEnd type="none" w="med" len="med"/>
+                      <a:tailEnd type="none" w="med" len="med"/>
+                    </a:lnB>
+                    <a:solidFill>
+                      <a:schemeClr val="bg1"/>
+                    </a:solidFill>
+                  </a:tcPr>
+                </a:tc>
+                <a:tc>
+                  <a:txBody>
+                    <a:bodyPr/>
+                    <a:lstStyle/>
+                    <a:p>
+                      <a:pPr algn="ctr" indent="0" marL="0">
+                        <a:buNone/>
+                      </a:pPr>
+                      <a:r>
+                        <a:rPr lang="en-US" sz="1300" b="1" dirty="0">
+                          <a:solidFill>
+                            <a:srgbClr val="B3561A"/>
+                          </a:solidFill>
+                        </a:rPr>
+                        <a:t>Partial</a:t>
+                      </a:r>
+                      <a:endParaRPr lang="en-US" sz="1300" dirty="0"/>
+                    </a:p>
+                  </a:txBody>
+                  <a:tcPr marL="73152" marR="73152" marT="73152" marB="73152" anchor="ctr">
+                    <a:lnL w="12700" cap="flat" cmpd="sng" algn="ctr">
+                      <a:solidFill>
+                        <a:srgbClr val="FFF7EC"/>
+                      </a:solidFill>
+                      <a:prstDash val="solid"/>
+                      <a:round/>
+                      <a:headEnd type="none" w="med" len="med"/>
+                      <a:tailEnd type="none" w="med" len="med"/>
+                    </a:lnL>
+                    <a:lnR w="12700" cap="flat" cmpd="sng" algn="ctr">
+                      <a:solidFill>
+                        <a:srgbClr val="FFF7EC"/>
+                      </a:solidFill>
+                      <a:prstDash val="solid"/>
+                      <a:round/>
+                      <a:headEnd type="none" w="med" len="med"/>
+                      <a:tailEnd type="none" w="med" len="med"/>
+                    </a:lnR>
+                    <a:lnT w="12700" cap="flat" cmpd="sng" algn="ctr">
+                      <a:solidFill>
+                        <a:srgbClr val="FFF7EC"/>
+                      </a:solidFill>
+                      <a:prstDash val="solid"/>
+                      <a:round/>
+                      <a:headEnd type="none" w="med" len="med"/>
+                      <a:tailEnd type="none" w="med" len="med"/>
+                    </a:lnT>
+                    <a:lnB w="12700" cap="flat" cmpd="sng" algn="ctr">
+                      <a:solidFill>
+                        <a:srgbClr val="FFF7EC"/>
+                      </a:solidFill>
+                      <a:prstDash val="solid"/>
+                      <a:round/>
+                      <a:headEnd type="none" w="med" len="med"/>
+                      <a:tailEnd type="none" w="med" len="med"/>
+                    </a:lnB>
+                    <a:solidFill>
+                      <a:srgbClr val="FDF0CF"/>
+                    </a:solidFill>
+                  </a:tcPr>
+                </a:tc>
+              </a:tr>
+              <a:tr h="512064">
+                <a:tc>
+                  <a:txBody>
+                    <a:bodyPr/>
+                    <a:lstStyle/>
+                    <a:p>
+                      <a:pPr indent="0" marL="0">
+                        <a:buNone/>
+                      </a:pPr>
+                      <a:r>
+                        <a:rPr lang="en-US" sz="1300" b="1" dirty="0">
+                          <a:solidFill>
+                            <a:schemeClr val="tx1"/>
+                          </a:solidFill>
+                        </a:rPr>
+                        <a:t>Gen-AI photography</a:t>
+                      </a:r>
+                      <a:endParaRPr lang="en-US" sz="1300" dirty="0"/>
+                    </a:p>
+                  </a:txBody>
+                  <a:tcPr marL="73152" marR="73152" marT="73152" marB="73152" anchor="ctr">
+                    <a:lnL w="12700" cap="flat" cmpd="sng" algn="ctr">
+                      <a:solidFill>
+                        <a:srgbClr val="FFF7EC"/>
+                      </a:solidFill>
+                      <a:prstDash val="solid"/>
+                      <a:round/>
+                      <a:headEnd type="none" w="med" len="med"/>
+                      <a:tailEnd type="none" w="med" len="med"/>
+                    </a:lnL>
+                    <a:lnR w="12700" cap="flat" cmpd="sng" algn="ctr">
+                      <a:solidFill>
+                        <a:srgbClr val="FFF7EC"/>
+                      </a:solidFill>
+                      <a:prstDash val="solid"/>
+                      <a:round/>
+                      <a:headEnd type="none" w="med" len="med"/>
+                      <a:tailEnd type="none" w="med" len="med"/>
+                    </a:lnR>
+                    <a:lnT w="12700" cap="flat" cmpd="sng" algn="ctr">
+                      <a:solidFill>
+                        <a:srgbClr val="FFF7EC"/>
+                      </a:solidFill>
+                      <a:prstDash val="solid"/>
+                      <a:round/>
+                      <a:headEnd type="none" w="med" len="med"/>
+                      <a:tailEnd type="none" w="med" len="med"/>
+                    </a:lnT>
+                    <a:lnB w="12700" cap="flat" cmpd="sng" algn="ctr">
+                      <a:solidFill>
+                        <a:srgbClr val="FFF7EC"/>
+                      </a:solidFill>
+                      <a:prstDash val="solid"/>
+                      <a:round/>
+                      <a:headEnd type="none" w="med" len="med"/>
+                      <a:tailEnd type="none" w="med" len="med"/>
+                    </a:lnB>
+                    <a:solidFill>
+                      <a:schemeClr val="bg1"/>
+                    </a:solidFill>
+                  </a:tcPr>
+                </a:tc>
+                <a:tc>
+                  <a:txBody>
+                    <a:bodyPr/>
+                    <a:lstStyle/>
+                    <a:p>
+                      <a:pPr indent="0" marL="0">
+                        <a:buNone/>
+                      </a:pPr>
+                      <a:r>
+                        <a:rPr lang="en-US" sz="1300" dirty="0">
+                          <a:solidFill>
+                            <a:schemeClr val="tx1"/>
+                          </a:solidFill>
+                        </a:rPr>
+                        <a:t>Food, fashion, industrial shoots</a:t>
+                      </a:r>
+                      <a:endParaRPr lang="en-US" sz="1300" dirty="0"/>
+                    </a:p>
+                  </a:txBody>
+                  <a:tcPr marL="73152" marR="73152" marT="73152" marB="73152" anchor="ctr">
+                    <a:lnL w="12700" cap="flat" cmpd="sng" algn="ctr">
+                      <a:solidFill>
+                        <a:srgbClr val="FFF7EC"/>
+                      </a:solidFill>
+                      <a:prstDash val="solid"/>
+                      <a:round/>
+                      <a:headEnd type="none" w="med" len="med"/>
+                      <a:tailEnd type="none" w="med" len="med"/>
+                    </a:lnL>
+                    <a:lnR w="12700" cap="flat" cmpd="sng" algn="ctr">
+                      <a:solidFill>
+                        <a:srgbClr val="FFF7EC"/>
+                      </a:solidFill>
+                      <a:prstDash val="solid"/>
+                      <a:round/>
+                      <a:headEnd type="none" w="med" len="med"/>
+                      <a:tailEnd type="none" w="med" len="med"/>
+                    </a:lnR>
+                    <a:lnT w="12700" cap="flat" cmpd="sng" algn="ctr">
+                      <a:solidFill>
+                        <a:srgbClr val="FFF7EC"/>
+                      </a:solidFill>
+                      <a:prstDash val="solid"/>
+                      <a:round/>
+                      <a:headEnd type="none" w="med" len="med"/>
+                      <a:tailEnd type="none" w="med" len="med"/>
+                    </a:lnT>
+                    <a:lnB w="12700" cap="flat" cmpd="sng" algn="ctr">
+                      <a:solidFill>
+                        <a:srgbClr val="FFF7EC"/>
+                      </a:solidFill>
+                      <a:prstDash val="solid"/>
+                      <a:round/>
+                      <a:headEnd type="none" w="med" len="med"/>
+                      <a:tailEnd type="none" w="med" len="med"/>
+                    </a:lnB>
+                    <a:solidFill>
+                      <a:schemeClr val="bg1"/>
+                    </a:solidFill>
+                  </a:tcPr>
+                </a:tc>
+                <a:tc>
+                  <a:txBody>
+                    <a:bodyPr/>
+                    <a:lstStyle/>
+                    <a:p>
+                      <a:pPr indent="0" marL="0">
+                        <a:buNone/>
+                      </a:pPr>
+                      <a:r>
+                        <a:rPr lang="en-US" sz="1300" i="1" dirty="0">
+                          <a:solidFill>
+                            <a:srgbClr val="B3561A"/>
+                          </a:solidFill>
+                        </a:rPr>
+                        <a:t>[add: any paid jobs?]</a:t>
+                      </a:r>
+                      <a:endParaRPr lang="en-US" sz="1300" dirty="0"/>
+                    </a:p>
+                  </a:txBody>
+                  <a:tcPr marL="73152" marR="73152" marT="73152" marB="73152" anchor="ctr">
+                    <a:lnL w="12700" cap="flat" cmpd="sng" algn="ctr">
+                      <a:solidFill>
+                        <a:srgbClr val="FFF7EC"/>
+                      </a:solidFill>
+                      <a:prstDash val="solid"/>
+                      <a:round/>
+                      <a:headEnd type="none" w="med" len="med"/>
+                      <a:tailEnd type="none" w="med" len="med"/>
+                    </a:lnL>
+                    <a:lnR w="12700" cap="flat" cmpd="sng" algn="ctr">
+                      <a:solidFill>
+                        <a:srgbClr val="FFF7EC"/>
+                      </a:solidFill>
+                      <a:prstDash val="solid"/>
+                      <a:round/>
+                      <a:headEnd type="none" w="med" len="med"/>
+                      <a:tailEnd type="none" w="med" len="med"/>
+                    </a:lnR>
+                    <a:lnT w="12700" cap="flat" cmpd="sng" algn="ctr">
+                      <a:solidFill>
+                        <a:srgbClr val="FFF7EC"/>
+                      </a:solidFill>
+                      <a:prstDash val="solid"/>
+                      <a:round/>
+                      <a:headEnd type="none" w="med" len="med"/>
+                      <a:tailEnd type="none" w="med" len="med"/>
+                    </a:lnT>
+                    <a:lnB w="12700" cap="flat" cmpd="sng" algn="ctr">
+                      <a:solidFill>
+                        <a:srgbClr val="FFF7EC"/>
+                      </a:solidFill>
+                      <a:prstDash val="solid"/>
+                      <a:round/>
+                      <a:headEnd type="none" w="med" len="med"/>
+                      <a:tailEnd type="none" w="med" len="med"/>
+                    </a:lnB>
+                    <a:solidFill>
+                      <a:srgbClr val="FDE5CC"/>
+                    </a:solidFill>
+                  </a:tcPr>
+                </a:tc>
+                <a:tc>
+                  <a:txBody>
+                    <a:bodyPr/>
+                    <a:lstStyle/>
+                    <a:p>
+                      <a:pPr algn="ctr" indent="0" marL="0">
+                        <a:buNone/>
+                      </a:pPr>
+                      <a:r>
+                        <a:rPr lang="en-US" sz="1300" i="1" dirty="0">
+                          <a:solidFill>
+                            <a:srgbClr val="B3561A"/>
+                          </a:solidFill>
+                        </a:rPr>
+                        <a:t>[add]</a:t>
+                      </a:r>
+                      <a:endParaRPr lang="en-US" sz="1300" dirty="0"/>
+                    </a:p>
+                  </a:txBody>
+                  <a:tcPr marL="73152" marR="73152" marT="73152" marB="73152" anchor="ctr">
+                    <a:lnL w="12700" cap="flat" cmpd="sng" algn="ctr">
+                      <a:solidFill>
+                        <a:srgbClr val="FFF7EC"/>
+                      </a:solidFill>
+                      <a:prstDash val="solid"/>
+                      <a:round/>
+                      <a:headEnd type="none" w="med" len="med"/>
+                      <a:tailEnd type="none" w="med" len="med"/>
+                    </a:lnL>
+                    <a:lnR w="12700" cap="flat" cmpd="sng" algn="ctr">
+                      <a:solidFill>
+                        <a:srgbClr val="FFF7EC"/>
+                      </a:solidFill>
+                      <a:prstDash val="solid"/>
+                      <a:round/>
+                      <a:headEnd type="none" w="med" len="med"/>
+                      <a:tailEnd type="none" w="med" len="med"/>
+                    </a:lnR>
+                    <a:lnT w="12700" cap="flat" cmpd="sng" algn="ctr">
+                      <a:solidFill>
+                        <a:srgbClr val="FFF7EC"/>
+                      </a:solidFill>
+                      <a:prstDash val="solid"/>
+                      <a:round/>
+                      <a:headEnd type="none" w="med" len="med"/>
+                      <a:tailEnd type="none" w="med" len="med"/>
+                    </a:lnT>
+                    <a:lnB w="12700" cap="flat" cmpd="sng" algn="ctr">
+                      <a:solidFill>
+                        <a:srgbClr val="FFF7EC"/>
+                      </a:solidFill>
+                      <a:prstDash val="solid"/>
+                      <a:round/>
+                      <a:headEnd type="none" w="med" len="med"/>
+                      <a:tailEnd type="none" w="med" len="med"/>
+                    </a:lnB>
+                    <a:solidFill>
+                      <a:srgbClr val="FDE5CC"/>
+                    </a:solidFill>
+                  </a:tcPr>
+                </a:tc>
+              </a:tr>
+              <a:tr h="512064">
+                <a:tc>
+                  <a:txBody>
+                    <a:bodyPr/>
+                    <a:lstStyle/>
+                    <a:p>
+                      <a:pPr indent="0" marL="0">
+                        <a:buNone/>
+                      </a:pPr>
+                      <a:r>
+                        <a:rPr lang="en-US" sz="1300" b="1" dirty="0">
+                          <a:solidFill>
+                            <a:schemeClr val="tx1"/>
+                          </a:solidFill>
+                        </a:rPr>
+                        <a:t>Annual reports / white papers</a:t>
+                      </a:r>
+                      <a:endParaRPr lang="en-US" sz="1300" dirty="0"/>
+                    </a:p>
+                  </a:txBody>
+                  <a:tcPr marL="73152" marR="73152" marT="73152" marB="73152" anchor="ctr">
+                    <a:lnL w="12700" cap="flat" cmpd="sng" algn="ctr">
+                      <a:solidFill>
+                        <a:srgbClr val="FFF7EC"/>
+                      </a:solidFill>
+                      <a:prstDash val="solid"/>
+                      <a:round/>
+                      <a:headEnd type="none" w="med" len="med"/>
+                      <a:tailEnd type="none" w="med" len="med"/>
+                    </a:lnL>
+                    <a:lnR w="12700" cap="flat" cmpd="sng" algn="ctr">
+                      <a:solidFill>
+                        <a:srgbClr val="FFF7EC"/>
+                      </a:solidFill>
+                      <a:prstDash val="solid"/>
+                      <a:round/>
+                      <a:headEnd type="none" w="med" len="med"/>
+                      <a:tailEnd type="none" w="med" len="med"/>
+                    </a:lnR>
+                    <a:lnT w="12700" cap="flat" cmpd="sng" algn="ctr">
+                      <a:solidFill>
+                        <a:srgbClr val="FFF7EC"/>
+                      </a:solidFill>
+                      <a:prstDash val="solid"/>
+                      <a:round/>
+                      <a:headEnd type="none" w="med" len="med"/>
+                      <a:tailEnd type="none" w="med" len="med"/>
+                    </a:lnT>
+                    <a:lnB w="12700" cap="flat" cmpd="sng" algn="ctr">
+                      <a:solidFill>
+                        <a:srgbClr val="FFF7EC"/>
+                      </a:solidFill>
+                      <a:prstDash val="solid"/>
+                      <a:round/>
+                      <a:headEnd type="none" w="med" len="med"/>
+                      <a:tailEnd type="none" w="med" len="med"/>
+                    </a:lnB>
+                    <a:solidFill>
+                      <a:schemeClr val="bg1"/>
+                    </a:solidFill>
+                  </a:tcPr>
+                </a:tc>
+                <a:tc>
+                  <a:txBody>
+                    <a:bodyPr/>
+                    <a:lstStyle/>
+                    <a:p>
+                      <a:pPr indent="0" marL="0">
+                        <a:buNone/>
+                      </a:pPr>
+                      <a:r>
+                        <a:rPr lang="en-US" sz="1300" dirty="0">
+                          <a:solidFill>
+                            <a:schemeClr val="tx1"/>
+                          </a:solidFill>
+                        </a:rPr>
+                        <a:t>New high-value category</a:t>
+                      </a:r>
+                      <a:endParaRPr lang="en-US" sz="1300" dirty="0"/>
+                    </a:p>
+                  </a:txBody>
+                  <a:tcPr marL="73152" marR="73152" marT="73152" marB="73152" anchor="ctr">
+                    <a:lnL w="12700" cap="flat" cmpd="sng" algn="ctr">
+                      <a:solidFill>
+                        <a:srgbClr val="FFF7EC"/>
+                      </a:solidFill>
+                      <a:prstDash val="solid"/>
+                      <a:round/>
+                      <a:headEnd type="none" w="med" len="med"/>
+                      <a:tailEnd type="none" w="med" len="med"/>
+                    </a:lnL>
+                    <a:lnR w="12700" cap="flat" cmpd="sng" algn="ctr">
+                      <a:solidFill>
+                        <a:srgbClr val="FFF7EC"/>
+                      </a:solidFill>
+                      <a:prstDash val="solid"/>
+                      <a:round/>
+                      <a:headEnd type="none" w="med" len="med"/>
+                      <a:tailEnd type="none" w="med" len="med"/>
+                    </a:lnR>
+                    <a:lnT w="12700" cap="flat" cmpd="sng" algn="ctr">
+                      <a:solidFill>
+                        <a:srgbClr val="FFF7EC"/>
+                      </a:solidFill>
+                      <a:prstDash val="solid"/>
+                      <a:round/>
+                      <a:headEnd type="none" w="med" len="med"/>
+                      <a:tailEnd type="none" w="med" len="med"/>
+                    </a:lnT>
+                    <a:lnB w="12700" cap="flat" cmpd="sng" algn="ctr">
+                      <a:solidFill>
+                        <a:srgbClr val="FFF7EC"/>
+                      </a:solidFill>
+                      <a:prstDash val="solid"/>
+                      <a:round/>
+                      <a:headEnd type="none" w="med" len="med"/>
+                      <a:tailEnd type="none" w="med" len="med"/>
+                    </a:lnB>
+                    <a:solidFill>
+                      <a:schemeClr val="bg1"/>
+                    </a:solidFill>
+                  </a:tcPr>
+                </a:tc>
+                <a:tc>
+                  <a:txBody>
+                    <a:bodyPr/>
+                    <a:lstStyle/>
+                    <a:p>
+                      <a:pPr indent="0" marL="0">
+                        <a:buNone/>
+                      </a:pPr>
+                      <a:r>
+                        <a:rPr lang="en-US" sz="1300" dirty="0">
+                          <a:solidFill>
+                            <a:schemeClr val="tx1"/>
+                          </a:solidFill>
+                        </a:rPr>
+                        <a:t>None in the JAS tracker</a:t>
+                      </a:r>
+                      <a:endParaRPr lang="en-US" sz="1300" dirty="0"/>
+                    </a:p>
+                  </a:txBody>
+                  <a:tcPr marL="73152" marR="73152" marT="73152" marB="73152" anchor="ctr">
+                    <a:lnL w="12700" cap="flat" cmpd="sng" algn="ctr">
+                      <a:solidFill>
+                        <a:srgbClr val="FFF7EC"/>
+                      </a:solidFill>
+                      <a:prstDash val="solid"/>
+                      <a:round/>
+                      <a:headEnd type="none" w="med" len="med"/>
+                      <a:tailEnd type="none" w="med" len="med"/>
+                    </a:lnL>
+                    <a:lnR w="12700" cap="flat" cmpd="sng" algn="ctr">
+                      <a:solidFill>
+                        <a:srgbClr val="FFF7EC"/>
+                      </a:solidFill>
+                      <a:prstDash val="solid"/>
+                      <a:round/>
+                      <a:headEnd type="none" w="med" len="med"/>
+                      <a:tailEnd type="none" w="med" len="med"/>
+                    </a:lnR>
+                    <a:lnT w="12700" cap="flat" cmpd="sng" algn="ctr">
+                      <a:solidFill>
+                        <a:srgbClr val="FFF7EC"/>
+                      </a:solidFill>
+                      <a:prstDash val="solid"/>
+                      <a:round/>
+                      <a:headEnd type="none" w="med" len="med"/>
+                      <a:tailEnd type="none" w="med" len="med"/>
+                    </a:lnT>
+                    <a:lnB w="12700" cap="flat" cmpd="sng" algn="ctr">
+                      <a:solidFill>
+                        <a:srgbClr val="FFF7EC"/>
+                      </a:solidFill>
+                      <a:prstDash val="solid"/>
+                      <a:round/>
+                      <a:headEnd type="none" w="med" len="med"/>
+                      <a:tailEnd type="none" w="med" len="med"/>
+                    </a:lnB>
+                    <a:solidFill>
+                      <a:schemeClr val="bg1"/>
+                    </a:solidFill>
+                  </a:tcPr>
+                </a:tc>
+                <a:tc>
+                  <a:txBody>
+                    <a:bodyPr/>
+                    <a:lstStyle/>
+                    <a:p>
+                      <a:pPr algn="ctr" indent="0" marL="0">
+                        <a:buNone/>
+                      </a:pPr>
+                      <a:r>
+                        <a:rPr lang="en-US" sz="1300" b="1" dirty="0">
+                          <a:solidFill>
+                            <a:schemeClr val="accent3"/>
+                          </a:solidFill>
+                        </a:rPr>
+                        <a:t>Not started</a:t>
+                      </a:r>
+                      <a:endParaRPr lang="en-US" sz="1300" dirty="0"/>
+                    </a:p>
+                  </a:txBody>
+                  <a:tcPr marL="73152" marR="73152" marT="73152" marB="73152" anchor="ctr">
+                    <a:lnL w="12700" cap="flat" cmpd="sng" algn="ctr">
+                      <a:solidFill>
+                        <a:srgbClr val="FFF7EC"/>
+                      </a:solidFill>
+                      <a:prstDash val="solid"/>
+                      <a:round/>
+                      <a:headEnd type="none" w="med" len="med"/>
+                      <a:tailEnd type="none" w="med" len="med"/>
+                    </a:lnL>
+                    <a:lnR w="12700" cap="flat" cmpd="sng" algn="ctr">
+                      <a:solidFill>
+                        <a:srgbClr val="FFF7EC"/>
+                      </a:solidFill>
+                      <a:prstDash val="solid"/>
+                      <a:round/>
+                      <a:headEnd type="none" w="med" len="med"/>
+                      <a:tailEnd type="none" w="med" len="med"/>
+                    </a:lnR>
+                    <a:lnT w="12700" cap="flat" cmpd="sng" algn="ctr">
+                      <a:solidFill>
+                        <a:srgbClr val="FFF7EC"/>
+                      </a:solidFill>
+                      <a:prstDash val="solid"/>
+                      <a:round/>
+                      <a:headEnd type="none" w="med" len="med"/>
+                      <a:tailEnd type="none" w="med" len="med"/>
+                    </a:lnT>
+                    <a:lnB w="12700" cap="flat" cmpd="sng" algn="ctr">
+                      <a:solidFill>
+                        <a:srgbClr val="FFF7EC"/>
+                      </a:solidFill>
+                      <a:prstDash val="solid"/>
+                      <a:round/>
+                      <a:headEnd type="none" w="med" len="med"/>
+                      <a:tailEnd type="none" w="med" len="med"/>
+                    </a:lnB>
+                    <a:solidFill>
+                      <a:srgbClr val="F9DAD3"/>
+                    </a:solidFill>
+                  </a:tcPr>
+                </a:tc>
+              </a:tr>
+              <a:tr h="512064">
+                <a:tc>
+                  <a:txBody>
+                    <a:bodyPr/>
+                    <a:lstStyle/>
+                    <a:p>
+                      <a:pPr indent="0" marL="0">
+                        <a:buNone/>
+                      </a:pPr>
+                      <a:r>
+                        <a:rPr lang="en-US" sz="1300" b="1" dirty="0">
+                          <a:solidFill>
+                            <a:schemeClr val="tx1"/>
+                          </a:solidFill>
+                        </a:rPr>
+                        <a:t>Resources requested</a:t>
+                      </a:r>
+                      <a:endParaRPr lang="en-US" sz="1300" dirty="0"/>
+                    </a:p>
+                  </a:txBody>
+                  <a:tcPr marL="73152" marR="73152" marT="73152" marB="73152" anchor="ctr">
+                    <a:lnL w="12700" cap="flat" cmpd="sng" algn="ctr">
+                      <a:solidFill>
+                        <a:srgbClr val="FFF7EC"/>
+                      </a:solidFill>
+                      <a:prstDash val="solid"/>
+                      <a:round/>
+                      <a:headEnd type="none" w="med" len="med"/>
+                      <a:tailEnd type="none" w="med" len="med"/>
+                    </a:lnL>
+                    <a:lnR w="12700" cap="flat" cmpd="sng" algn="ctr">
+                      <a:solidFill>
+                        <a:srgbClr val="FFF7EC"/>
+                      </a:solidFill>
+                      <a:prstDash val="solid"/>
+                      <a:round/>
+                      <a:headEnd type="none" w="med" len="med"/>
+                      <a:tailEnd type="none" w="med" len="med"/>
+                    </a:lnR>
+                    <a:lnT w="12700" cap="flat" cmpd="sng" algn="ctr">
+                      <a:solidFill>
+                        <a:srgbClr val="FFF7EC"/>
+                      </a:solidFill>
+                      <a:prstDash val="solid"/>
+                      <a:round/>
+                      <a:headEnd type="none" w="med" len="med"/>
+                      <a:tailEnd type="none" w="med" len="med"/>
+                    </a:lnT>
+                    <a:lnB w="12700" cap="flat" cmpd="sng" algn="ctr">
+                      <a:solidFill>
+                        <a:srgbClr val="FFF7EC"/>
+                      </a:solidFill>
+                      <a:prstDash val="solid"/>
+                      <a:round/>
+                      <a:headEnd type="none" w="med" len="med"/>
+                      <a:tailEnd type="none" w="med" len="med"/>
+                    </a:lnB>
+                    <a:solidFill>
+                      <a:schemeClr val="bg1"/>
+                    </a:solidFill>
+                  </a:tcPr>
+                </a:tc>
+                <a:tc>
+                  <a:txBody>
+                    <a:bodyPr/>
+                    <a:lstStyle/>
+                    <a:p>
+                      <a:pPr indent="0" marL="0">
+                        <a:buNone/>
+                      </a:pPr>
+                      <a:r>
+                        <a:rPr lang="en-US" sz="1300" dirty="0">
+                          <a:solidFill>
+                            <a:schemeClr val="tx1"/>
+                          </a:solidFill>
+                        </a:rPr>
+                        <a:t>2 designers, 1 video, AI tools</a:t>
+                      </a:r>
+                      <a:endParaRPr lang="en-US" sz="1300" dirty="0"/>
+                    </a:p>
+                  </a:txBody>
+                  <a:tcPr marL="73152" marR="73152" marT="73152" marB="73152" anchor="ctr">
+                    <a:lnL w="12700" cap="flat" cmpd="sng" algn="ctr">
+                      <a:solidFill>
+                        <a:srgbClr val="FFF7EC"/>
+                      </a:solidFill>
+                      <a:prstDash val="solid"/>
+                      <a:round/>
+                      <a:headEnd type="none" w="med" len="med"/>
+                      <a:tailEnd type="none" w="med" len="med"/>
+                    </a:lnL>
+                    <a:lnR w="12700" cap="flat" cmpd="sng" algn="ctr">
+                      <a:solidFill>
+                        <a:srgbClr val="FFF7EC"/>
+                      </a:solidFill>
+                      <a:prstDash val="solid"/>
+                      <a:round/>
+                      <a:headEnd type="none" w="med" len="med"/>
+                      <a:tailEnd type="none" w="med" len="med"/>
+                    </a:lnR>
+                    <a:lnT w="12700" cap="flat" cmpd="sng" algn="ctr">
+                      <a:solidFill>
+                        <a:srgbClr val="FFF7EC"/>
+                      </a:solidFill>
+                      <a:prstDash val="solid"/>
+                      <a:round/>
+                      <a:headEnd type="none" w="med" len="med"/>
+                      <a:tailEnd type="none" w="med" len="med"/>
+                    </a:lnT>
+                    <a:lnB w="12700" cap="flat" cmpd="sng" algn="ctr">
+                      <a:solidFill>
+                        <a:srgbClr val="FFF7EC"/>
+                      </a:solidFill>
+                      <a:prstDash val="solid"/>
+                      <a:round/>
+                      <a:headEnd type="none" w="med" len="med"/>
+                      <a:tailEnd type="none" w="med" len="med"/>
+                    </a:lnB>
+                    <a:solidFill>
+                      <a:schemeClr val="bg1"/>
+                    </a:solidFill>
+                  </a:tcPr>
+                </a:tc>
+                <a:tc>
+                  <a:txBody>
+                    <a:bodyPr/>
+                    <a:lstStyle/>
+                    <a:p>
+                      <a:pPr indent="0" marL="0">
+                        <a:buNone/>
+                      </a:pPr>
+                      <a:r>
+                        <a:rPr lang="en-US" sz="1300" i="1" dirty="0">
+                          <a:solidFill>
+                            <a:srgbClr val="B3561A"/>
+                          </a:solidFill>
+                        </a:rPr>
+                        <a:t>[add: approved / pending]</a:t>
+                      </a:r>
+                      <a:endParaRPr lang="en-US" sz="1300" dirty="0"/>
+                    </a:p>
+                  </a:txBody>
+                  <a:tcPr marL="73152" marR="73152" marT="73152" marB="73152" anchor="ctr">
+                    <a:lnL w="12700" cap="flat" cmpd="sng" algn="ctr">
+                      <a:solidFill>
+                        <a:srgbClr val="FFF7EC"/>
+                      </a:solidFill>
+                      <a:prstDash val="solid"/>
+                      <a:round/>
+                      <a:headEnd type="none" w="med" len="med"/>
+                      <a:tailEnd type="none" w="med" len="med"/>
+                    </a:lnL>
+                    <a:lnR w="12700" cap="flat" cmpd="sng" algn="ctr">
+                      <a:solidFill>
+                        <a:srgbClr val="FFF7EC"/>
+                      </a:solidFill>
+                      <a:prstDash val="solid"/>
+                      <a:round/>
+                      <a:headEnd type="none" w="med" len="med"/>
+                      <a:tailEnd type="none" w="med" len="med"/>
+                    </a:lnR>
+                    <a:lnT w="12700" cap="flat" cmpd="sng" algn="ctr">
+                      <a:solidFill>
+                        <a:srgbClr val="FFF7EC"/>
+                      </a:solidFill>
+                      <a:prstDash val="solid"/>
+                      <a:round/>
+                      <a:headEnd type="none" w="med" len="med"/>
+                      <a:tailEnd type="none" w="med" len="med"/>
+                    </a:lnT>
+                    <a:lnB w="12700" cap="flat" cmpd="sng" algn="ctr">
+                      <a:solidFill>
+                        <a:srgbClr val="FFF7EC"/>
+                      </a:solidFill>
+                      <a:prstDash val="solid"/>
+                      <a:round/>
+                      <a:headEnd type="none" w="med" len="med"/>
+                      <a:tailEnd type="none" w="med" len="med"/>
+                    </a:lnB>
+                    <a:solidFill>
+                      <a:srgbClr val="FDE5CC"/>
+                    </a:solidFill>
+                  </a:tcPr>
+                </a:tc>
+                <a:tc>
+                  <a:txBody>
+                    <a:bodyPr/>
+                    <a:lstStyle/>
+                    <a:p>
+                      <a:pPr algn="ctr" indent="0" marL="0">
+                        <a:buNone/>
+                      </a:pPr>
+                      <a:r>
+                        <a:rPr lang="en-US" sz="1300" i="1" dirty="0">
+                          <a:solidFill>
+                            <a:srgbClr val="B3561A"/>
+                          </a:solidFill>
+                        </a:rPr>
+                        <a:t>[add]</a:t>
+                      </a:r>
+                      <a:endParaRPr lang="en-US" sz="1300" dirty="0"/>
+                    </a:p>
+                  </a:txBody>
+                  <a:tcPr marL="73152" marR="73152" marT="73152" marB="73152" anchor="ctr">
+                    <a:lnL w="12700" cap="flat" cmpd="sng" algn="ctr">
+                      <a:solidFill>
+                        <a:srgbClr val="FFF7EC"/>
+                      </a:solidFill>
+                      <a:prstDash val="solid"/>
+                      <a:round/>
+                      <a:headEnd type="none" w="med" len="med"/>
+                      <a:tailEnd type="none" w="med" len="med"/>
+                    </a:lnL>
+                    <a:lnR w="12700" cap="flat" cmpd="sng" algn="ctr">
+                      <a:solidFill>
+                        <a:srgbClr val="FFF7EC"/>
+                      </a:solidFill>
+                      <a:prstDash val="solid"/>
+                      <a:round/>
+                      <a:headEnd type="none" w="med" len="med"/>
+                      <a:tailEnd type="none" w="med" len="med"/>
+                    </a:lnR>
+                    <a:lnT w="12700" cap="flat" cmpd="sng" algn="ctr">
+                      <a:solidFill>
+                        <a:srgbClr val="FFF7EC"/>
+                      </a:solidFill>
+                      <a:prstDash val="solid"/>
+                      <a:round/>
+                      <a:headEnd type="none" w="med" len="med"/>
+                      <a:tailEnd type="none" w="med" len="med"/>
+                    </a:lnT>
+                    <a:lnB w="12700" cap="flat" cmpd="sng" algn="ctr">
+                      <a:solidFill>
+                        <a:srgbClr val="FFF7EC"/>
+                      </a:solidFill>
+                      <a:prstDash val="solid"/>
+                      <a:round/>
+                      <a:headEnd type="none" w="med" len="med"/>
+                      <a:tailEnd type="none" w="med" len="med"/>
+                    </a:lnB>
+                    <a:solidFill>
+                      <a:srgbClr val="FDE5CC"/>
+                    </a:solidFill>
+                  </a:tcPr>
+                </a:tc>
+              </a:tr>
+            </a:tbl>
+          </a:graphicData>
+        </a:graphic>
+      </p:graphicFrame>
+      <p:sp>
+        <p:nvSpPr>
+          <p:cNvPr id="25" name="Slide Number Placeholder 0"/>
+          <p:cNvSpPr>
+            <a:spLocks noGrp="1"/>
+          </p:cNvSpPr>
+          <p:nvPr>
+            <p:ph type="sldNum" sz="quarter" idx="4294967295"/>
+          </p:nvPr>
+        </p:nvSpPr>
+        <p:spPr>
+          <a:xfrm>
+            <a:off x="11247120" y="6400800"/>
+            <a:ext cx="365760" cy="274320"/>
+          </a:xfrm>
+          <a:prstGeom prst="rect">
+            <a:avLst/>
+          </a:prstGeom>
+          <a:extLst>
+            <a:ext uri="{C572A759-6A51-4108-AA02-DFA0A04FC94B}">
+              <ma14:wrappingTextBoxFlag xmlns:ma14="http://schemas.microsoft.com/office/mac/drawingml/2011/main" val="0"/>
+            </a:ext>
+          </a:extLst>
+        </p:spPr>
+        <p:txBody>
+          <a:bodyPr/>
+          <a:lstStyle>
+            <a:lvl1pPr>
+              <a:defRPr sz="1000">
+                <a:solidFill>
+                  <a:schemeClr val="accent5"/>
+                </a:solidFill>
+              </a:defRPr>
+            </a:lvl1pPr>
+          </a:lstStyle>
+          <a:p>
+            <a:pPr algn="r"/>
+            <a:fld id="{F7021451-1387-4CA6-816F-3879F97B5CBC}" type="slidenum">
+              <a:rPr b="0" lang="en-US"/>
+              <a:t>3</a:t>
+            </a:fld>
+            <a:endParaRPr lang="en-US"/>
+          </a:p>
+        </p:txBody>
+      </p:sp>
+    </p:spTree>
+  </p:cSld>
+  <p:clrMapOvr>
+    <a:masterClrMapping/>
+  </p:clrMapOvr>
+</p:sld>
+</file>
+
+<file path=ppt/slides/slide4.xml><?xml version="1.0" encoding="utf-8"?>
+<p:sld xmlns:a="http://schemas.openxmlformats.org/drawingml/2006/main" xmlns:r="http://schemas.openxmlformats.org/officeDocument/2006/relationships" xmlns:p="http://schemas.openxmlformats.org/presentationml/2006/main">
+  <p:cSld name="Slide 4">
     <p:spTree>
       <p:nvGrpSpPr>
         <p:cNvPr id="1" name=""/>
@@ -8123,7 +12627,7 @@
                   <a:schemeClr val="tx1"/>
                 </a:solidFill>
               </a:rPr>
-              <a:t>we kept a commitment that carried across quarters, and it proves we can deliver video. That is the base for OND's push into real-estate AI videos.</a:t>
+              <a:t>first delivery against the Feb roadmap's TVC / YouTube ads line. We kept a commitment across quarters, and it is the base for OND's real-estate AI videos.</a:t>
             </a:r>
             <a:endParaRPr lang="en-US" sz="1500" dirty="0"/>
           </a:p>
@@ -8245,7 +12749,7 @@
             <a:pPr algn="r"/>
             <a:fld id="{F7021451-1387-4CA6-816F-3879F97B5CBC}" type="slidenum">
               <a:rPr b="0" lang="en-US"/>
-              <a:t>3</a:t>
+              <a:t>4</a:t>
             </a:fld>
             <a:endParaRPr lang="en-US"/>
           </a:p>
@@ -8259,9 +12763,9 @@
 </p:sld>
 </file>
 
-<file path=ppt/slides/slide4.xml><?xml version="1.0" encoding="utf-8"?>
+<file path=ppt/slides/slide5.xml><?xml version="1.0" encoding="utf-8"?>
 <p:sld xmlns:a="http://schemas.openxmlformats.org/drawingml/2006/main" xmlns:r="http://schemas.openxmlformats.org/officeDocument/2006/relationships" xmlns:p="http://schemas.openxmlformats.org/presentationml/2006/main">
-  <p:cSld name="Slide 4">
+  <p:cSld name="Slide 5">
     <p:spTree>
       <p:nvGrpSpPr>
         <p:cNvPr id="1" name=""/>
@@ -8441,7 +12945,7 @@
       </p:graphicFrame>
       <p:graphicFrame>
         <p:nvGraphicFramePr>
-          <p:cNvPr id="5" name="Table 0"/>
+          <p:cNvPr id="6" name="Table 0"/>
           <p:cNvGraphicFramePr>
             <a:graphicFrameLocks noGrp="1"/>
           </p:cNvGraphicFramePr>
@@ -8784,14 +13288,14 @@
                         <a:buNone/>
                       </a:pPr>
                       <a:r>
-                        <a:rPr lang="en-US" sz="1400" i="1" dirty="0">
+                        <a:rPr lang="en-US" sz="1300" i="1" dirty="0">
                           <a:solidFill>
                             <a:srgbClr val="B3561A"/>
                           </a:solidFill>
                         </a:rPr>
                         <a:t>[add]</a:t>
                       </a:r>
-                      <a:endParaRPr lang="en-US" sz="1400" dirty="0"/>
+                      <a:endParaRPr lang="en-US" sz="1300" dirty="0"/>
                     </a:p>
                   </a:txBody>
                   <a:tcPr marL="73152" marR="73152" marT="73152" marB="73152" anchor="ctr">
@@ -8845,14 +13349,14 @@
                         <a:buNone/>
                       </a:pPr>
                       <a:r>
-                        <a:rPr lang="en-US" sz="1400" i="1" dirty="0">
+                        <a:rPr lang="en-US" sz="1300" i="1" dirty="0">
                           <a:solidFill>
                             <a:srgbClr val="B3561A"/>
                           </a:solidFill>
                         </a:rPr>
                         <a:t>[add]</a:t>
                       </a:r>
-                      <a:endParaRPr lang="en-US" sz="1400" dirty="0"/>
+                      <a:endParaRPr lang="en-US" sz="1300" dirty="0"/>
                     </a:p>
                   </a:txBody>
                   <a:tcPr marL="73152" marR="73152" marT="73152" marB="73152" anchor="ctr">
@@ -8906,14 +13410,14 @@
                         <a:buNone/>
                       </a:pPr>
                       <a:r>
-                        <a:rPr lang="en-US" sz="1400" i="1" dirty="0">
+                        <a:rPr lang="en-US" sz="1300" i="1" dirty="0">
                           <a:solidFill>
                             <a:srgbClr val="B3561A"/>
                           </a:solidFill>
                         </a:rPr>
                         <a:t>[add]</a:t>
                       </a:r>
-                      <a:endParaRPr lang="en-US" sz="1400" dirty="0"/>
+                      <a:endParaRPr lang="en-US" sz="1300" dirty="0"/>
                     </a:p>
                   </a:txBody>
                   <a:tcPr marL="73152" marR="73152" marT="73152" marB="73152" anchor="ctr">
@@ -9030,14 +13534,14 @@
                         <a:buNone/>
                       </a:pPr>
                       <a:r>
-                        <a:rPr lang="en-US" sz="1400" i="1" dirty="0">
+                        <a:rPr lang="en-US" sz="1300" i="1" dirty="0">
                           <a:solidFill>
                             <a:srgbClr val="B3561A"/>
                           </a:solidFill>
                         </a:rPr>
                         <a:t>[add]</a:t>
                       </a:r>
-                      <a:endParaRPr lang="en-US" sz="1400" dirty="0"/>
+                      <a:endParaRPr lang="en-US" sz="1300" dirty="0"/>
                     </a:p>
                   </a:txBody>
                   <a:tcPr marL="73152" marR="73152" marT="73152" marB="73152" anchor="ctr">
@@ -9091,14 +13595,14 @@
                         <a:buNone/>
                       </a:pPr>
                       <a:r>
-                        <a:rPr lang="en-US" sz="1400" i="1" dirty="0">
+                        <a:rPr lang="en-US" sz="1300" i="1" dirty="0">
                           <a:solidFill>
                             <a:srgbClr val="B3561A"/>
                           </a:solidFill>
                         </a:rPr>
                         <a:t>[add]</a:t>
                       </a:r>
-                      <a:endParaRPr lang="en-US" sz="1400" dirty="0"/>
+                      <a:endParaRPr lang="en-US" sz="1300" dirty="0"/>
                     </a:p>
                   </a:txBody>
                   <a:tcPr marL="73152" marR="73152" marT="73152" marB="73152" anchor="ctr">
@@ -9152,14 +13656,14 @@
                         <a:buNone/>
                       </a:pPr>
                       <a:r>
-                        <a:rPr lang="en-US" sz="1400" i="1" dirty="0">
+                        <a:rPr lang="en-US" sz="1300" i="1" dirty="0">
                           <a:solidFill>
                             <a:srgbClr val="B3561A"/>
                           </a:solidFill>
                         </a:rPr>
                         <a:t>[add]</a:t>
                       </a:r>
-                      <a:endParaRPr lang="en-US" sz="1400" dirty="0"/>
+                      <a:endParaRPr lang="en-US" sz="1300" dirty="0"/>
                     </a:p>
                   </a:txBody>
                   <a:tcPr marL="73152" marR="73152" marT="73152" marB="73152" anchor="ctr">
@@ -9276,14 +13780,14 @@
                         <a:buNone/>
                       </a:pPr>
                       <a:r>
-                        <a:rPr lang="en-US" sz="1400" i="1" dirty="0">
+                        <a:rPr lang="en-US" sz="1300" i="1" dirty="0">
                           <a:solidFill>
                             <a:srgbClr val="B3561A"/>
                           </a:solidFill>
                         </a:rPr>
                         <a:t>[add]</a:t>
                       </a:r>
-                      <a:endParaRPr lang="en-US" sz="1400" dirty="0"/>
+                      <a:endParaRPr lang="en-US" sz="1300" dirty="0"/>
                     </a:p>
                   </a:txBody>
                   <a:tcPr marL="73152" marR="73152" marT="73152" marB="73152" anchor="ctr">
@@ -9337,14 +13841,14 @@
                         <a:buNone/>
                       </a:pPr>
                       <a:r>
-                        <a:rPr lang="en-US" sz="1400" i="1" dirty="0">
+                        <a:rPr lang="en-US" sz="1300" i="1" dirty="0">
                           <a:solidFill>
                             <a:srgbClr val="B3561A"/>
                           </a:solidFill>
                         </a:rPr>
                         <a:t>[add]</a:t>
                       </a:r>
-                      <a:endParaRPr lang="en-US" sz="1400" dirty="0"/>
+                      <a:endParaRPr lang="en-US" sz="1300" dirty="0"/>
                     </a:p>
                   </a:txBody>
                   <a:tcPr marL="73152" marR="73152" marT="73152" marB="73152" anchor="ctr">
@@ -9398,14 +13902,14 @@
                         <a:buNone/>
                       </a:pPr>
                       <a:r>
-                        <a:rPr lang="en-US" sz="1400" i="1" dirty="0">
+                        <a:rPr lang="en-US" sz="1300" i="1" dirty="0">
                           <a:solidFill>
                             <a:srgbClr val="B3561A"/>
                           </a:solidFill>
                         </a:rPr>
                         <a:t>[add]</a:t>
                       </a:r>
-                      <a:endParaRPr lang="en-US" sz="1400" dirty="0"/>
+                      <a:endParaRPr lang="en-US" sz="1300" dirty="0"/>
                     </a:p>
                   </a:txBody>
                   <a:tcPr marL="73152" marR="73152" marT="73152" marB="73152" anchor="ctr">
@@ -9701,7 +14205,7 @@
             <a:pPr algn="r"/>
             <a:fld id="{F7021451-1387-4CA6-816F-3879F97B5CBC}" type="slidenum">
               <a:rPr b="0" lang="en-US"/>
-              <a:t>4</a:t>
+              <a:t>5</a:t>
             </a:fld>
             <a:endParaRPr lang="en-US"/>
           </a:p>
@@ -9715,9 +14219,9 @@
 </p:sld>
 </file>
 
-<file path=ppt/slides/slide5.xml><?xml version="1.0" encoding="utf-8"?>
+<file path=ppt/slides/slide6.xml><?xml version="1.0" encoding="utf-8"?>
 <p:sld xmlns:a="http://schemas.openxmlformats.org/drawingml/2006/main" xmlns:r="http://schemas.openxmlformats.org/officeDocument/2006/relationships" xmlns:p="http://schemas.openxmlformats.org/presentationml/2006/main">
-  <p:cSld name="Slide 5">
+  <p:cSld name="Slide 6">
     <p:spTree>
       <p:nvGrpSpPr>
         <p:cNvPr id="1" name=""/>
@@ -10996,7 +15500,7 @@
             <a:pPr algn="r"/>
             <a:fld id="{F7021451-1387-4CA6-816F-3879F97B5CBC}" type="slidenum">
               <a:rPr b="0" lang="en-US"/>
-              <a:t>5</a:t>
+              <a:t>6</a:t>
             </a:fld>
             <a:endParaRPr lang="en-US"/>
           </a:p>
@@ -11010,9 +15514,9 @@
 </p:sld>
 </file>
 
-<file path=ppt/slides/slide6.xml><?xml version="1.0" encoding="utf-8"?>
+<file path=ppt/slides/slide7.xml><?xml version="1.0" encoding="utf-8"?>
 <p:sld xmlns:a="http://schemas.openxmlformats.org/drawingml/2006/main" xmlns:r="http://schemas.openxmlformats.org/officeDocument/2006/relationships" xmlns:p="http://schemas.openxmlformats.org/presentationml/2006/main">
-  <p:cSld name="Slide 6">
+  <p:cSld name="Slide 7">
     <p:spTree>
       <p:nvGrpSpPr>
         <p:cNvPr id="1" name=""/>
@@ -11067,7 +15571,7 @@
       </p:sp>
       <p:graphicFrame>
         <p:nvGraphicFramePr>
-          <p:cNvPr id="7" name="Table 0"/>
+          <p:cNvPr id="8" name="Table 0"/>
           <p:cNvGraphicFramePr>
             <a:graphicFrameLocks noGrp="1"/>
           </p:cNvGraphicFramePr>
@@ -14700,557 +19204,6 @@
             <a:pPr algn="r"/>
             <a:fld id="{F7021451-1387-4CA6-816F-3879F97B5CBC}" type="slidenum">
               <a:rPr b="0" lang="en-US"/>
-              <a:t>6</a:t>
-            </a:fld>
-            <a:endParaRPr lang="en-US"/>
-          </a:p>
-        </p:txBody>
-      </p:sp>
-    </p:spTree>
-  </p:cSld>
-  <p:clrMapOvr>
-    <a:masterClrMapping/>
-  </p:clrMapOvr>
-</p:sld>
-</file>
-
-<file path=ppt/slides/slide7.xml><?xml version="1.0" encoding="utf-8"?>
-<p:sld xmlns:a="http://schemas.openxmlformats.org/drawingml/2006/main" xmlns:r="http://schemas.openxmlformats.org/officeDocument/2006/relationships" xmlns:p="http://schemas.openxmlformats.org/presentationml/2006/main">
-  <p:cSld name="Slide 7">
-    <p:spTree>
-      <p:nvGrpSpPr>
-        <p:cNvPr id="1" name=""/>
-        <p:cNvGrpSpPr/>
-        <p:nvPr/>
-      </p:nvGrpSpPr>
-      <p:grpSpPr>
-        <a:xfrm>
-          <a:off x="0" y="0"/>
-          <a:ext cx="0" cy="0"/>
-          <a:chOff x="0" y="0"/>
-          <a:chExt cx="0" cy="0"/>
-        </a:xfrm>
-      </p:grpSpPr>
-      <p:sp>
-        <p:nvSpPr>
-          <p:cNvPr id="2" name="Text 0"/>
-          <p:cNvSpPr/>
-          <p:nvPr>
-            <p:ph idx="100" type="title" hasCustomPrompt="1"/>
-          </p:nvPr>
-        </p:nvSpPr>
-        <p:spPr>
-          <a:xfrm>
-            <a:off x="548640" y="320040"/>
-            <a:ext cx="11064240" cy="822960"/>
-          </a:xfrm>
-          <a:prstGeom prst="rect">
-            <a:avLst/>
-          </a:prstGeom>
-          <a:noFill/>
-          <a:ln/>
-        </p:spPr>
-        <p:txBody>
-          <a:bodyPr wrap="square" lIns="0" tIns="0" rIns="0" bIns="0" rtlCol="0" anchor="ctr"/>
-          <a:lstStyle/>
-          <a:p>
-            <a:pPr algn="l" indent="0" marL="0">
-              <a:buNone/>
-            </a:pPr>
-            <a:r>
-              <a:rPr lang="en-US" sz="2800" b="1" dirty="0">
-                <a:solidFill>
-                  <a:schemeClr val="tx1"/>
-                </a:solidFill>
-              </a:rPr>
-              <a:t>Team output by type: new concepts sit with one person</a:t>
-            </a:r>
-            <a:endParaRPr lang="en-US" sz="2800" dirty="0"/>
-          </a:p>
-        </p:txBody>
-      </p:sp>
-      <p:sp>
-        <p:nvSpPr>
-          <p:cNvPr id="3" name="Team chart card"/>
-          <p:cNvSpPr/>
-          <p:nvPr/>
-        </p:nvSpPr>
-        <p:spPr>
-          <a:xfrm>
-            <a:off x="548640" y="1371600"/>
-            <a:ext cx="6949440" cy="4754880"/>
-          </a:xfrm>
-          <a:prstGeom prst="roundRect">
-            <a:avLst>
-              <a:gd name="adj" fmla="val 2308"/>
-            </a:avLst>
-          </a:prstGeom>
-          <a:solidFill>
-            <a:schemeClr val="bg1"/>
-          </a:solidFill>
-          <a:ln w="15875">
-            <a:solidFill>
-              <a:schemeClr val="tx1"/>
-            </a:solidFill>
-            <a:prstDash val="solid"/>
-          </a:ln>
-          <a:effectLst>
-            <a:outerShdw sx="100000" sy="100000" kx="0" ky="0" algn="bl" rotWithShape="0" blurRad="76200" dist="38100" dir="5400000">
-              <a:srgbClr val="000000">
-                <a:alpha val="12000"/>
-              </a:srgbClr>
-            </a:outerShdw>
-          </a:effectLst>
-        </p:spPr>
-      </p:sp>
-      <p:sp>
-        <p:nvSpPr>
-          <p:cNvPr id="4" name="Window dot"/>
-          <p:cNvSpPr/>
-          <p:nvPr/>
-        </p:nvSpPr>
-        <p:spPr>
-          <a:xfrm>
-            <a:off x="6629400" y="1508760"/>
-            <a:ext cx="128016" cy="128016"/>
-          </a:xfrm>
-          <a:prstGeom prst="ellipse">
-            <a:avLst/>
-          </a:prstGeom>
-          <a:solidFill>
-            <a:schemeClr val="tx2"/>
-          </a:solidFill>
-          <a:ln w="12700">
-            <a:solidFill>
-              <a:schemeClr val="tx2"/>
-            </a:solidFill>
-            <a:prstDash val="solid"/>
-          </a:ln>
-        </p:spPr>
-      </p:sp>
-      <p:sp>
-        <p:nvSpPr>
-          <p:cNvPr id="5" name="Window dot"/>
-          <p:cNvSpPr/>
-          <p:nvPr/>
-        </p:nvSpPr>
-        <p:spPr>
-          <a:xfrm>
-            <a:off x="6858000" y="1508760"/>
-            <a:ext cx="128016" cy="128016"/>
-          </a:xfrm>
-          <a:prstGeom prst="ellipse">
-            <a:avLst/>
-          </a:prstGeom>
-          <a:solidFill>
-            <a:schemeClr val="accent4"/>
-          </a:solidFill>
-          <a:ln w="12700">
-            <a:solidFill>
-              <a:schemeClr val="accent4"/>
-            </a:solidFill>
-            <a:prstDash val="solid"/>
-          </a:ln>
-        </p:spPr>
-      </p:sp>
-      <p:sp>
-        <p:nvSpPr>
-          <p:cNvPr id="6" name="Window dot"/>
-          <p:cNvSpPr/>
-          <p:nvPr/>
-        </p:nvSpPr>
-        <p:spPr>
-          <a:xfrm>
-            <a:off x="7086600" y="1508760"/>
-            <a:ext cx="128016" cy="128016"/>
-          </a:xfrm>
-          <a:prstGeom prst="ellipse">
-            <a:avLst/>
-          </a:prstGeom>
-          <a:solidFill>
-            <a:schemeClr val="accent3"/>
-          </a:solidFill>
-          <a:ln w="12700">
-            <a:solidFill>
-              <a:schemeClr val="accent3"/>
-            </a:solidFill>
-            <a:prstDash val="solid"/>
-          </a:ln>
-        </p:spPr>
-      </p:sp>
-      <p:graphicFrame>
-        <p:nvGraphicFramePr>
-          <p:cNvPr id="7" name="Chart 0" descr=""/>
-          <p:cNvGraphicFramePr/>
-          <p:nvPr/>
-        </p:nvGraphicFramePr>
-        <p:xfrm>
-          <a:off x="731520" y="1691640"/>
-          <a:ext cx="6583680" cy="4297680"/>
-        </p:xfrm>
-        <a:graphic xmlns:a="http://schemas.openxmlformats.org/drawingml/2006/main">
-          <a:graphicData uri="http://schemas.openxmlformats.org/drawingml/2006/chart">
-            <c:chart xmlns:c="http://schemas.openxmlformats.org/drawingml/2006/chart" r:id="rId1"/>
-          </a:graphicData>
-        </a:graphic>
-      </p:graphicFrame>
-      <p:sp>
-        <p:nvSpPr>
-          <p:cNvPr id="8" name="Insight card"/>
-          <p:cNvSpPr/>
-          <p:nvPr/>
-        </p:nvSpPr>
-        <p:spPr>
-          <a:xfrm>
-            <a:off x="7772400" y="1371600"/>
-            <a:ext cx="3840480" cy="1463040"/>
-          </a:xfrm>
-          <a:prstGeom prst="roundRect">
-            <a:avLst>
-              <a:gd name="adj" fmla="val 7500"/>
-            </a:avLst>
-          </a:prstGeom>
-          <a:solidFill>
-            <a:schemeClr val="bg1"/>
-          </a:solidFill>
-          <a:ln w="15875">
-            <a:solidFill>
-              <a:schemeClr val="tx1"/>
-            </a:solidFill>
-            <a:prstDash val="solid"/>
-          </a:ln>
-          <a:effectLst>
-            <a:outerShdw sx="100000" sy="100000" kx="0" ky="0" algn="bl" rotWithShape="0" blurRad="76200" dist="38100" dir="5400000">
-              <a:srgbClr val="000000">
-                <a:alpha val="12000"/>
-              </a:srgbClr>
-            </a:outerShdw>
-          </a:effectLst>
-        </p:spPr>
-      </p:sp>
-      <p:sp>
-        <p:nvSpPr>
-          <p:cNvPr id="9" name="Text 6"/>
-          <p:cNvSpPr txBox="1"/>
-          <p:nvPr/>
-        </p:nvSpPr>
-        <p:spPr>
-          <a:xfrm>
-            <a:off x="8001000" y="1554480"/>
-            <a:ext cx="1188720" cy="1097280"/>
-          </a:xfrm>
-          <a:prstGeom prst="rect">
-            <a:avLst/>
-          </a:prstGeom>
-          <a:noFill/>
-          <a:ln/>
-        </p:spPr>
-        <p:txBody>
-          <a:bodyPr wrap="square" lIns="0" tIns="0" rIns="0" bIns="0" rtlCol="0" anchor="ctr"/>
-          <a:lstStyle/>
-          <a:p>
-            <a:pPr indent="0" marL="0">
-              <a:buNone/>
-            </a:pPr>
-            <a:r>
-              <a:rPr lang="en-US" sz="3000" b="1" dirty="0">
-                <a:solidFill>
-                  <a:schemeClr val="tx2"/>
-                </a:solidFill>
-              </a:rPr>
-              <a:t>67%</a:t>
-            </a:r>
-            <a:endParaRPr lang="en-US" sz="3000" dirty="0"/>
-          </a:p>
-        </p:txBody>
-      </p:sp>
-      <p:sp>
-        <p:nvSpPr>
-          <p:cNvPr id="10" name="Text 7"/>
-          <p:cNvSpPr txBox="1"/>
-          <p:nvPr/>
-        </p:nvSpPr>
-        <p:spPr>
-          <a:xfrm>
-            <a:off x="9189720" y="1508760"/>
-            <a:ext cx="2286000" cy="1188720"/>
-          </a:xfrm>
-          <a:prstGeom prst="rect">
-            <a:avLst/>
-          </a:prstGeom>
-          <a:noFill/>
-          <a:ln/>
-        </p:spPr>
-        <p:txBody>
-          <a:bodyPr wrap="square" lIns="0" tIns="0" rIns="0" bIns="0" rtlCol="0" anchor="ctr"/>
-          <a:lstStyle/>
-          <a:p>
-            <a:pPr indent="0" marL="0">
-              <a:buNone/>
-            </a:pPr>
-            <a:r>
-              <a:rPr lang="en-US" sz="1300" dirty="0">
-                <a:solidFill>
-                  <a:schemeClr val="tx1"/>
-                </a:solidFill>
-              </a:rPr>
-              <a:t>of master creatives came from Gowtham (70 of 104). Concept work depends on one person.</a:t>
-            </a:r>
-            <a:endParaRPr lang="en-US" sz="1300" dirty="0"/>
-          </a:p>
-        </p:txBody>
-      </p:sp>
-      <p:sp>
-        <p:nvSpPr>
-          <p:cNvPr id="11" name="Insight card"/>
-          <p:cNvSpPr/>
-          <p:nvPr/>
-        </p:nvSpPr>
-        <p:spPr>
-          <a:xfrm>
-            <a:off x="7772400" y="3017520"/>
-            <a:ext cx="3840480" cy="1463040"/>
-          </a:xfrm>
-          <a:prstGeom prst="roundRect">
-            <a:avLst>
-              <a:gd name="adj" fmla="val 7500"/>
-            </a:avLst>
-          </a:prstGeom>
-          <a:solidFill>
-            <a:schemeClr val="bg1"/>
-          </a:solidFill>
-          <a:ln w="15875">
-            <a:solidFill>
-              <a:schemeClr val="tx1"/>
-            </a:solidFill>
-            <a:prstDash val="solid"/>
-          </a:ln>
-          <a:effectLst>
-            <a:outerShdw sx="100000" sy="100000" kx="0" ky="0" algn="bl" rotWithShape="0" blurRad="76200" dist="38100" dir="5400000">
-              <a:srgbClr val="000000">
-                <a:alpha val="12000"/>
-              </a:srgbClr>
-            </a:outerShdw>
-          </a:effectLst>
-        </p:spPr>
-      </p:sp>
-      <p:sp>
-        <p:nvSpPr>
-          <p:cNvPr id="12" name="Text 9"/>
-          <p:cNvSpPr txBox="1"/>
-          <p:nvPr/>
-        </p:nvSpPr>
-        <p:spPr>
-          <a:xfrm>
-            <a:off x="8001000" y="3200400"/>
-            <a:ext cx="1188720" cy="1097280"/>
-          </a:xfrm>
-          <a:prstGeom prst="rect">
-            <a:avLst/>
-          </a:prstGeom>
-          <a:noFill/>
-          <a:ln/>
-        </p:spPr>
-        <p:txBody>
-          <a:bodyPr wrap="square" lIns="0" tIns="0" rIns="0" bIns="0" rtlCol="0" anchor="ctr"/>
-          <a:lstStyle/>
-          <a:p>
-            <a:pPr indent="0" marL="0">
-              <a:buNone/>
-            </a:pPr>
-            <a:r>
-              <a:rPr lang="en-US" sz="3000" b="1" dirty="0">
-                <a:solidFill>
-                  <a:schemeClr val="accent1"/>
-                </a:solidFill>
-              </a:rPr>
-              <a:t>76%</a:t>
-            </a:r>
-            <a:endParaRPr lang="en-US" sz="3000" dirty="0"/>
-          </a:p>
-        </p:txBody>
-      </p:sp>
-      <p:sp>
-        <p:nvSpPr>
-          <p:cNvPr id="13" name="Text 10"/>
-          <p:cNvSpPr txBox="1"/>
-          <p:nvPr/>
-        </p:nvSpPr>
-        <p:spPr>
-          <a:xfrm>
-            <a:off x="9189720" y="3154680"/>
-            <a:ext cx="2286000" cy="1188720"/>
-          </a:xfrm>
-          <a:prstGeom prst="rect">
-            <a:avLst/>
-          </a:prstGeom>
-          <a:noFill/>
-          <a:ln/>
-        </p:spPr>
-        <p:txBody>
-          <a:bodyPr wrap="square" lIns="0" tIns="0" rIns="0" bIns="0" rtlCol="0" anchor="ctr"/>
-          <a:lstStyle/>
-          <a:p>
-            <a:pPr indent="0" marL="0">
-              <a:buNone/>
-            </a:pPr>
-            <a:r>
-              <a:rPr lang="en-US" sz="1300" dirty="0">
-                <a:solidFill>
-                  <a:schemeClr val="tx1"/>
-                </a:solidFill>
-              </a:rPr>
-              <a:t>of Keerthana's 399 units are adaptations: the high-volume production line.</a:t>
-            </a:r>
-            <a:endParaRPr lang="en-US" sz="1300" dirty="0"/>
-          </a:p>
-        </p:txBody>
-      </p:sp>
-      <p:sp>
-        <p:nvSpPr>
-          <p:cNvPr id="14" name="Insight card"/>
-          <p:cNvSpPr/>
-          <p:nvPr/>
-        </p:nvSpPr>
-        <p:spPr>
-          <a:xfrm>
-            <a:off x="7772400" y="4663440"/>
-            <a:ext cx="3840480" cy="1463040"/>
-          </a:xfrm>
-          <a:prstGeom prst="roundRect">
-            <a:avLst>
-              <a:gd name="adj" fmla="val 7500"/>
-            </a:avLst>
-          </a:prstGeom>
-          <a:solidFill>
-            <a:schemeClr val="bg1"/>
-          </a:solidFill>
-          <a:ln w="15875">
-            <a:solidFill>
-              <a:schemeClr val="tx1"/>
-            </a:solidFill>
-            <a:prstDash val="solid"/>
-          </a:ln>
-          <a:effectLst>
-            <a:outerShdw sx="100000" sy="100000" kx="0" ky="0" algn="bl" rotWithShape="0" blurRad="76200" dist="38100" dir="5400000">
-              <a:srgbClr val="000000">
-                <a:alpha val="12000"/>
-              </a:srgbClr>
-            </a:outerShdw>
-          </a:effectLst>
-        </p:spPr>
-      </p:sp>
-      <p:sp>
-        <p:nvSpPr>
-          <p:cNvPr id="15" name="Text 12"/>
-          <p:cNvSpPr txBox="1"/>
-          <p:nvPr/>
-        </p:nvSpPr>
-        <p:spPr>
-          <a:xfrm>
-            <a:off x="8001000" y="4846320"/>
-            <a:ext cx="1188720" cy="1097280"/>
-          </a:xfrm>
-          <a:prstGeom prst="rect">
-            <a:avLst/>
-          </a:prstGeom>
-          <a:noFill/>
-          <a:ln/>
-        </p:spPr>
-        <p:txBody>
-          <a:bodyPr wrap="square" lIns="0" tIns="0" rIns="0" bIns="0" rtlCol="0" anchor="ctr"/>
-          <a:lstStyle/>
-          <a:p>
-            <a:pPr indent="0" marL="0">
-              <a:buNone/>
-            </a:pPr>
-            <a:r>
-              <a:rPr lang="en-US" sz="3000" b="1" dirty="0">
-                <a:solidFill>
-                  <a:schemeClr val="tx2"/>
-                </a:solidFill>
-              </a:rPr>
-              <a:t>199</a:t>
-            </a:r>
-            <a:endParaRPr lang="en-US" sz="3000" dirty="0"/>
-          </a:p>
-        </p:txBody>
-      </p:sp>
-      <p:sp>
-        <p:nvSpPr>
-          <p:cNvPr id="16" name="Text 13"/>
-          <p:cNvSpPr txBox="1"/>
-          <p:nvPr/>
-        </p:nvSpPr>
-        <p:spPr>
-          <a:xfrm>
-            <a:off x="9189720" y="4800600"/>
-            <a:ext cx="2286000" cy="1188720"/>
-          </a:xfrm>
-          <a:prstGeom prst="rect">
-            <a:avLst/>
-          </a:prstGeom>
-          <a:noFill/>
-          <a:ln/>
-        </p:spPr>
-        <p:txBody>
-          <a:bodyPr wrap="square" lIns="0" tIns="0" rIns="0" bIns="0" rtlCol="0" anchor="ctr"/>
-          <a:lstStyle/>
-          <a:p>
-            <a:pPr indent="0" marL="0">
-              <a:buNone/>
-            </a:pPr>
-            <a:r>
-              <a:rPr lang="en-US" sz="1300" dirty="0">
-                <a:solidFill>
-                  <a:schemeClr val="tx1"/>
-                </a:solidFill>
-              </a:rPr>
-              <a:t>creatives from Naresh, the most of any designer.</a:t>
-            </a:r>
-            <a:endParaRPr lang="en-US" sz="1300" dirty="0"/>
-          </a:p>
-        </p:txBody>
-      </p:sp>
-      <p:sp>
-        <p:nvSpPr>
-          <p:cNvPr id="25" name="Slide Number Placeholder 0"/>
-          <p:cNvSpPr>
-            <a:spLocks noGrp="1"/>
-          </p:cNvSpPr>
-          <p:nvPr>
-            <p:ph type="sldNum" sz="quarter" idx="4294967295"/>
-          </p:nvPr>
-        </p:nvSpPr>
-        <p:spPr>
-          <a:xfrm>
-            <a:off x="11247120" y="6400800"/>
-            <a:ext cx="365760" cy="274320"/>
-          </a:xfrm>
-          <a:prstGeom prst="rect">
-            <a:avLst/>
-          </a:prstGeom>
-          <a:extLst>
-            <a:ext uri="{C572A759-6A51-4108-AA02-DFA0A04FC94B}">
-              <ma14:wrappingTextBoxFlag xmlns:ma14="http://schemas.microsoft.com/office/mac/drawingml/2011/main" val="0"/>
-            </a:ext>
-          </a:extLst>
-        </p:spPr>
-        <p:txBody>
-          <a:bodyPr/>
-          <a:lstStyle>
-            <a:lvl1pPr>
-              <a:defRPr sz="1000">
-                <a:solidFill>
-                  <a:schemeClr val="accent5"/>
-                </a:solidFill>
-              </a:defRPr>
-            </a:lvl1pPr>
-          </a:lstStyle>
-          <a:p>
-            <a:pPr algn="r"/>
-            <a:fld id="{F7021451-1387-4CA6-816F-3879F97B5CBC}" type="slidenum">
-              <a:rPr b="0" lang="en-US"/>
               <a:t>7</a:t>
             </a:fld>
             <a:endParaRPr lang="en-US"/>
@@ -15314,6 +19267,557 @@
                   <a:schemeClr val="tx1"/>
                 </a:solidFill>
               </a:rPr>
+              <a:t>Team output by type: new concepts sit with one person</a:t>
+            </a:r>
+            <a:endParaRPr lang="en-US" sz="2800" dirty="0"/>
+          </a:p>
+        </p:txBody>
+      </p:sp>
+      <p:sp>
+        <p:nvSpPr>
+          <p:cNvPr id="3" name="Team chart card"/>
+          <p:cNvSpPr/>
+          <p:nvPr/>
+        </p:nvSpPr>
+        <p:spPr>
+          <a:xfrm>
+            <a:off x="548640" y="1371600"/>
+            <a:ext cx="6949440" cy="4754880"/>
+          </a:xfrm>
+          <a:prstGeom prst="roundRect">
+            <a:avLst>
+              <a:gd name="adj" fmla="val 2308"/>
+            </a:avLst>
+          </a:prstGeom>
+          <a:solidFill>
+            <a:schemeClr val="bg1"/>
+          </a:solidFill>
+          <a:ln w="15875">
+            <a:solidFill>
+              <a:schemeClr val="tx1"/>
+            </a:solidFill>
+            <a:prstDash val="solid"/>
+          </a:ln>
+          <a:effectLst>
+            <a:outerShdw sx="100000" sy="100000" kx="0" ky="0" algn="bl" rotWithShape="0" blurRad="76200" dist="38100" dir="5400000">
+              <a:srgbClr val="000000">
+                <a:alpha val="12000"/>
+              </a:srgbClr>
+            </a:outerShdw>
+          </a:effectLst>
+        </p:spPr>
+      </p:sp>
+      <p:sp>
+        <p:nvSpPr>
+          <p:cNvPr id="4" name="Window dot"/>
+          <p:cNvSpPr/>
+          <p:nvPr/>
+        </p:nvSpPr>
+        <p:spPr>
+          <a:xfrm>
+            <a:off x="6629400" y="1508760"/>
+            <a:ext cx="128016" cy="128016"/>
+          </a:xfrm>
+          <a:prstGeom prst="ellipse">
+            <a:avLst/>
+          </a:prstGeom>
+          <a:solidFill>
+            <a:schemeClr val="tx2"/>
+          </a:solidFill>
+          <a:ln w="12700">
+            <a:solidFill>
+              <a:schemeClr val="tx2"/>
+            </a:solidFill>
+            <a:prstDash val="solid"/>
+          </a:ln>
+        </p:spPr>
+      </p:sp>
+      <p:sp>
+        <p:nvSpPr>
+          <p:cNvPr id="5" name="Window dot"/>
+          <p:cNvSpPr/>
+          <p:nvPr/>
+        </p:nvSpPr>
+        <p:spPr>
+          <a:xfrm>
+            <a:off x="6858000" y="1508760"/>
+            <a:ext cx="128016" cy="128016"/>
+          </a:xfrm>
+          <a:prstGeom prst="ellipse">
+            <a:avLst/>
+          </a:prstGeom>
+          <a:solidFill>
+            <a:schemeClr val="accent4"/>
+          </a:solidFill>
+          <a:ln w="12700">
+            <a:solidFill>
+              <a:schemeClr val="accent4"/>
+            </a:solidFill>
+            <a:prstDash val="solid"/>
+          </a:ln>
+        </p:spPr>
+      </p:sp>
+      <p:sp>
+        <p:nvSpPr>
+          <p:cNvPr id="6" name="Window dot"/>
+          <p:cNvSpPr/>
+          <p:nvPr/>
+        </p:nvSpPr>
+        <p:spPr>
+          <a:xfrm>
+            <a:off x="7086600" y="1508760"/>
+            <a:ext cx="128016" cy="128016"/>
+          </a:xfrm>
+          <a:prstGeom prst="ellipse">
+            <a:avLst/>
+          </a:prstGeom>
+          <a:solidFill>
+            <a:schemeClr val="accent3"/>
+          </a:solidFill>
+          <a:ln w="12700">
+            <a:solidFill>
+              <a:schemeClr val="accent3"/>
+            </a:solidFill>
+            <a:prstDash val="solid"/>
+          </a:ln>
+        </p:spPr>
+      </p:sp>
+      <p:graphicFrame>
+        <p:nvGraphicFramePr>
+          <p:cNvPr id="7" name="Chart 0" descr=""/>
+          <p:cNvGraphicFramePr/>
+          <p:nvPr/>
+        </p:nvGraphicFramePr>
+        <p:xfrm>
+          <a:off x="731520" y="1691640"/>
+          <a:ext cx="6583680" cy="4297680"/>
+        </p:xfrm>
+        <a:graphic xmlns:a="http://schemas.openxmlformats.org/drawingml/2006/main">
+          <a:graphicData uri="http://schemas.openxmlformats.org/drawingml/2006/chart">
+            <c:chart xmlns:c="http://schemas.openxmlformats.org/drawingml/2006/chart" r:id="rId1"/>
+          </a:graphicData>
+        </a:graphic>
+      </p:graphicFrame>
+      <p:sp>
+        <p:nvSpPr>
+          <p:cNvPr id="8" name="Insight card"/>
+          <p:cNvSpPr/>
+          <p:nvPr/>
+        </p:nvSpPr>
+        <p:spPr>
+          <a:xfrm>
+            <a:off x="7772400" y="1371600"/>
+            <a:ext cx="3840480" cy="1463040"/>
+          </a:xfrm>
+          <a:prstGeom prst="roundRect">
+            <a:avLst>
+              <a:gd name="adj" fmla="val 7500"/>
+            </a:avLst>
+          </a:prstGeom>
+          <a:solidFill>
+            <a:schemeClr val="bg1"/>
+          </a:solidFill>
+          <a:ln w="15875">
+            <a:solidFill>
+              <a:schemeClr val="tx1"/>
+            </a:solidFill>
+            <a:prstDash val="solid"/>
+          </a:ln>
+          <a:effectLst>
+            <a:outerShdw sx="100000" sy="100000" kx="0" ky="0" algn="bl" rotWithShape="0" blurRad="76200" dist="38100" dir="5400000">
+              <a:srgbClr val="000000">
+                <a:alpha val="12000"/>
+              </a:srgbClr>
+            </a:outerShdw>
+          </a:effectLst>
+        </p:spPr>
+      </p:sp>
+      <p:sp>
+        <p:nvSpPr>
+          <p:cNvPr id="9" name="Text 6"/>
+          <p:cNvSpPr txBox="1"/>
+          <p:nvPr/>
+        </p:nvSpPr>
+        <p:spPr>
+          <a:xfrm>
+            <a:off x="8001000" y="1554480"/>
+            <a:ext cx="1188720" cy="1097280"/>
+          </a:xfrm>
+          <a:prstGeom prst="rect">
+            <a:avLst/>
+          </a:prstGeom>
+          <a:noFill/>
+          <a:ln/>
+        </p:spPr>
+        <p:txBody>
+          <a:bodyPr wrap="square" lIns="0" tIns="0" rIns="0" bIns="0" rtlCol="0" anchor="ctr"/>
+          <a:lstStyle/>
+          <a:p>
+            <a:pPr indent="0" marL="0">
+              <a:buNone/>
+            </a:pPr>
+            <a:r>
+              <a:rPr lang="en-US" sz="3000" b="1" dirty="0">
+                <a:solidFill>
+                  <a:schemeClr val="tx2"/>
+                </a:solidFill>
+              </a:rPr>
+              <a:t>67%</a:t>
+            </a:r>
+            <a:endParaRPr lang="en-US" sz="3000" dirty="0"/>
+          </a:p>
+        </p:txBody>
+      </p:sp>
+      <p:sp>
+        <p:nvSpPr>
+          <p:cNvPr id="10" name="Text 7"/>
+          <p:cNvSpPr txBox="1"/>
+          <p:nvPr/>
+        </p:nvSpPr>
+        <p:spPr>
+          <a:xfrm>
+            <a:off x="9189720" y="1508760"/>
+            <a:ext cx="2286000" cy="1188720"/>
+          </a:xfrm>
+          <a:prstGeom prst="rect">
+            <a:avLst/>
+          </a:prstGeom>
+          <a:noFill/>
+          <a:ln/>
+        </p:spPr>
+        <p:txBody>
+          <a:bodyPr wrap="square" lIns="0" tIns="0" rIns="0" bIns="0" rtlCol="0" anchor="ctr"/>
+          <a:lstStyle/>
+          <a:p>
+            <a:pPr indent="0" marL="0">
+              <a:buNone/>
+            </a:pPr>
+            <a:r>
+              <a:rPr lang="en-US" sz="1300" dirty="0">
+                <a:solidFill>
+                  <a:schemeClr val="tx1"/>
+                </a:solidFill>
+              </a:rPr>
+              <a:t>of master creatives came from Gowtham (70 of 104). Concept work depends on one person.</a:t>
+            </a:r>
+            <a:endParaRPr lang="en-US" sz="1300" dirty="0"/>
+          </a:p>
+        </p:txBody>
+      </p:sp>
+      <p:sp>
+        <p:nvSpPr>
+          <p:cNvPr id="11" name="Insight card"/>
+          <p:cNvSpPr/>
+          <p:nvPr/>
+        </p:nvSpPr>
+        <p:spPr>
+          <a:xfrm>
+            <a:off x="7772400" y="3017520"/>
+            <a:ext cx="3840480" cy="1463040"/>
+          </a:xfrm>
+          <a:prstGeom prst="roundRect">
+            <a:avLst>
+              <a:gd name="adj" fmla="val 7500"/>
+            </a:avLst>
+          </a:prstGeom>
+          <a:solidFill>
+            <a:schemeClr val="bg1"/>
+          </a:solidFill>
+          <a:ln w="15875">
+            <a:solidFill>
+              <a:schemeClr val="tx1"/>
+            </a:solidFill>
+            <a:prstDash val="solid"/>
+          </a:ln>
+          <a:effectLst>
+            <a:outerShdw sx="100000" sy="100000" kx="0" ky="0" algn="bl" rotWithShape="0" blurRad="76200" dist="38100" dir="5400000">
+              <a:srgbClr val="000000">
+                <a:alpha val="12000"/>
+              </a:srgbClr>
+            </a:outerShdw>
+          </a:effectLst>
+        </p:spPr>
+      </p:sp>
+      <p:sp>
+        <p:nvSpPr>
+          <p:cNvPr id="12" name="Text 9"/>
+          <p:cNvSpPr txBox="1"/>
+          <p:nvPr/>
+        </p:nvSpPr>
+        <p:spPr>
+          <a:xfrm>
+            <a:off x="8001000" y="3200400"/>
+            <a:ext cx="1188720" cy="1097280"/>
+          </a:xfrm>
+          <a:prstGeom prst="rect">
+            <a:avLst/>
+          </a:prstGeom>
+          <a:noFill/>
+          <a:ln/>
+        </p:spPr>
+        <p:txBody>
+          <a:bodyPr wrap="square" lIns="0" tIns="0" rIns="0" bIns="0" rtlCol="0" anchor="ctr"/>
+          <a:lstStyle/>
+          <a:p>
+            <a:pPr indent="0" marL="0">
+              <a:buNone/>
+            </a:pPr>
+            <a:r>
+              <a:rPr lang="en-US" sz="3000" b="1" dirty="0">
+                <a:solidFill>
+                  <a:schemeClr val="accent1"/>
+                </a:solidFill>
+              </a:rPr>
+              <a:t>76%</a:t>
+            </a:r>
+            <a:endParaRPr lang="en-US" sz="3000" dirty="0"/>
+          </a:p>
+        </p:txBody>
+      </p:sp>
+      <p:sp>
+        <p:nvSpPr>
+          <p:cNvPr id="13" name="Text 10"/>
+          <p:cNvSpPr txBox="1"/>
+          <p:nvPr/>
+        </p:nvSpPr>
+        <p:spPr>
+          <a:xfrm>
+            <a:off x="9189720" y="3154680"/>
+            <a:ext cx="2286000" cy="1188720"/>
+          </a:xfrm>
+          <a:prstGeom prst="rect">
+            <a:avLst/>
+          </a:prstGeom>
+          <a:noFill/>
+          <a:ln/>
+        </p:spPr>
+        <p:txBody>
+          <a:bodyPr wrap="square" lIns="0" tIns="0" rIns="0" bIns="0" rtlCol="0" anchor="ctr"/>
+          <a:lstStyle/>
+          <a:p>
+            <a:pPr indent="0" marL="0">
+              <a:buNone/>
+            </a:pPr>
+            <a:r>
+              <a:rPr lang="en-US" sz="1300" dirty="0">
+                <a:solidFill>
+                  <a:schemeClr val="tx1"/>
+                </a:solidFill>
+              </a:rPr>
+              <a:t>of Keerthana's 399 units are adaptations: the high-volume production line.</a:t>
+            </a:r>
+            <a:endParaRPr lang="en-US" sz="1300" dirty="0"/>
+          </a:p>
+        </p:txBody>
+      </p:sp>
+      <p:sp>
+        <p:nvSpPr>
+          <p:cNvPr id="14" name="Insight card"/>
+          <p:cNvSpPr/>
+          <p:nvPr/>
+        </p:nvSpPr>
+        <p:spPr>
+          <a:xfrm>
+            <a:off x="7772400" y="4663440"/>
+            <a:ext cx="3840480" cy="1463040"/>
+          </a:xfrm>
+          <a:prstGeom prst="roundRect">
+            <a:avLst>
+              <a:gd name="adj" fmla="val 7500"/>
+            </a:avLst>
+          </a:prstGeom>
+          <a:solidFill>
+            <a:schemeClr val="bg1"/>
+          </a:solidFill>
+          <a:ln w="15875">
+            <a:solidFill>
+              <a:schemeClr val="tx1"/>
+            </a:solidFill>
+            <a:prstDash val="solid"/>
+          </a:ln>
+          <a:effectLst>
+            <a:outerShdw sx="100000" sy="100000" kx="0" ky="0" algn="bl" rotWithShape="0" blurRad="76200" dist="38100" dir="5400000">
+              <a:srgbClr val="000000">
+                <a:alpha val="12000"/>
+              </a:srgbClr>
+            </a:outerShdw>
+          </a:effectLst>
+        </p:spPr>
+      </p:sp>
+      <p:sp>
+        <p:nvSpPr>
+          <p:cNvPr id="15" name="Text 12"/>
+          <p:cNvSpPr txBox="1"/>
+          <p:nvPr/>
+        </p:nvSpPr>
+        <p:spPr>
+          <a:xfrm>
+            <a:off x="8001000" y="4846320"/>
+            <a:ext cx="1188720" cy="1097280"/>
+          </a:xfrm>
+          <a:prstGeom prst="rect">
+            <a:avLst/>
+          </a:prstGeom>
+          <a:noFill/>
+          <a:ln/>
+        </p:spPr>
+        <p:txBody>
+          <a:bodyPr wrap="square" lIns="0" tIns="0" rIns="0" bIns="0" rtlCol="0" anchor="ctr"/>
+          <a:lstStyle/>
+          <a:p>
+            <a:pPr indent="0" marL="0">
+              <a:buNone/>
+            </a:pPr>
+            <a:r>
+              <a:rPr lang="en-US" sz="3000" b="1" dirty="0">
+                <a:solidFill>
+                  <a:schemeClr val="tx2"/>
+                </a:solidFill>
+              </a:rPr>
+              <a:t>199</a:t>
+            </a:r>
+            <a:endParaRPr lang="en-US" sz="3000" dirty="0"/>
+          </a:p>
+        </p:txBody>
+      </p:sp>
+      <p:sp>
+        <p:nvSpPr>
+          <p:cNvPr id="16" name="Text 13"/>
+          <p:cNvSpPr txBox="1"/>
+          <p:nvPr/>
+        </p:nvSpPr>
+        <p:spPr>
+          <a:xfrm>
+            <a:off x="9189720" y="4800600"/>
+            <a:ext cx="2286000" cy="1188720"/>
+          </a:xfrm>
+          <a:prstGeom prst="rect">
+            <a:avLst/>
+          </a:prstGeom>
+          <a:noFill/>
+          <a:ln/>
+        </p:spPr>
+        <p:txBody>
+          <a:bodyPr wrap="square" lIns="0" tIns="0" rIns="0" bIns="0" rtlCol="0" anchor="ctr"/>
+          <a:lstStyle/>
+          <a:p>
+            <a:pPr indent="0" marL="0">
+              <a:buNone/>
+            </a:pPr>
+            <a:r>
+              <a:rPr lang="en-US" sz="1300" dirty="0">
+                <a:solidFill>
+                  <a:schemeClr val="tx1"/>
+                </a:solidFill>
+              </a:rPr>
+              <a:t>creatives from Naresh, the most of any designer.</a:t>
+            </a:r>
+            <a:endParaRPr lang="en-US" sz="1300" dirty="0"/>
+          </a:p>
+        </p:txBody>
+      </p:sp>
+      <p:sp>
+        <p:nvSpPr>
+          <p:cNvPr id="25" name="Slide Number Placeholder 0"/>
+          <p:cNvSpPr>
+            <a:spLocks noGrp="1"/>
+          </p:cNvSpPr>
+          <p:nvPr>
+            <p:ph type="sldNum" sz="quarter" idx="4294967295"/>
+          </p:nvPr>
+        </p:nvSpPr>
+        <p:spPr>
+          <a:xfrm>
+            <a:off x="11247120" y="6400800"/>
+            <a:ext cx="365760" cy="274320"/>
+          </a:xfrm>
+          <a:prstGeom prst="rect">
+            <a:avLst/>
+          </a:prstGeom>
+          <a:extLst>
+            <a:ext uri="{C572A759-6A51-4108-AA02-DFA0A04FC94B}">
+              <ma14:wrappingTextBoxFlag xmlns:ma14="http://schemas.microsoft.com/office/mac/drawingml/2011/main" val="0"/>
+            </a:ext>
+          </a:extLst>
+        </p:spPr>
+        <p:txBody>
+          <a:bodyPr/>
+          <a:lstStyle>
+            <a:lvl1pPr>
+              <a:defRPr sz="1000">
+                <a:solidFill>
+                  <a:schemeClr val="accent5"/>
+                </a:solidFill>
+              </a:defRPr>
+            </a:lvl1pPr>
+          </a:lstStyle>
+          <a:p>
+            <a:pPr algn="r"/>
+            <a:fld id="{F7021451-1387-4CA6-816F-3879F97B5CBC}" type="slidenum">
+              <a:rPr b="0" lang="en-US"/>
+              <a:t>8</a:t>
+            </a:fld>
+            <a:endParaRPr lang="en-US"/>
+          </a:p>
+        </p:txBody>
+      </p:sp>
+    </p:spTree>
+  </p:cSld>
+  <p:clrMapOvr>
+    <a:masterClrMapping/>
+  </p:clrMapOvr>
+</p:sld>
+</file>
+
+<file path=ppt/slides/slide9.xml><?xml version="1.0" encoding="utf-8"?>
+<p:sld xmlns:a="http://schemas.openxmlformats.org/drawingml/2006/main" xmlns:r="http://schemas.openxmlformats.org/officeDocument/2006/relationships" xmlns:p="http://schemas.openxmlformats.org/presentationml/2006/main">
+  <p:cSld name="Slide 9">
+    <p:spTree>
+      <p:nvGrpSpPr>
+        <p:cNvPr id="1" name=""/>
+        <p:cNvGrpSpPr/>
+        <p:nvPr/>
+      </p:nvGrpSpPr>
+      <p:grpSpPr>
+        <a:xfrm>
+          <a:off x="0" y="0"/>
+          <a:ext cx="0" cy="0"/>
+          <a:chOff x="0" y="0"/>
+          <a:chExt cx="0" cy="0"/>
+        </a:xfrm>
+      </p:grpSpPr>
+      <p:sp>
+        <p:nvSpPr>
+          <p:cNvPr id="2" name="Text 0"/>
+          <p:cNvSpPr/>
+          <p:nvPr>
+            <p:ph idx="100" type="title" hasCustomPrompt="1"/>
+          </p:nvPr>
+        </p:nvSpPr>
+        <p:spPr>
+          <a:xfrm>
+            <a:off x="548640" y="320040"/>
+            <a:ext cx="11064240" cy="822960"/>
+          </a:xfrm>
+          <a:prstGeom prst="rect">
+            <a:avLst/>
+          </a:prstGeom>
+          <a:noFill/>
+          <a:ln/>
+        </p:spPr>
+        <p:txBody>
+          <a:bodyPr wrap="square" lIns="0" tIns="0" rIns="0" bIns="0" rtlCol="0" anchor="ctr"/>
+          <a:lstStyle/>
+          <a:p>
+            <a:pPr algn="l" indent="0" marL="0">
+              <a:buNone/>
+            </a:pPr>
+            <a:r>
+              <a:rPr lang="en-US" sz="2800" b="1" dirty="0">
+                <a:solidFill>
+                  <a:schemeClr val="tx1"/>
+                </a:solidFill>
+              </a:rPr>
               <a:t>Projects in JAS: 6 closed, 2 slipped</a:t>
             </a:r>
             <a:endParaRPr lang="en-US" sz="2800" dirty="0"/>
@@ -15322,7 +19826,7 @@
       </p:sp>
       <p:graphicFrame>
         <p:nvGraphicFramePr>
-          <p:cNvPr id="9" name="Table 0"/>
+          <p:cNvPr id="10" name="Table 0"/>
           <p:cNvGraphicFramePr>
             <a:graphicFrameLocks noGrp="1"/>
           </p:cNvGraphicFramePr>
@@ -18046,2066 +22550,6 @@
           </a:p>
         </p:txBody>
       </p:sp>
-      <p:sp>
-        <p:nvSpPr>
-          <p:cNvPr id="25" name="Slide Number Placeholder 0"/>
-          <p:cNvSpPr>
-            <a:spLocks noGrp="1"/>
-          </p:cNvSpPr>
-          <p:nvPr>
-            <p:ph type="sldNum" sz="quarter" idx="4294967295"/>
-          </p:nvPr>
-        </p:nvSpPr>
-        <p:spPr>
-          <a:xfrm>
-            <a:off x="11247120" y="6400800"/>
-            <a:ext cx="365760" cy="274320"/>
-          </a:xfrm>
-          <a:prstGeom prst="rect">
-            <a:avLst/>
-          </a:prstGeom>
-          <a:extLst>
-            <a:ext uri="{C572A759-6A51-4108-AA02-DFA0A04FC94B}">
-              <ma14:wrappingTextBoxFlag xmlns:ma14="http://schemas.microsoft.com/office/mac/drawingml/2011/main" val="0"/>
-            </a:ext>
-          </a:extLst>
-        </p:spPr>
-        <p:txBody>
-          <a:bodyPr/>
-          <a:lstStyle>
-            <a:lvl1pPr>
-              <a:defRPr sz="1000">
-                <a:solidFill>
-                  <a:schemeClr val="accent5"/>
-                </a:solidFill>
-              </a:defRPr>
-            </a:lvl1pPr>
-          </a:lstStyle>
-          <a:p>
-            <a:pPr algn="r"/>
-            <a:fld id="{F7021451-1387-4CA6-816F-3879F97B5CBC}" type="slidenum">
-              <a:rPr b="0" lang="en-US"/>
-              <a:t>8</a:t>
-            </a:fld>
-            <a:endParaRPr lang="en-US"/>
-          </a:p>
-        </p:txBody>
-      </p:sp>
-    </p:spTree>
-  </p:cSld>
-  <p:clrMapOvr>
-    <a:masterClrMapping/>
-  </p:clrMapOvr>
-</p:sld>
-</file>
-
-<file path=ppt/slides/slide9.xml><?xml version="1.0" encoding="utf-8"?>
-<p:sld xmlns:a="http://schemas.openxmlformats.org/drawingml/2006/main" xmlns:r="http://schemas.openxmlformats.org/officeDocument/2006/relationships" xmlns:p="http://schemas.openxmlformats.org/presentationml/2006/main">
-  <p:cSld name="Slide 9">
-    <p:spTree>
-      <p:nvGrpSpPr>
-        <p:cNvPr id="1" name=""/>
-        <p:cNvGrpSpPr/>
-        <p:nvPr/>
-      </p:nvGrpSpPr>
-      <p:grpSpPr>
-        <a:xfrm>
-          <a:off x="0" y="0"/>
-          <a:ext cx="0" cy="0"/>
-          <a:chOff x="0" y="0"/>
-          <a:chExt cx="0" cy="0"/>
-        </a:xfrm>
-      </p:grpSpPr>
-      <p:sp>
-        <p:nvSpPr>
-          <p:cNvPr id="2" name="Text 0"/>
-          <p:cNvSpPr/>
-          <p:nvPr>
-            <p:ph idx="100" type="title" hasCustomPrompt="1"/>
-          </p:nvPr>
-        </p:nvSpPr>
-        <p:spPr>
-          <a:xfrm>
-            <a:off x="548640" y="320040"/>
-            <a:ext cx="11064240" cy="822960"/>
-          </a:xfrm>
-          <a:prstGeom prst="rect">
-            <a:avLst/>
-          </a:prstGeom>
-          <a:noFill/>
-          <a:ln/>
-        </p:spPr>
-        <p:txBody>
-          <a:bodyPr wrap="square" lIns="0" tIns="0" rIns="0" bIns="0" rtlCol="0" anchor="ctr"/>
-          <a:lstStyle/>
-          <a:p>
-            <a:pPr algn="l" indent="0" marL="0">
-              <a:buNone/>
-            </a:pPr>
-            <a:r>
-              <a:rPr lang="en-US" sz="2800" b="1" dirty="0">
-                <a:solidFill>
-                  <a:schemeClr val="tx1"/>
-                </a:solidFill>
-              </a:rPr>
-              <a:t>OND focus: real-estate AI videos and AI-led creative</a:t>
-            </a:r>
-            <a:endParaRPr lang="en-US" sz="2800" dirty="0"/>
-          </a:p>
-        </p:txBody>
-      </p:sp>
-      <p:sp>
-        <p:nvSpPr>
-          <p:cNvPr id="3" name="Pillar card"/>
-          <p:cNvSpPr/>
-          <p:nvPr/>
-        </p:nvSpPr>
-        <p:spPr>
-          <a:xfrm>
-            <a:off x="548640" y="1325880"/>
-            <a:ext cx="3474720" cy="2103120"/>
-          </a:xfrm>
-          <a:prstGeom prst="roundRect">
-            <a:avLst>
-              <a:gd name="adj" fmla="val 5217"/>
-            </a:avLst>
-          </a:prstGeom>
-          <a:solidFill>
-            <a:schemeClr val="bg1"/>
-          </a:solidFill>
-          <a:ln w="15875">
-            <a:solidFill>
-              <a:schemeClr val="tx1"/>
-            </a:solidFill>
-            <a:prstDash val="solid"/>
-          </a:ln>
-          <a:effectLst>
-            <a:outerShdw sx="100000" sy="100000" kx="0" ky="0" algn="bl" rotWithShape="0" blurRad="76200" dist="38100" dir="5400000">
-              <a:srgbClr val="000000">
-                <a:alpha val="12000"/>
-              </a:srgbClr>
-            </a:outerShdw>
-          </a:effectLst>
-        </p:spPr>
-      </p:sp>
-      <p:sp>
-        <p:nvSpPr>
-          <p:cNvPr id="4" name="Window dot"/>
-          <p:cNvSpPr/>
-          <p:nvPr/>
-        </p:nvSpPr>
-        <p:spPr>
-          <a:xfrm>
-            <a:off x="3154680" y="1463040"/>
-            <a:ext cx="128016" cy="128016"/>
-          </a:xfrm>
-          <a:prstGeom prst="ellipse">
-            <a:avLst/>
-          </a:prstGeom>
-          <a:solidFill>
-            <a:schemeClr val="tx2"/>
-          </a:solidFill>
-          <a:ln w="12700">
-            <a:solidFill>
-              <a:schemeClr val="tx2"/>
-            </a:solidFill>
-            <a:prstDash val="solid"/>
-          </a:ln>
-        </p:spPr>
-      </p:sp>
-      <p:sp>
-        <p:nvSpPr>
-          <p:cNvPr id="5" name="Window dot"/>
-          <p:cNvSpPr/>
-          <p:nvPr/>
-        </p:nvSpPr>
-        <p:spPr>
-          <a:xfrm>
-            <a:off x="3383280" y="1463040"/>
-            <a:ext cx="128016" cy="128016"/>
-          </a:xfrm>
-          <a:prstGeom prst="ellipse">
-            <a:avLst/>
-          </a:prstGeom>
-          <a:solidFill>
-            <a:schemeClr val="accent4"/>
-          </a:solidFill>
-          <a:ln w="12700">
-            <a:solidFill>
-              <a:schemeClr val="accent4"/>
-            </a:solidFill>
-            <a:prstDash val="solid"/>
-          </a:ln>
-        </p:spPr>
-      </p:sp>
-      <p:sp>
-        <p:nvSpPr>
-          <p:cNvPr id="6" name="Window dot"/>
-          <p:cNvSpPr/>
-          <p:nvPr/>
-        </p:nvSpPr>
-        <p:spPr>
-          <a:xfrm>
-            <a:off x="3611880" y="1463040"/>
-            <a:ext cx="128016" cy="128016"/>
-          </a:xfrm>
-          <a:prstGeom prst="ellipse">
-            <a:avLst/>
-          </a:prstGeom>
-          <a:solidFill>
-            <a:schemeClr val="accent3"/>
-          </a:solidFill>
-          <a:ln w="12700">
-            <a:solidFill>
-              <a:schemeClr val="accent3"/>
-            </a:solidFill>
-            <a:prstDash val="solid"/>
-          </a:ln>
-        </p:spPr>
-      </p:sp>
-      <p:sp>
-        <p:nvSpPr>
-          <p:cNvPr id="7" name="Icon circle"/>
-          <p:cNvSpPr/>
-          <p:nvPr/>
-        </p:nvSpPr>
-        <p:spPr>
-          <a:xfrm>
-            <a:off x="777240" y="1554480"/>
-            <a:ext cx="548640" cy="548640"/>
-          </a:xfrm>
-          <a:prstGeom prst="ellipse">
-            <a:avLst/>
-          </a:prstGeom>
-          <a:solidFill>
-            <a:schemeClr val="accent1"/>
-          </a:solidFill>
-          <a:ln w="12700">
-            <a:solidFill>
-              <a:schemeClr val="accent1"/>
-            </a:solidFill>
-            <a:prstDash val="solid"/>
-          </a:ln>
-        </p:spPr>
-      </p:sp>
-      <p:pic>
-        <p:nvPicPr>
-          <p:cNvPr id="8" name="Image 0" descr="icon">    </p:cNvPr>
-          <p:cNvPicPr>
-            <a:picLocks noChangeAspect="1"/>
-          </p:cNvPicPr>
-          <p:nvPr/>
-        </p:nvPicPr>
-        <p:blipFill>
-          <a:blip r:embed="rId1"/>
-          <a:stretch>
-            <a:fillRect/>
-          </a:stretch>
-        </p:blipFill>
-        <p:spPr>
-          <a:xfrm>
-            <a:off x="914400" y="1691640"/>
-            <a:ext cx="274320" cy="274320"/>
-          </a:xfrm>
-          <a:prstGeom prst="rect">
-            <a:avLst/>
-          </a:prstGeom>
-        </p:spPr>
-      </p:pic>
-      <p:sp>
-        <p:nvSpPr>
-          <p:cNvPr id="9" name="Text 6"/>
-          <p:cNvSpPr txBox="1"/>
-          <p:nvPr/>
-        </p:nvSpPr>
-        <p:spPr>
-          <a:xfrm>
-            <a:off x="1463040" y="1554480"/>
-            <a:ext cx="2377440" cy="548640"/>
-          </a:xfrm>
-          <a:prstGeom prst="rect">
-            <a:avLst/>
-          </a:prstGeom>
-          <a:noFill/>
-          <a:ln/>
-        </p:spPr>
-        <p:txBody>
-          <a:bodyPr wrap="square" lIns="0" tIns="0" rIns="0" bIns="0" rtlCol="0" anchor="ctr"/>
-          <a:lstStyle/>
-          <a:p>
-            <a:pPr indent="0" marL="0">
-              <a:buNone/>
-            </a:pPr>
-            <a:r>
-              <a:rPr lang="en-US" sz="1700" b="1" dirty="0">
-                <a:solidFill>
-                  <a:schemeClr val="tx1"/>
-                </a:solidFill>
-              </a:rPr>
-              <a:t>Real-estate AI videos</a:t>
-            </a:r>
-            <a:endParaRPr lang="en-US" sz="1700" dirty="0"/>
-          </a:p>
-        </p:txBody>
-      </p:sp>
-      <p:sp>
-        <p:nvSpPr>
-          <p:cNvPr id="10" name="Text 7"/>
-          <p:cNvSpPr txBox="1"/>
-          <p:nvPr/>
-        </p:nvSpPr>
-        <p:spPr>
-          <a:xfrm>
-            <a:off x="777240" y="2240280"/>
-            <a:ext cx="3017520" cy="1051560"/>
-          </a:xfrm>
-          <a:prstGeom prst="rect">
-            <a:avLst/>
-          </a:prstGeom>
-          <a:noFill/>
-          <a:ln/>
-        </p:spPr>
-        <p:txBody>
-          <a:bodyPr wrap="square" lIns="0" tIns="0" rIns="0" bIns="0" rtlCol="0" anchor="t"/>
-          <a:lstStyle/>
-          <a:p>
-            <a:pPr indent="0" marL="0">
-              <a:buNone/>
-            </a:pPr>
-            <a:r>
-              <a:rPr lang="en-US" sz="1300" dirty="0">
-                <a:solidFill>
-                  <a:schemeClr val="accent5"/>
-                </a:solidFill>
-              </a:rPr>
-              <a:t>Turn the TVS TVC capability and 3D rendering into AI video offers for real-estate clients.</a:t>
-            </a:r>
-            <a:endParaRPr lang="en-US" sz="1300" dirty="0"/>
-          </a:p>
-        </p:txBody>
-      </p:sp>
-      <p:sp>
-        <p:nvSpPr>
-          <p:cNvPr id="11" name="Pillar card"/>
-          <p:cNvSpPr/>
-          <p:nvPr/>
-        </p:nvSpPr>
-        <p:spPr>
-          <a:xfrm>
-            <a:off x="4297680" y="1325880"/>
-            <a:ext cx="3474720" cy="2103120"/>
-          </a:xfrm>
-          <a:prstGeom prst="roundRect">
-            <a:avLst>
-              <a:gd name="adj" fmla="val 5217"/>
-            </a:avLst>
-          </a:prstGeom>
-          <a:solidFill>
-            <a:schemeClr val="bg1"/>
-          </a:solidFill>
-          <a:ln w="15875">
-            <a:solidFill>
-              <a:schemeClr val="tx1"/>
-            </a:solidFill>
-            <a:prstDash val="solid"/>
-          </a:ln>
-          <a:effectLst>
-            <a:outerShdw sx="100000" sy="100000" kx="0" ky="0" algn="bl" rotWithShape="0" blurRad="76200" dist="38100" dir="5400000">
-              <a:srgbClr val="000000">
-                <a:alpha val="12000"/>
-              </a:srgbClr>
-            </a:outerShdw>
-          </a:effectLst>
-        </p:spPr>
-      </p:sp>
-      <p:sp>
-        <p:nvSpPr>
-          <p:cNvPr id="12" name="Window dot"/>
-          <p:cNvSpPr/>
-          <p:nvPr/>
-        </p:nvSpPr>
-        <p:spPr>
-          <a:xfrm>
-            <a:off x="6903720" y="1463040"/>
-            <a:ext cx="128016" cy="128016"/>
-          </a:xfrm>
-          <a:prstGeom prst="ellipse">
-            <a:avLst/>
-          </a:prstGeom>
-          <a:solidFill>
-            <a:schemeClr val="tx2"/>
-          </a:solidFill>
-          <a:ln w="12700">
-            <a:solidFill>
-              <a:schemeClr val="tx2"/>
-            </a:solidFill>
-            <a:prstDash val="solid"/>
-          </a:ln>
-        </p:spPr>
-      </p:sp>
-      <p:sp>
-        <p:nvSpPr>
-          <p:cNvPr id="13" name="Window dot"/>
-          <p:cNvSpPr/>
-          <p:nvPr/>
-        </p:nvSpPr>
-        <p:spPr>
-          <a:xfrm>
-            <a:off x="7132320" y="1463040"/>
-            <a:ext cx="128016" cy="128016"/>
-          </a:xfrm>
-          <a:prstGeom prst="ellipse">
-            <a:avLst/>
-          </a:prstGeom>
-          <a:solidFill>
-            <a:schemeClr val="accent4"/>
-          </a:solidFill>
-          <a:ln w="12700">
-            <a:solidFill>
-              <a:schemeClr val="accent4"/>
-            </a:solidFill>
-            <a:prstDash val="solid"/>
-          </a:ln>
-        </p:spPr>
-      </p:sp>
-      <p:sp>
-        <p:nvSpPr>
-          <p:cNvPr id="14" name="Window dot"/>
-          <p:cNvSpPr/>
-          <p:nvPr/>
-        </p:nvSpPr>
-        <p:spPr>
-          <a:xfrm>
-            <a:off x="7360920" y="1463040"/>
-            <a:ext cx="128016" cy="128016"/>
-          </a:xfrm>
-          <a:prstGeom prst="ellipse">
-            <a:avLst/>
-          </a:prstGeom>
-          <a:solidFill>
-            <a:schemeClr val="accent3"/>
-          </a:solidFill>
-          <a:ln w="12700">
-            <a:solidFill>
-              <a:schemeClr val="accent3"/>
-            </a:solidFill>
-            <a:prstDash val="solid"/>
-          </a:ln>
-        </p:spPr>
-      </p:sp>
-      <p:sp>
-        <p:nvSpPr>
-          <p:cNvPr id="15" name="Icon circle"/>
-          <p:cNvSpPr/>
-          <p:nvPr/>
-        </p:nvSpPr>
-        <p:spPr>
-          <a:xfrm>
-            <a:off x="4526280" y="1554480"/>
-            <a:ext cx="548640" cy="548640"/>
-          </a:xfrm>
-          <a:prstGeom prst="ellipse">
-            <a:avLst/>
-          </a:prstGeom>
-          <a:solidFill>
-            <a:schemeClr val="tx2"/>
-          </a:solidFill>
-          <a:ln w="12700">
-            <a:solidFill>
-              <a:schemeClr val="tx2"/>
-            </a:solidFill>
-            <a:prstDash val="solid"/>
-          </a:ln>
-        </p:spPr>
-      </p:sp>
-      <p:pic>
-        <p:nvPicPr>
-          <p:cNvPr id="16" name="Image 1" descr="icon">    </p:cNvPr>
-          <p:cNvPicPr>
-            <a:picLocks noChangeAspect="1"/>
-          </p:cNvPicPr>
-          <p:nvPr/>
-        </p:nvPicPr>
-        <p:blipFill>
-          <a:blip r:embed="rId2"/>
-          <a:stretch>
-            <a:fillRect/>
-          </a:stretch>
-        </p:blipFill>
-        <p:spPr>
-          <a:xfrm>
-            <a:off x="4663440" y="1691640"/>
-            <a:ext cx="274320" cy="274320"/>
-          </a:xfrm>
-          <a:prstGeom prst="rect">
-            <a:avLst/>
-          </a:prstGeom>
-        </p:spPr>
-      </p:pic>
-      <p:sp>
-        <p:nvSpPr>
-          <p:cNvPr id="17" name="Text 13"/>
-          <p:cNvSpPr txBox="1"/>
-          <p:nvPr/>
-        </p:nvSpPr>
-        <p:spPr>
-          <a:xfrm>
-            <a:off x="5212080" y="1554480"/>
-            <a:ext cx="2377440" cy="548640"/>
-          </a:xfrm>
-          <a:prstGeom prst="rect">
-            <a:avLst/>
-          </a:prstGeom>
-          <a:noFill/>
-          <a:ln/>
-        </p:spPr>
-        <p:txBody>
-          <a:bodyPr wrap="square" lIns="0" tIns="0" rIns="0" bIns="0" rtlCol="0" anchor="ctr"/>
-          <a:lstStyle/>
-          <a:p>
-            <a:pPr indent="0" marL="0">
-              <a:buNone/>
-            </a:pPr>
-            <a:r>
-              <a:rPr lang="en-US" sz="1700" b="1" dirty="0">
-                <a:solidFill>
-                  <a:schemeClr val="tx1"/>
-                </a:solidFill>
-              </a:rPr>
-              <a:t>AI-led creative</a:t>
-            </a:r>
-            <a:endParaRPr lang="en-US" sz="1700" dirty="0"/>
-          </a:p>
-        </p:txBody>
-      </p:sp>
-      <p:sp>
-        <p:nvSpPr>
-          <p:cNvPr id="18" name="Text 14"/>
-          <p:cNvSpPr txBox="1"/>
-          <p:nvPr/>
-        </p:nvSpPr>
-        <p:spPr>
-          <a:xfrm>
-            <a:off x="4526280" y="2240280"/>
-            <a:ext cx="3017520" cy="1051560"/>
-          </a:xfrm>
-          <a:prstGeom prst="rect">
-            <a:avLst/>
-          </a:prstGeom>
-          <a:noFill/>
-          <a:ln/>
-        </p:spPr>
-        <p:txBody>
-          <a:bodyPr wrap="square" lIns="0" tIns="0" rIns="0" bIns="0" rtlCol="0" anchor="t"/>
-          <a:lstStyle/>
-          <a:p>
-            <a:pPr indent="0" marL="0">
-              <a:buNone/>
-            </a:pPr>
-            <a:r>
-              <a:rPr lang="en-US" sz="1300" dirty="0">
-                <a:solidFill>
-                  <a:schemeClr val="accent5"/>
-                </a:solidFill>
-              </a:rPr>
-              <a:t>Use AI tools to speed up concepts and adaptations, and package them as new deliverables.</a:t>
-            </a:r>
-            <a:endParaRPr lang="en-US" sz="1300" dirty="0"/>
-          </a:p>
-        </p:txBody>
-      </p:sp>
-      <p:sp>
-        <p:nvSpPr>
-          <p:cNvPr id="19" name="Pillar card"/>
-          <p:cNvSpPr/>
-          <p:nvPr/>
-        </p:nvSpPr>
-        <p:spPr>
-          <a:xfrm>
-            <a:off x="8046720" y="1325880"/>
-            <a:ext cx="3474720" cy="2103120"/>
-          </a:xfrm>
-          <a:prstGeom prst="roundRect">
-            <a:avLst>
-              <a:gd name="adj" fmla="val 5217"/>
-            </a:avLst>
-          </a:prstGeom>
-          <a:solidFill>
-            <a:schemeClr val="bg1"/>
-          </a:solidFill>
-          <a:ln w="15875">
-            <a:solidFill>
-              <a:schemeClr val="tx1"/>
-            </a:solidFill>
-            <a:prstDash val="solid"/>
-          </a:ln>
-          <a:effectLst>
-            <a:outerShdw sx="100000" sy="100000" kx="0" ky="0" algn="bl" rotWithShape="0" blurRad="76200" dist="38100" dir="5400000">
-              <a:srgbClr val="000000">
-                <a:alpha val="12000"/>
-              </a:srgbClr>
-            </a:outerShdw>
-          </a:effectLst>
-        </p:spPr>
-      </p:sp>
-      <p:sp>
-        <p:nvSpPr>
-          <p:cNvPr id="20" name="Window dot"/>
-          <p:cNvSpPr/>
-          <p:nvPr/>
-        </p:nvSpPr>
-        <p:spPr>
-          <a:xfrm>
-            <a:off x="10652760" y="1463040"/>
-            <a:ext cx="128016" cy="128016"/>
-          </a:xfrm>
-          <a:prstGeom prst="ellipse">
-            <a:avLst/>
-          </a:prstGeom>
-          <a:solidFill>
-            <a:schemeClr val="tx2"/>
-          </a:solidFill>
-          <a:ln w="12700">
-            <a:solidFill>
-              <a:schemeClr val="tx2"/>
-            </a:solidFill>
-            <a:prstDash val="solid"/>
-          </a:ln>
-        </p:spPr>
-      </p:sp>
-      <p:sp>
-        <p:nvSpPr>
-          <p:cNvPr id="21" name="Window dot"/>
-          <p:cNvSpPr/>
-          <p:nvPr/>
-        </p:nvSpPr>
-        <p:spPr>
-          <a:xfrm>
-            <a:off x="10881360" y="1463040"/>
-            <a:ext cx="128016" cy="128016"/>
-          </a:xfrm>
-          <a:prstGeom prst="ellipse">
-            <a:avLst/>
-          </a:prstGeom>
-          <a:solidFill>
-            <a:schemeClr val="accent4"/>
-          </a:solidFill>
-          <a:ln w="12700">
-            <a:solidFill>
-              <a:schemeClr val="accent4"/>
-            </a:solidFill>
-            <a:prstDash val="solid"/>
-          </a:ln>
-        </p:spPr>
-      </p:sp>
-      <p:sp>
-        <p:nvSpPr>
-          <p:cNvPr id="22" name="Window dot"/>
-          <p:cNvSpPr/>
-          <p:nvPr/>
-        </p:nvSpPr>
-        <p:spPr>
-          <a:xfrm>
-            <a:off x="11109960" y="1463040"/>
-            <a:ext cx="128016" cy="128016"/>
-          </a:xfrm>
-          <a:prstGeom prst="ellipse">
-            <a:avLst/>
-          </a:prstGeom>
-          <a:solidFill>
-            <a:schemeClr val="accent3"/>
-          </a:solidFill>
-          <a:ln w="12700">
-            <a:solidFill>
-              <a:schemeClr val="accent3"/>
-            </a:solidFill>
-            <a:prstDash val="solid"/>
-          </a:ln>
-        </p:spPr>
-      </p:sp>
-      <p:sp>
-        <p:nvSpPr>
-          <p:cNvPr id="23" name="Icon circle"/>
-          <p:cNvSpPr/>
-          <p:nvPr/>
-        </p:nvSpPr>
-        <p:spPr>
-          <a:xfrm>
-            <a:off x="8275320" y="1554480"/>
-            <a:ext cx="548640" cy="548640"/>
-          </a:xfrm>
-          <a:prstGeom prst="ellipse">
-            <a:avLst/>
-          </a:prstGeom>
-          <a:solidFill>
-            <a:schemeClr val="accent1"/>
-          </a:solidFill>
-          <a:ln w="12700">
-            <a:solidFill>
-              <a:schemeClr val="accent1"/>
-            </a:solidFill>
-            <a:prstDash val="solid"/>
-          </a:ln>
-        </p:spPr>
-      </p:sp>
-      <p:pic>
-        <p:nvPicPr>
-          <p:cNvPr id="24" name="Image 2" descr="icon">    </p:cNvPr>
-          <p:cNvPicPr>
-            <a:picLocks noChangeAspect="1"/>
-          </p:cNvPicPr>
-          <p:nvPr/>
-        </p:nvPicPr>
-        <p:blipFill>
-          <a:blip r:embed="rId3"/>
-          <a:stretch>
-            <a:fillRect/>
-          </a:stretch>
-        </p:blipFill>
-        <p:spPr>
-          <a:xfrm>
-            <a:off x="8412480" y="1691640"/>
-            <a:ext cx="274320" cy="274320"/>
-          </a:xfrm>
-          <a:prstGeom prst="rect">
-            <a:avLst/>
-          </a:prstGeom>
-        </p:spPr>
-      </p:pic>
-      <p:sp>
-        <p:nvSpPr>
-          <p:cNvPr id="25" name="Text 20"/>
-          <p:cNvSpPr txBox="1"/>
-          <p:nvPr/>
-        </p:nvSpPr>
-        <p:spPr>
-          <a:xfrm>
-            <a:off x="8961120" y="1554480"/>
-            <a:ext cx="2377440" cy="548640"/>
-          </a:xfrm>
-          <a:prstGeom prst="rect">
-            <a:avLst/>
-          </a:prstGeom>
-          <a:noFill/>
-          <a:ln/>
-        </p:spPr>
-        <p:txBody>
-          <a:bodyPr wrap="square" lIns="0" tIns="0" rIns="0" bIns="0" rtlCol="0" anchor="ctr"/>
-          <a:lstStyle/>
-          <a:p>
-            <a:pPr indent="0" marL="0">
-              <a:buNone/>
-            </a:pPr>
-            <a:r>
-              <a:rPr lang="en-US" sz="1700" b="1" dirty="0">
-                <a:solidFill>
-                  <a:schemeClr val="tx1"/>
-                </a:solidFill>
-              </a:rPr>
-              <a:t>Close &amp; protect</a:t>
-            </a:r>
-            <a:endParaRPr lang="en-US" sz="1700" dirty="0"/>
-          </a:p>
-        </p:txBody>
-      </p:sp>
-      <p:sp>
-        <p:nvSpPr>
-          <p:cNvPr id="26" name="Text 21"/>
-          <p:cNvSpPr txBox="1"/>
-          <p:nvPr/>
-        </p:nvSpPr>
-        <p:spPr>
-          <a:xfrm>
-            <a:off x="8275320" y="2240280"/>
-            <a:ext cx="3017520" cy="1051560"/>
-          </a:xfrm>
-          <a:prstGeom prst="rect">
-            <a:avLst/>
-          </a:prstGeom>
-          <a:noFill/>
-          <a:ln/>
-        </p:spPr>
-        <p:txBody>
-          <a:bodyPr wrap="square" lIns="0" tIns="0" rIns="0" bIns="0" rtlCol="0" anchor="t"/>
-          <a:lstStyle/>
-          <a:p>
-            <a:pPr indent="0" marL="0">
-              <a:buNone/>
-            </a:pPr>
-            <a:r>
-              <a:rPr lang="en-US" sz="1300" dirty="0">
-                <a:solidFill>
-                  <a:schemeClr val="accent5"/>
-                </a:solidFill>
-              </a:rPr>
-              <a:t>Close Checkpoint, Xylemx and TVS Green; keep every retainer on scope.</a:t>
-            </a:r>
-            <a:endParaRPr lang="en-US" sz="1300" dirty="0"/>
-          </a:p>
-        </p:txBody>
-      </p:sp>
-      <p:graphicFrame>
-        <p:nvGraphicFramePr>
-          <p:cNvPr id="10" name="Table 0"/>
-          <p:cNvGraphicFramePr>
-            <a:graphicFrameLocks noGrp="1"/>
-          </p:cNvGraphicFramePr>
-          <p:nvPr>
-            <p:extLst>
-              <p:ext uri="{D42A27DB-BD31-4B8C-83A1-F6EECF244321}">
-                <p14:modId xmlns:p14="http://schemas.microsoft.com/office/powerpoint/2010/main" val="1579011935"/>
-              </p:ext>
-            </p:extLst>
-          </p:nvPr>
-        </p:nvGraphicFramePr>
-        <p:xfrm>
-          <a:off x="548640" y="3703320"/>
-          <a:ext cx="11064240" cy="914400"/>
-        </p:xfrm>
-        <a:graphic>
-          <a:graphicData uri="http://schemas.openxmlformats.org/drawingml/2006/table">
-            <a:tbl>
-              <a:tblPr/>
-              <a:tblGrid>
-                <a:gridCol w="4206240"/>
-                <a:gridCol w="2286000"/>
-                <a:gridCol w="2286000"/>
-                <a:gridCol w="2286000"/>
-              </a:tblGrid>
-              <a:tr h="475488">
-                <a:tc>
-                  <a:txBody>
-                    <a:bodyPr/>
-                    <a:lstStyle/>
-                    <a:p>
-                      <a:pPr algn="l" indent="0" marL="0">
-                        <a:buNone/>
-                      </a:pPr>
-                      <a:r>
-                        <a:rPr lang="en-US" sz="1400" b="1" dirty="0">
-                          <a:solidFill>
-                            <a:schemeClr val="bg1"/>
-                          </a:solidFill>
-                        </a:rPr>
-                        <a:t>Target</a:t>
-                      </a:r>
-                      <a:endParaRPr lang="en-US" sz="1400" dirty="0"/>
-                    </a:p>
-                  </a:txBody>
-                  <a:tcPr marL="73152" marR="73152" marT="73152" marB="73152" anchor="ctr">
-                    <a:lnL w="12700" cap="flat" cmpd="sng" algn="ctr">
-                      <a:solidFill>
-                        <a:srgbClr val="FFF7EC"/>
-                      </a:solidFill>
-                      <a:prstDash val="solid"/>
-                      <a:round/>
-                      <a:headEnd type="none" w="med" len="med"/>
-                      <a:tailEnd type="none" w="med" len="med"/>
-                    </a:lnL>
-                    <a:lnR w="12700" cap="flat" cmpd="sng" algn="ctr">
-                      <a:solidFill>
-                        <a:srgbClr val="FFF7EC"/>
-                      </a:solidFill>
-                      <a:prstDash val="solid"/>
-                      <a:round/>
-                      <a:headEnd type="none" w="med" len="med"/>
-                      <a:tailEnd type="none" w="med" len="med"/>
-                    </a:lnR>
-                    <a:lnT w="12700" cap="flat" cmpd="sng" algn="ctr">
-                      <a:solidFill>
-                        <a:srgbClr val="FFF7EC"/>
-                      </a:solidFill>
-                      <a:prstDash val="solid"/>
-                      <a:round/>
-                      <a:headEnd type="none" w="med" len="med"/>
-                      <a:tailEnd type="none" w="med" len="med"/>
-                    </a:lnT>
-                    <a:lnB w="12700" cap="flat" cmpd="sng" algn="ctr">
-                      <a:solidFill>
-                        <a:srgbClr val="FFF7EC"/>
-                      </a:solidFill>
-                      <a:prstDash val="solid"/>
-                      <a:round/>
-                      <a:headEnd type="none" w="med" len="med"/>
-                      <a:tailEnd type="none" w="med" len="med"/>
-                    </a:lnB>
-                    <a:solidFill>
-                      <a:schemeClr val="tx2"/>
-                    </a:solidFill>
-                  </a:tcPr>
-                </a:tc>
-                <a:tc>
-                  <a:txBody>
-                    <a:bodyPr/>
-                    <a:lstStyle/>
-                    <a:p>
-                      <a:pPr algn="ctr" indent="0" marL="0">
-                        <a:buNone/>
-                      </a:pPr>
-                      <a:r>
-                        <a:rPr lang="en-US" sz="1400" b="1" dirty="0">
-                          <a:solidFill>
-                            <a:schemeClr val="bg1"/>
-                          </a:solidFill>
-                        </a:rPr>
-                        <a:t>Oct (actual)</a:t>
-                      </a:r>
-                      <a:endParaRPr lang="en-US" sz="1400" dirty="0"/>
-                    </a:p>
-                  </a:txBody>
-                  <a:tcPr marL="73152" marR="73152" marT="73152" marB="73152" anchor="ctr">
-                    <a:lnL w="12700" cap="flat" cmpd="sng" algn="ctr">
-                      <a:solidFill>
-                        <a:srgbClr val="FFF7EC"/>
-                      </a:solidFill>
-                      <a:prstDash val="solid"/>
-                      <a:round/>
-                      <a:headEnd type="none" w="med" len="med"/>
-                      <a:tailEnd type="none" w="med" len="med"/>
-                    </a:lnL>
-                    <a:lnR w="12700" cap="flat" cmpd="sng" algn="ctr">
-                      <a:solidFill>
-                        <a:srgbClr val="FFF7EC"/>
-                      </a:solidFill>
-                      <a:prstDash val="solid"/>
-                      <a:round/>
-                      <a:headEnd type="none" w="med" len="med"/>
-                      <a:tailEnd type="none" w="med" len="med"/>
-                    </a:lnR>
-                    <a:lnT w="12700" cap="flat" cmpd="sng" algn="ctr">
-                      <a:solidFill>
-                        <a:srgbClr val="FFF7EC"/>
-                      </a:solidFill>
-                      <a:prstDash val="solid"/>
-                      <a:round/>
-                      <a:headEnd type="none" w="med" len="med"/>
-                      <a:tailEnd type="none" w="med" len="med"/>
-                    </a:lnT>
-                    <a:lnB w="12700" cap="flat" cmpd="sng" algn="ctr">
-                      <a:solidFill>
-                        <a:srgbClr val="FFF7EC"/>
-                      </a:solidFill>
-                      <a:prstDash val="solid"/>
-                      <a:round/>
-                      <a:headEnd type="none" w="med" len="med"/>
-                      <a:tailEnd type="none" w="med" len="med"/>
-                    </a:lnB>
-                    <a:solidFill>
-                      <a:schemeClr val="tx2"/>
-                    </a:solidFill>
-                  </a:tcPr>
-                </a:tc>
-                <a:tc>
-                  <a:txBody>
-                    <a:bodyPr/>
-                    <a:lstStyle/>
-                    <a:p>
-                      <a:pPr algn="ctr" indent="0" marL="0">
-                        <a:buNone/>
-                      </a:pPr>
-                      <a:r>
-                        <a:rPr lang="en-US" sz="1400" b="1" dirty="0">
-                          <a:solidFill>
-                            <a:schemeClr val="bg1"/>
-                          </a:solidFill>
-                        </a:rPr>
-                        <a:t>Nov</a:t>
-                      </a:r>
-                      <a:endParaRPr lang="en-US" sz="1400" dirty="0"/>
-                    </a:p>
-                  </a:txBody>
-                  <a:tcPr marL="73152" marR="73152" marT="73152" marB="73152" anchor="ctr">
-                    <a:lnL w="12700" cap="flat" cmpd="sng" algn="ctr">
-                      <a:solidFill>
-                        <a:srgbClr val="FFF7EC"/>
-                      </a:solidFill>
-                      <a:prstDash val="solid"/>
-                      <a:round/>
-                      <a:headEnd type="none" w="med" len="med"/>
-                      <a:tailEnd type="none" w="med" len="med"/>
-                    </a:lnL>
-                    <a:lnR w="12700" cap="flat" cmpd="sng" algn="ctr">
-                      <a:solidFill>
-                        <a:srgbClr val="FFF7EC"/>
-                      </a:solidFill>
-                      <a:prstDash val="solid"/>
-                      <a:round/>
-                      <a:headEnd type="none" w="med" len="med"/>
-                      <a:tailEnd type="none" w="med" len="med"/>
-                    </a:lnR>
-                    <a:lnT w="12700" cap="flat" cmpd="sng" algn="ctr">
-                      <a:solidFill>
-                        <a:srgbClr val="FFF7EC"/>
-                      </a:solidFill>
-                      <a:prstDash val="solid"/>
-                      <a:round/>
-                      <a:headEnd type="none" w="med" len="med"/>
-                      <a:tailEnd type="none" w="med" len="med"/>
-                    </a:lnT>
-                    <a:lnB w="12700" cap="flat" cmpd="sng" algn="ctr">
-                      <a:solidFill>
-                        <a:srgbClr val="FFF7EC"/>
-                      </a:solidFill>
-                      <a:prstDash val="solid"/>
-                      <a:round/>
-                      <a:headEnd type="none" w="med" len="med"/>
-                      <a:tailEnd type="none" w="med" len="med"/>
-                    </a:lnB>
-                    <a:solidFill>
-                      <a:schemeClr val="tx2"/>
-                    </a:solidFill>
-                  </a:tcPr>
-                </a:tc>
-                <a:tc>
-                  <a:txBody>
-                    <a:bodyPr/>
-                    <a:lstStyle/>
-                    <a:p>
-                      <a:pPr algn="ctr" indent="0" marL="0">
-                        <a:buNone/>
-                      </a:pPr>
-                      <a:r>
-                        <a:rPr lang="en-US" sz="1400" b="1" dirty="0">
-                          <a:solidFill>
-                            <a:schemeClr val="bg1"/>
-                          </a:solidFill>
-                        </a:rPr>
-                        <a:t>Dec</a:t>
-                      </a:r>
-                      <a:endParaRPr lang="en-US" sz="1400" dirty="0"/>
-                    </a:p>
-                  </a:txBody>
-                  <a:tcPr marL="73152" marR="73152" marT="73152" marB="73152" anchor="ctr">
-                    <a:lnL w="12700" cap="flat" cmpd="sng" algn="ctr">
-                      <a:solidFill>
-                        <a:srgbClr val="FFF7EC"/>
-                      </a:solidFill>
-                      <a:prstDash val="solid"/>
-                      <a:round/>
-                      <a:headEnd type="none" w="med" len="med"/>
-                      <a:tailEnd type="none" w="med" len="med"/>
-                    </a:lnL>
-                    <a:lnR w="12700" cap="flat" cmpd="sng" algn="ctr">
-                      <a:solidFill>
-                        <a:srgbClr val="FFF7EC"/>
-                      </a:solidFill>
-                      <a:prstDash val="solid"/>
-                      <a:round/>
-                      <a:headEnd type="none" w="med" len="med"/>
-                      <a:tailEnd type="none" w="med" len="med"/>
-                    </a:lnR>
-                    <a:lnT w="12700" cap="flat" cmpd="sng" algn="ctr">
-                      <a:solidFill>
-                        <a:srgbClr val="FFF7EC"/>
-                      </a:solidFill>
-                      <a:prstDash val="solid"/>
-                      <a:round/>
-                      <a:headEnd type="none" w="med" len="med"/>
-                      <a:tailEnd type="none" w="med" len="med"/>
-                    </a:lnT>
-                    <a:lnB w="12700" cap="flat" cmpd="sng" algn="ctr">
-                      <a:solidFill>
-                        <a:srgbClr val="FFF7EC"/>
-                      </a:solidFill>
-                      <a:prstDash val="solid"/>
-                      <a:round/>
-                      <a:headEnd type="none" w="med" len="med"/>
-                      <a:tailEnd type="none" w="med" len="med"/>
-                    </a:lnB>
-                    <a:solidFill>
-                      <a:schemeClr val="tx2"/>
-                    </a:solidFill>
-                  </a:tcPr>
-                </a:tc>
-              </a:tr>
-              <a:tr h="475488">
-                <a:tc>
-                  <a:txBody>
-                    <a:bodyPr/>
-                    <a:lstStyle/>
-                    <a:p>
-                      <a:pPr indent="0" marL="0">
-                        <a:buNone/>
-                      </a:pPr>
-                      <a:r>
-                        <a:rPr lang="en-US" sz="1400" b="1" dirty="0">
-                          <a:solidFill>
-                            <a:schemeClr val="tx1"/>
-                          </a:solidFill>
-                        </a:rPr>
-                        <a:t>Real-estate AI videos delivered</a:t>
-                      </a:r>
-                      <a:endParaRPr lang="en-US" sz="1400" dirty="0"/>
-                    </a:p>
-                  </a:txBody>
-                  <a:tcPr marL="73152" marR="73152" marT="73152" marB="73152" anchor="ctr">
-                    <a:lnL w="12700" cap="flat" cmpd="sng" algn="ctr">
-                      <a:solidFill>
-                        <a:srgbClr val="FFF7EC"/>
-                      </a:solidFill>
-                      <a:prstDash val="solid"/>
-                      <a:round/>
-                      <a:headEnd type="none" w="med" len="med"/>
-                      <a:tailEnd type="none" w="med" len="med"/>
-                    </a:lnL>
-                    <a:lnR w="12700" cap="flat" cmpd="sng" algn="ctr">
-                      <a:solidFill>
-                        <a:srgbClr val="FFF7EC"/>
-                      </a:solidFill>
-                      <a:prstDash val="solid"/>
-                      <a:round/>
-                      <a:headEnd type="none" w="med" len="med"/>
-                      <a:tailEnd type="none" w="med" len="med"/>
-                    </a:lnR>
-                    <a:lnT w="12700" cap="flat" cmpd="sng" algn="ctr">
-                      <a:solidFill>
-                        <a:srgbClr val="FFF7EC"/>
-                      </a:solidFill>
-                      <a:prstDash val="solid"/>
-                      <a:round/>
-                      <a:headEnd type="none" w="med" len="med"/>
-                      <a:tailEnd type="none" w="med" len="med"/>
-                    </a:lnT>
-                    <a:lnB w="12700" cap="flat" cmpd="sng" algn="ctr">
-                      <a:solidFill>
-                        <a:srgbClr val="FFF7EC"/>
-                      </a:solidFill>
-                      <a:prstDash val="solid"/>
-                      <a:round/>
-                      <a:headEnd type="none" w="med" len="med"/>
-                      <a:tailEnd type="none" w="med" len="med"/>
-                    </a:lnB>
-                    <a:solidFill>
-                      <a:schemeClr val="bg1"/>
-                    </a:solidFill>
-                  </a:tcPr>
-                </a:tc>
-                <a:tc>
-                  <a:txBody>
-                    <a:bodyPr/>
-                    <a:lstStyle/>
-                    <a:p>
-                      <a:pPr algn="ctr" indent="0" marL="0">
-                        <a:buNone/>
-                      </a:pPr>
-                      <a:r>
-                        <a:rPr lang="en-US" sz="1400" i="1" dirty="0">
-                          <a:solidFill>
-                            <a:srgbClr val="B3561A"/>
-                          </a:solidFill>
-                        </a:rPr>
-                        <a:t>[add]</a:t>
-                      </a:r>
-                      <a:endParaRPr lang="en-US" sz="1400" dirty="0"/>
-                    </a:p>
-                  </a:txBody>
-                  <a:tcPr marL="73152" marR="73152" marT="73152" marB="73152" anchor="ctr">
-                    <a:lnL w="12700" cap="flat" cmpd="sng" algn="ctr">
-                      <a:solidFill>
-                        <a:srgbClr val="FFF7EC"/>
-                      </a:solidFill>
-                      <a:prstDash val="solid"/>
-                      <a:round/>
-                      <a:headEnd type="none" w="med" len="med"/>
-                      <a:tailEnd type="none" w="med" len="med"/>
-                    </a:lnL>
-                    <a:lnR w="12700" cap="flat" cmpd="sng" algn="ctr">
-                      <a:solidFill>
-                        <a:srgbClr val="FFF7EC"/>
-                      </a:solidFill>
-                      <a:prstDash val="solid"/>
-                      <a:round/>
-                      <a:headEnd type="none" w="med" len="med"/>
-                      <a:tailEnd type="none" w="med" len="med"/>
-                    </a:lnR>
-                    <a:lnT w="12700" cap="flat" cmpd="sng" algn="ctr">
-                      <a:solidFill>
-                        <a:srgbClr val="FFF7EC"/>
-                      </a:solidFill>
-                      <a:prstDash val="solid"/>
-                      <a:round/>
-                      <a:headEnd type="none" w="med" len="med"/>
-                      <a:tailEnd type="none" w="med" len="med"/>
-                    </a:lnT>
-                    <a:lnB w="12700" cap="flat" cmpd="sng" algn="ctr">
-                      <a:solidFill>
-                        <a:srgbClr val="FFF7EC"/>
-                      </a:solidFill>
-                      <a:prstDash val="solid"/>
-                      <a:round/>
-                      <a:headEnd type="none" w="med" len="med"/>
-                      <a:tailEnd type="none" w="med" len="med"/>
-                    </a:lnB>
-                    <a:solidFill>
-                      <a:srgbClr val="FDE5CC"/>
-                    </a:solidFill>
-                  </a:tcPr>
-                </a:tc>
-                <a:tc>
-                  <a:txBody>
-                    <a:bodyPr/>
-                    <a:lstStyle/>
-                    <a:p>
-                      <a:pPr algn="ctr" indent="0" marL="0">
-                        <a:buNone/>
-                      </a:pPr>
-                      <a:r>
-                        <a:rPr lang="en-US" sz="1400" i="1" dirty="0">
-                          <a:solidFill>
-                            <a:srgbClr val="B3561A"/>
-                          </a:solidFill>
-                        </a:rPr>
-                        <a:t>[add]</a:t>
-                      </a:r>
-                      <a:endParaRPr lang="en-US" sz="1400" dirty="0"/>
-                    </a:p>
-                  </a:txBody>
-                  <a:tcPr marL="73152" marR="73152" marT="73152" marB="73152" anchor="ctr">
-                    <a:lnL w="12700" cap="flat" cmpd="sng" algn="ctr">
-                      <a:solidFill>
-                        <a:srgbClr val="FFF7EC"/>
-                      </a:solidFill>
-                      <a:prstDash val="solid"/>
-                      <a:round/>
-                      <a:headEnd type="none" w="med" len="med"/>
-                      <a:tailEnd type="none" w="med" len="med"/>
-                    </a:lnL>
-                    <a:lnR w="12700" cap="flat" cmpd="sng" algn="ctr">
-                      <a:solidFill>
-                        <a:srgbClr val="FFF7EC"/>
-                      </a:solidFill>
-                      <a:prstDash val="solid"/>
-                      <a:round/>
-                      <a:headEnd type="none" w="med" len="med"/>
-                      <a:tailEnd type="none" w="med" len="med"/>
-                    </a:lnR>
-                    <a:lnT w="12700" cap="flat" cmpd="sng" algn="ctr">
-                      <a:solidFill>
-                        <a:srgbClr val="FFF7EC"/>
-                      </a:solidFill>
-                      <a:prstDash val="solid"/>
-                      <a:round/>
-                      <a:headEnd type="none" w="med" len="med"/>
-                      <a:tailEnd type="none" w="med" len="med"/>
-                    </a:lnT>
-                    <a:lnB w="12700" cap="flat" cmpd="sng" algn="ctr">
-                      <a:solidFill>
-                        <a:srgbClr val="FFF7EC"/>
-                      </a:solidFill>
-                      <a:prstDash val="solid"/>
-                      <a:round/>
-                      <a:headEnd type="none" w="med" len="med"/>
-                      <a:tailEnd type="none" w="med" len="med"/>
-                    </a:lnB>
-                    <a:solidFill>
-                      <a:srgbClr val="FDE5CC"/>
-                    </a:solidFill>
-                  </a:tcPr>
-                </a:tc>
-                <a:tc>
-                  <a:txBody>
-                    <a:bodyPr/>
-                    <a:lstStyle/>
-                    <a:p>
-                      <a:pPr algn="ctr" indent="0" marL="0">
-                        <a:buNone/>
-                      </a:pPr>
-                      <a:r>
-                        <a:rPr lang="en-US" sz="1400" i="1" dirty="0">
-                          <a:solidFill>
-                            <a:srgbClr val="B3561A"/>
-                          </a:solidFill>
-                        </a:rPr>
-                        <a:t>[add]</a:t>
-                      </a:r>
-                      <a:endParaRPr lang="en-US" sz="1400" dirty="0"/>
-                    </a:p>
-                  </a:txBody>
-                  <a:tcPr marL="73152" marR="73152" marT="73152" marB="73152" anchor="ctr">
-                    <a:lnL w="12700" cap="flat" cmpd="sng" algn="ctr">
-                      <a:solidFill>
-                        <a:srgbClr val="FFF7EC"/>
-                      </a:solidFill>
-                      <a:prstDash val="solid"/>
-                      <a:round/>
-                      <a:headEnd type="none" w="med" len="med"/>
-                      <a:tailEnd type="none" w="med" len="med"/>
-                    </a:lnL>
-                    <a:lnR w="12700" cap="flat" cmpd="sng" algn="ctr">
-                      <a:solidFill>
-                        <a:srgbClr val="FFF7EC"/>
-                      </a:solidFill>
-                      <a:prstDash val="solid"/>
-                      <a:round/>
-                      <a:headEnd type="none" w="med" len="med"/>
-                      <a:tailEnd type="none" w="med" len="med"/>
-                    </a:lnR>
-                    <a:lnT w="12700" cap="flat" cmpd="sng" algn="ctr">
-                      <a:solidFill>
-                        <a:srgbClr val="FFF7EC"/>
-                      </a:solidFill>
-                      <a:prstDash val="solid"/>
-                      <a:round/>
-                      <a:headEnd type="none" w="med" len="med"/>
-                      <a:tailEnd type="none" w="med" len="med"/>
-                    </a:lnT>
-                    <a:lnB w="12700" cap="flat" cmpd="sng" algn="ctr">
-                      <a:solidFill>
-                        <a:srgbClr val="FFF7EC"/>
-                      </a:solidFill>
-                      <a:prstDash val="solid"/>
-                      <a:round/>
-                      <a:headEnd type="none" w="med" len="med"/>
-                      <a:tailEnd type="none" w="med" len="med"/>
-                    </a:lnB>
-                    <a:solidFill>
-                      <a:srgbClr val="FDE5CC"/>
-                    </a:solidFill>
-                  </a:tcPr>
-                </a:tc>
-              </a:tr>
-              <a:tr h="475488">
-                <a:tc>
-                  <a:txBody>
-                    <a:bodyPr/>
-                    <a:lstStyle/>
-                    <a:p>
-                      <a:pPr indent="0" marL="0">
-                        <a:buNone/>
-                      </a:pPr>
-                      <a:r>
-                        <a:rPr lang="en-US" sz="1400" b="1" dirty="0">
-                          <a:solidFill>
-                            <a:schemeClr val="tx1"/>
-                          </a:solidFill>
-                        </a:rPr>
-                        <a:t>AI-led creative deliverables</a:t>
-                      </a:r>
-                      <a:endParaRPr lang="en-US" sz="1400" dirty="0"/>
-                    </a:p>
-                  </a:txBody>
-                  <a:tcPr marL="73152" marR="73152" marT="73152" marB="73152" anchor="ctr">
-                    <a:lnL w="12700" cap="flat" cmpd="sng" algn="ctr">
-                      <a:solidFill>
-                        <a:srgbClr val="FFF7EC"/>
-                      </a:solidFill>
-                      <a:prstDash val="solid"/>
-                      <a:round/>
-                      <a:headEnd type="none" w="med" len="med"/>
-                      <a:tailEnd type="none" w="med" len="med"/>
-                    </a:lnL>
-                    <a:lnR w="12700" cap="flat" cmpd="sng" algn="ctr">
-                      <a:solidFill>
-                        <a:srgbClr val="FFF7EC"/>
-                      </a:solidFill>
-                      <a:prstDash val="solid"/>
-                      <a:round/>
-                      <a:headEnd type="none" w="med" len="med"/>
-                      <a:tailEnd type="none" w="med" len="med"/>
-                    </a:lnR>
-                    <a:lnT w="12700" cap="flat" cmpd="sng" algn="ctr">
-                      <a:solidFill>
-                        <a:srgbClr val="FFF7EC"/>
-                      </a:solidFill>
-                      <a:prstDash val="solid"/>
-                      <a:round/>
-                      <a:headEnd type="none" w="med" len="med"/>
-                      <a:tailEnd type="none" w="med" len="med"/>
-                    </a:lnT>
-                    <a:lnB w="12700" cap="flat" cmpd="sng" algn="ctr">
-                      <a:solidFill>
-                        <a:srgbClr val="FFF7EC"/>
-                      </a:solidFill>
-                      <a:prstDash val="solid"/>
-                      <a:round/>
-                      <a:headEnd type="none" w="med" len="med"/>
-                      <a:tailEnd type="none" w="med" len="med"/>
-                    </a:lnB>
-                    <a:solidFill>
-                      <a:schemeClr val="bg1"/>
-                    </a:solidFill>
-                  </a:tcPr>
-                </a:tc>
-                <a:tc>
-                  <a:txBody>
-                    <a:bodyPr/>
-                    <a:lstStyle/>
-                    <a:p>
-                      <a:pPr algn="ctr" indent="0" marL="0">
-                        <a:buNone/>
-                      </a:pPr>
-                      <a:r>
-                        <a:rPr lang="en-US" sz="1400" i="1" dirty="0">
-                          <a:solidFill>
-                            <a:srgbClr val="B3561A"/>
-                          </a:solidFill>
-                        </a:rPr>
-                        <a:t>[add]</a:t>
-                      </a:r>
-                      <a:endParaRPr lang="en-US" sz="1400" dirty="0"/>
-                    </a:p>
-                  </a:txBody>
-                  <a:tcPr marL="73152" marR="73152" marT="73152" marB="73152" anchor="ctr">
-                    <a:lnL w="12700" cap="flat" cmpd="sng" algn="ctr">
-                      <a:solidFill>
-                        <a:srgbClr val="FFF7EC"/>
-                      </a:solidFill>
-                      <a:prstDash val="solid"/>
-                      <a:round/>
-                      <a:headEnd type="none" w="med" len="med"/>
-                      <a:tailEnd type="none" w="med" len="med"/>
-                    </a:lnL>
-                    <a:lnR w="12700" cap="flat" cmpd="sng" algn="ctr">
-                      <a:solidFill>
-                        <a:srgbClr val="FFF7EC"/>
-                      </a:solidFill>
-                      <a:prstDash val="solid"/>
-                      <a:round/>
-                      <a:headEnd type="none" w="med" len="med"/>
-                      <a:tailEnd type="none" w="med" len="med"/>
-                    </a:lnR>
-                    <a:lnT w="12700" cap="flat" cmpd="sng" algn="ctr">
-                      <a:solidFill>
-                        <a:srgbClr val="FFF7EC"/>
-                      </a:solidFill>
-                      <a:prstDash val="solid"/>
-                      <a:round/>
-                      <a:headEnd type="none" w="med" len="med"/>
-                      <a:tailEnd type="none" w="med" len="med"/>
-                    </a:lnT>
-                    <a:lnB w="12700" cap="flat" cmpd="sng" algn="ctr">
-                      <a:solidFill>
-                        <a:srgbClr val="FFF7EC"/>
-                      </a:solidFill>
-                      <a:prstDash val="solid"/>
-                      <a:round/>
-                      <a:headEnd type="none" w="med" len="med"/>
-                      <a:tailEnd type="none" w="med" len="med"/>
-                    </a:lnB>
-                    <a:solidFill>
-                      <a:srgbClr val="FDE5CC"/>
-                    </a:solidFill>
-                  </a:tcPr>
-                </a:tc>
-                <a:tc>
-                  <a:txBody>
-                    <a:bodyPr/>
-                    <a:lstStyle/>
-                    <a:p>
-                      <a:pPr algn="ctr" indent="0" marL="0">
-                        <a:buNone/>
-                      </a:pPr>
-                      <a:r>
-                        <a:rPr lang="en-US" sz="1400" i="1" dirty="0">
-                          <a:solidFill>
-                            <a:srgbClr val="B3561A"/>
-                          </a:solidFill>
-                        </a:rPr>
-                        <a:t>[add]</a:t>
-                      </a:r>
-                      <a:endParaRPr lang="en-US" sz="1400" dirty="0"/>
-                    </a:p>
-                  </a:txBody>
-                  <a:tcPr marL="73152" marR="73152" marT="73152" marB="73152" anchor="ctr">
-                    <a:lnL w="12700" cap="flat" cmpd="sng" algn="ctr">
-                      <a:solidFill>
-                        <a:srgbClr val="FFF7EC"/>
-                      </a:solidFill>
-                      <a:prstDash val="solid"/>
-                      <a:round/>
-                      <a:headEnd type="none" w="med" len="med"/>
-                      <a:tailEnd type="none" w="med" len="med"/>
-                    </a:lnL>
-                    <a:lnR w="12700" cap="flat" cmpd="sng" algn="ctr">
-                      <a:solidFill>
-                        <a:srgbClr val="FFF7EC"/>
-                      </a:solidFill>
-                      <a:prstDash val="solid"/>
-                      <a:round/>
-                      <a:headEnd type="none" w="med" len="med"/>
-                      <a:tailEnd type="none" w="med" len="med"/>
-                    </a:lnR>
-                    <a:lnT w="12700" cap="flat" cmpd="sng" algn="ctr">
-                      <a:solidFill>
-                        <a:srgbClr val="FFF7EC"/>
-                      </a:solidFill>
-                      <a:prstDash val="solid"/>
-                      <a:round/>
-                      <a:headEnd type="none" w="med" len="med"/>
-                      <a:tailEnd type="none" w="med" len="med"/>
-                    </a:lnT>
-                    <a:lnB w="12700" cap="flat" cmpd="sng" algn="ctr">
-                      <a:solidFill>
-                        <a:srgbClr val="FFF7EC"/>
-                      </a:solidFill>
-                      <a:prstDash val="solid"/>
-                      <a:round/>
-                      <a:headEnd type="none" w="med" len="med"/>
-                      <a:tailEnd type="none" w="med" len="med"/>
-                    </a:lnB>
-                    <a:solidFill>
-                      <a:srgbClr val="FDE5CC"/>
-                    </a:solidFill>
-                  </a:tcPr>
-                </a:tc>
-                <a:tc>
-                  <a:txBody>
-                    <a:bodyPr/>
-                    <a:lstStyle/>
-                    <a:p>
-                      <a:pPr algn="ctr" indent="0" marL="0">
-                        <a:buNone/>
-                      </a:pPr>
-                      <a:r>
-                        <a:rPr lang="en-US" sz="1400" i="1" dirty="0">
-                          <a:solidFill>
-                            <a:srgbClr val="B3561A"/>
-                          </a:solidFill>
-                        </a:rPr>
-                        <a:t>[add]</a:t>
-                      </a:r>
-                      <a:endParaRPr lang="en-US" sz="1400" dirty="0"/>
-                    </a:p>
-                  </a:txBody>
-                  <a:tcPr marL="73152" marR="73152" marT="73152" marB="73152" anchor="ctr">
-                    <a:lnL w="12700" cap="flat" cmpd="sng" algn="ctr">
-                      <a:solidFill>
-                        <a:srgbClr val="FFF7EC"/>
-                      </a:solidFill>
-                      <a:prstDash val="solid"/>
-                      <a:round/>
-                      <a:headEnd type="none" w="med" len="med"/>
-                      <a:tailEnd type="none" w="med" len="med"/>
-                    </a:lnL>
-                    <a:lnR w="12700" cap="flat" cmpd="sng" algn="ctr">
-                      <a:solidFill>
-                        <a:srgbClr val="FFF7EC"/>
-                      </a:solidFill>
-                      <a:prstDash val="solid"/>
-                      <a:round/>
-                      <a:headEnd type="none" w="med" len="med"/>
-                      <a:tailEnd type="none" w="med" len="med"/>
-                    </a:lnR>
-                    <a:lnT w="12700" cap="flat" cmpd="sng" algn="ctr">
-                      <a:solidFill>
-                        <a:srgbClr val="FFF7EC"/>
-                      </a:solidFill>
-                      <a:prstDash val="solid"/>
-                      <a:round/>
-                      <a:headEnd type="none" w="med" len="med"/>
-                      <a:tailEnd type="none" w="med" len="med"/>
-                    </a:lnT>
-                    <a:lnB w="12700" cap="flat" cmpd="sng" algn="ctr">
-                      <a:solidFill>
-                        <a:srgbClr val="FFF7EC"/>
-                      </a:solidFill>
-                      <a:prstDash val="solid"/>
-                      <a:round/>
-                      <a:headEnd type="none" w="med" len="med"/>
-                      <a:tailEnd type="none" w="med" len="med"/>
-                    </a:lnB>
-                    <a:solidFill>
-                      <a:srgbClr val="FDE5CC"/>
-                    </a:solidFill>
-                  </a:tcPr>
-                </a:tc>
-              </a:tr>
-              <a:tr h="475488">
-                <a:tc>
-                  <a:txBody>
-                    <a:bodyPr/>
-                    <a:lstStyle/>
-                    <a:p>
-                      <a:pPr indent="0" marL="0">
-                        <a:buNone/>
-                      </a:pPr>
-                      <a:r>
-                        <a:rPr lang="en-US" sz="1400" b="1" dirty="0">
-                          <a:solidFill>
-                            <a:schemeClr val="tx1"/>
-                          </a:solidFill>
-                        </a:rPr>
-                        <a:t>Retainer delivery vs. scope</a:t>
-                      </a:r>
-                      <a:endParaRPr lang="en-US" sz="1400" dirty="0"/>
-                    </a:p>
-                  </a:txBody>
-                  <a:tcPr marL="73152" marR="73152" marT="73152" marB="73152" anchor="ctr">
-                    <a:lnL w="12700" cap="flat" cmpd="sng" algn="ctr">
-                      <a:solidFill>
-                        <a:srgbClr val="FFF7EC"/>
-                      </a:solidFill>
-                      <a:prstDash val="solid"/>
-                      <a:round/>
-                      <a:headEnd type="none" w="med" len="med"/>
-                      <a:tailEnd type="none" w="med" len="med"/>
-                    </a:lnL>
-                    <a:lnR w="12700" cap="flat" cmpd="sng" algn="ctr">
-                      <a:solidFill>
-                        <a:srgbClr val="FFF7EC"/>
-                      </a:solidFill>
-                      <a:prstDash val="solid"/>
-                      <a:round/>
-                      <a:headEnd type="none" w="med" len="med"/>
-                      <a:tailEnd type="none" w="med" len="med"/>
-                    </a:lnR>
-                    <a:lnT w="12700" cap="flat" cmpd="sng" algn="ctr">
-                      <a:solidFill>
-                        <a:srgbClr val="FFF7EC"/>
-                      </a:solidFill>
-                      <a:prstDash val="solid"/>
-                      <a:round/>
-                      <a:headEnd type="none" w="med" len="med"/>
-                      <a:tailEnd type="none" w="med" len="med"/>
-                    </a:lnT>
-                    <a:lnB w="12700" cap="flat" cmpd="sng" algn="ctr">
-                      <a:solidFill>
-                        <a:srgbClr val="FFF7EC"/>
-                      </a:solidFill>
-                      <a:prstDash val="solid"/>
-                      <a:round/>
-                      <a:headEnd type="none" w="med" len="med"/>
-                      <a:tailEnd type="none" w="med" len="med"/>
-                    </a:lnB>
-                    <a:solidFill>
-                      <a:schemeClr val="bg1"/>
-                    </a:solidFill>
-                  </a:tcPr>
-                </a:tc>
-                <a:tc>
-                  <a:txBody>
-                    <a:bodyPr/>
-                    <a:lstStyle/>
-                    <a:p>
-                      <a:pPr algn="ctr" indent="0" marL="0">
-                        <a:buNone/>
-                      </a:pPr>
-                      <a:r>
-                        <a:rPr lang="en-US" sz="1400" i="1" dirty="0">
-                          <a:solidFill>
-                            <a:srgbClr val="B3561A"/>
-                          </a:solidFill>
-                        </a:rPr>
-                        <a:t>[add]</a:t>
-                      </a:r>
-                      <a:endParaRPr lang="en-US" sz="1400" dirty="0"/>
-                    </a:p>
-                  </a:txBody>
-                  <a:tcPr marL="73152" marR="73152" marT="73152" marB="73152" anchor="ctr">
-                    <a:lnL w="12700" cap="flat" cmpd="sng" algn="ctr">
-                      <a:solidFill>
-                        <a:srgbClr val="FFF7EC"/>
-                      </a:solidFill>
-                      <a:prstDash val="solid"/>
-                      <a:round/>
-                      <a:headEnd type="none" w="med" len="med"/>
-                      <a:tailEnd type="none" w="med" len="med"/>
-                    </a:lnL>
-                    <a:lnR w="12700" cap="flat" cmpd="sng" algn="ctr">
-                      <a:solidFill>
-                        <a:srgbClr val="FFF7EC"/>
-                      </a:solidFill>
-                      <a:prstDash val="solid"/>
-                      <a:round/>
-                      <a:headEnd type="none" w="med" len="med"/>
-                      <a:tailEnd type="none" w="med" len="med"/>
-                    </a:lnR>
-                    <a:lnT w="12700" cap="flat" cmpd="sng" algn="ctr">
-                      <a:solidFill>
-                        <a:srgbClr val="FFF7EC"/>
-                      </a:solidFill>
-                      <a:prstDash val="solid"/>
-                      <a:round/>
-                      <a:headEnd type="none" w="med" len="med"/>
-                      <a:tailEnd type="none" w="med" len="med"/>
-                    </a:lnT>
-                    <a:lnB w="12700" cap="flat" cmpd="sng" algn="ctr">
-                      <a:solidFill>
-                        <a:srgbClr val="FFF7EC"/>
-                      </a:solidFill>
-                      <a:prstDash val="solid"/>
-                      <a:round/>
-                      <a:headEnd type="none" w="med" len="med"/>
-                      <a:tailEnd type="none" w="med" len="med"/>
-                    </a:lnB>
-                    <a:solidFill>
-                      <a:srgbClr val="FDE5CC"/>
-                    </a:solidFill>
-                  </a:tcPr>
-                </a:tc>
-                <a:tc>
-                  <a:txBody>
-                    <a:bodyPr/>
-                    <a:lstStyle/>
-                    <a:p>
-                      <a:pPr algn="ctr" indent="0" marL="0">
-                        <a:buNone/>
-                      </a:pPr>
-                      <a:r>
-                        <a:rPr lang="en-US" sz="1400" i="1" dirty="0">
-                          <a:solidFill>
-                            <a:srgbClr val="B3561A"/>
-                          </a:solidFill>
-                        </a:rPr>
-                        <a:t>[add]</a:t>
-                      </a:r>
-                      <a:endParaRPr lang="en-US" sz="1400" dirty="0"/>
-                    </a:p>
-                  </a:txBody>
-                  <a:tcPr marL="73152" marR="73152" marT="73152" marB="73152" anchor="ctr">
-                    <a:lnL w="12700" cap="flat" cmpd="sng" algn="ctr">
-                      <a:solidFill>
-                        <a:srgbClr val="FFF7EC"/>
-                      </a:solidFill>
-                      <a:prstDash val="solid"/>
-                      <a:round/>
-                      <a:headEnd type="none" w="med" len="med"/>
-                      <a:tailEnd type="none" w="med" len="med"/>
-                    </a:lnL>
-                    <a:lnR w="12700" cap="flat" cmpd="sng" algn="ctr">
-                      <a:solidFill>
-                        <a:srgbClr val="FFF7EC"/>
-                      </a:solidFill>
-                      <a:prstDash val="solid"/>
-                      <a:round/>
-                      <a:headEnd type="none" w="med" len="med"/>
-                      <a:tailEnd type="none" w="med" len="med"/>
-                    </a:lnR>
-                    <a:lnT w="12700" cap="flat" cmpd="sng" algn="ctr">
-                      <a:solidFill>
-                        <a:srgbClr val="FFF7EC"/>
-                      </a:solidFill>
-                      <a:prstDash val="solid"/>
-                      <a:round/>
-                      <a:headEnd type="none" w="med" len="med"/>
-                      <a:tailEnd type="none" w="med" len="med"/>
-                    </a:lnT>
-                    <a:lnB w="12700" cap="flat" cmpd="sng" algn="ctr">
-                      <a:solidFill>
-                        <a:srgbClr val="FFF7EC"/>
-                      </a:solidFill>
-                      <a:prstDash val="solid"/>
-                      <a:round/>
-                      <a:headEnd type="none" w="med" len="med"/>
-                      <a:tailEnd type="none" w="med" len="med"/>
-                    </a:lnB>
-                    <a:solidFill>
-                      <a:srgbClr val="FDE5CC"/>
-                    </a:solidFill>
-                  </a:tcPr>
-                </a:tc>
-                <a:tc>
-                  <a:txBody>
-                    <a:bodyPr/>
-                    <a:lstStyle/>
-                    <a:p>
-                      <a:pPr algn="ctr" indent="0" marL="0">
-                        <a:buNone/>
-                      </a:pPr>
-                      <a:r>
-                        <a:rPr lang="en-US" sz="1400" i="1" dirty="0">
-                          <a:solidFill>
-                            <a:srgbClr val="B3561A"/>
-                          </a:solidFill>
-                        </a:rPr>
-                        <a:t>[add]</a:t>
-                      </a:r>
-                      <a:endParaRPr lang="en-US" sz="1400" dirty="0"/>
-                    </a:p>
-                  </a:txBody>
-                  <a:tcPr marL="73152" marR="73152" marT="73152" marB="73152" anchor="ctr">
-                    <a:lnL w="12700" cap="flat" cmpd="sng" algn="ctr">
-                      <a:solidFill>
-                        <a:srgbClr val="FFF7EC"/>
-                      </a:solidFill>
-                      <a:prstDash val="solid"/>
-                      <a:round/>
-                      <a:headEnd type="none" w="med" len="med"/>
-                      <a:tailEnd type="none" w="med" len="med"/>
-                    </a:lnL>
-                    <a:lnR w="12700" cap="flat" cmpd="sng" algn="ctr">
-                      <a:solidFill>
-                        <a:srgbClr val="FFF7EC"/>
-                      </a:solidFill>
-                      <a:prstDash val="solid"/>
-                      <a:round/>
-                      <a:headEnd type="none" w="med" len="med"/>
-                      <a:tailEnd type="none" w="med" len="med"/>
-                    </a:lnR>
-                    <a:lnT w="12700" cap="flat" cmpd="sng" algn="ctr">
-                      <a:solidFill>
-                        <a:srgbClr val="FFF7EC"/>
-                      </a:solidFill>
-                      <a:prstDash val="solid"/>
-                      <a:round/>
-                      <a:headEnd type="none" w="med" len="med"/>
-                      <a:tailEnd type="none" w="med" len="med"/>
-                    </a:lnT>
-                    <a:lnB w="12700" cap="flat" cmpd="sng" algn="ctr">
-                      <a:solidFill>
-                        <a:srgbClr val="FFF7EC"/>
-                      </a:solidFill>
-                      <a:prstDash val="solid"/>
-                      <a:round/>
-                      <a:headEnd type="none" w="med" len="med"/>
-                      <a:tailEnd type="none" w="med" len="med"/>
-                    </a:lnB>
-                    <a:solidFill>
-                      <a:srgbClr val="FDE5CC"/>
-                    </a:solidFill>
-                  </a:tcPr>
-                </a:tc>
-              </a:tr>
-              <a:tr h="475488">
-                <a:tc>
-                  <a:txBody>
-                    <a:bodyPr/>
-                    <a:lstStyle/>
-                    <a:p>
-                      <a:pPr indent="0" marL="0">
-                        <a:buNone/>
-                      </a:pPr>
-                      <a:r>
-                        <a:rPr lang="en-US" sz="1400" b="1" dirty="0">
-                          <a:solidFill>
-                            <a:schemeClr val="tx1"/>
-                          </a:solidFill>
-                        </a:rPr>
-                        <a:t>On-time project delivery</a:t>
-                      </a:r>
-                      <a:endParaRPr lang="en-US" sz="1400" dirty="0"/>
-                    </a:p>
-                  </a:txBody>
-                  <a:tcPr marL="73152" marR="73152" marT="73152" marB="73152" anchor="ctr">
-                    <a:lnL w="12700" cap="flat" cmpd="sng" algn="ctr">
-                      <a:solidFill>
-                        <a:srgbClr val="FFF7EC"/>
-                      </a:solidFill>
-                      <a:prstDash val="solid"/>
-                      <a:round/>
-                      <a:headEnd type="none" w="med" len="med"/>
-                      <a:tailEnd type="none" w="med" len="med"/>
-                    </a:lnL>
-                    <a:lnR w="12700" cap="flat" cmpd="sng" algn="ctr">
-                      <a:solidFill>
-                        <a:srgbClr val="FFF7EC"/>
-                      </a:solidFill>
-                      <a:prstDash val="solid"/>
-                      <a:round/>
-                      <a:headEnd type="none" w="med" len="med"/>
-                      <a:tailEnd type="none" w="med" len="med"/>
-                    </a:lnR>
-                    <a:lnT w="12700" cap="flat" cmpd="sng" algn="ctr">
-                      <a:solidFill>
-                        <a:srgbClr val="FFF7EC"/>
-                      </a:solidFill>
-                      <a:prstDash val="solid"/>
-                      <a:round/>
-                      <a:headEnd type="none" w="med" len="med"/>
-                      <a:tailEnd type="none" w="med" len="med"/>
-                    </a:lnT>
-                    <a:lnB w="12700" cap="flat" cmpd="sng" algn="ctr">
-                      <a:solidFill>
-                        <a:srgbClr val="FFF7EC"/>
-                      </a:solidFill>
-                      <a:prstDash val="solid"/>
-                      <a:round/>
-                      <a:headEnd type="none" w="med" len="med"/>
-                      <a:tailEnd type="none" w="med" len="med"/>
-                    </a:lnB>
-                    <a:solidFill>
-                      <a:schemeClr val="bg1"/>
-                    </a:solidFill>
-                  </a:tcPr>
-                </a:tc>
-                <a:tc>
-                  <a:txBody>
-                    <a:bodyPr/>
-                    <a:lstStyle/>
-                    <a:p>
-                      <a:pPr algn="ctr" indent="0" marL="0">
-                        <a:buNone/>
-                      </a:pPr>
-                      <a:r>
-                        <a:rPr lang="en-US" sz="1400" i="1" dirty="0">
-                          <a:solidFill>
-                            <a:srgbClr val="B3561A"/>
-                          </a:solidFill>
-                        </a:rPr>
-                        <a:t>[add]</a:t>
-                      </a:r>
-                      <a:endParaRPr lang="en-US" sz="1400" dirty="0"/>
-                    </a:p>
-                  </a:txBody>
-                  <a:tcPr marL="73152" marR="73152" marT="73152" marB="73152" anchor="ctr">
-                    <a:lnL w="12700" cap="flat" cmpd="sng" algn="ctr">
-                      <a:solidFill>
-                        <a:srgbClr val="FFF7EC"/>
-                      </a:solidFill>
-                      <a:prstDash val="solid"/>
-                      <a:round/>
-                      <a:headEnd type="none" w="med" len="med"/>
-                      <a:tailEnd type="none" w="med" len="med"/>
-                    </a:lnL>
-                    <a:lnR w="12700" cap="flat" cmpd="sng" algn="ctr">
-                      <a:solidFill>
-                        <a:srgbClr val="FFF7EC"/>
-                      </a:solidFill>
-                      <a:prstDash val="solid"/>
-                      <a:round/>
-                      <a:headEnd type="none" w="med" len="med"/>
-                      <a:tailEnd type="none" w="med" len="med"/>
-                    </a:lnR>
-                    <a:lnT w="12700" cap="flat" cmpd="sng" algn="ctr">
-                      <a:solidFill>
-                        <a:srgbClr val="FFF7EC"/>
-                      </a:solidFill>
-                      <a:prstDash val="solid"/>
-                      <a:round/>
-                      <a:headEnd type="none" w="med" len="med"/>
-                      <a:tailEnd type="none" w="med" len="med"/>
-                    </a:lnT>
-                    <a:lnB w="12700" cap="flat" cmpd="sng" algn="ctr">
-                      <a:solidFill>
-                        <a:srgbClr val="FFF7EC"/>
-                      </a:solidFill>
-                      <a:prstDash val="solid"/>
-                      <a:round/>
-                      <a:headEnd type="none" w="med" len="med"/>
-                      <a:tailEnd type="none" w="med" len="med"/>
-                    </a:lnB>
-                    <a:solidFill>
-                      <a:srgbClr val="FDE5CC"/>
-                    </a:solidFill>
-                  </a:tcPr>
-                </a:tc>
-                <a:tc>
-                  <a:txBody>
-                    <a:bodyPr/>
-                    <a:lstStyle/>
-                    <a:p>
-                      <a:pPr algn="ctr" indent="0" marL="0">
-                        <a:buNone/>
-                      </a:pPr>
-                      <a:r>
-                        <a:rPr lang="en-US" sz="1400" i="1" dirty="0">
-                          <a:solidFill>
-                            <a:srgbClr val="B3561A"/>
-                          </a:solidFill>
-                        </a:rPr>
-                        <a:t>[add]</a:t>
-                      </a:r>
-                      <a:endParaRPr lang="en-US" sz="1400" dirty="0"/>
-                    </a:p>
-                  </a:txBody>
-                  <a:tcPr marL="73152" marR="73152" marT="73152" marB="73152" anchor="ctr">
-                    <a:lnL w="12700" cap="flat" cmpd="sng" algn="ctr">
-                      <a:solidFill>
-                        <a:srgbClr val="FFF7EC"/>
-                      </a:solidFill>
-                      <a:prstDash val="solid"/>
-                      <a:round/>
-                      <a:headEnd type="none" w="med" len="med"/>
-                      <a:tailEnd type="none" w="med" len="med"/>
-                    </a:lnL>
-                    <a:lnR w="12700" cap="flat" cmpd="sng" algn="ctr">
-                      <a:solidFill>
-                        <a:srgbClr val="FFF7EC"/>
-                      </a:solidFill>
-                      <a:prstDash val="solid"/>
-                      <a:round/>
-                      <a:headEnd type="none" w="med" len="med"/>
-                      <a:tailEnd type="none" w="med" len="med"/>
-                    </a:lnR>
-                    <a:lnT w="12700" cap="flat" cmpd="sng" algn="ctr">
-                      <a:solidFill>
-                        <a:srgbClr val="FFF7EC"/>
-                      </a:solidFill>
-                      <a:prstDash val="solid"/>
-                      <a:round/>
-                      <a:headEnd type="none" w="med" len="med"/>
-                      <a:tailEnd type="none" w="med" len="med"/>
-                    </a:lnT>
-                    <a:lnB w="12700" cap="flat" cmpd="sng" algn="ctr">
-                      <a:solidFill>
-                        <a:srgbClr val="FFF7EC"/>
-                      </a:solidFill>
-                      <a:prstDash val="solid"/>
-                      <a:round/>
-                      <a:headEnd type="none" w="med" len="med"/>
-                      <a:tailEnd type="none" w="med" len="med"/>
-                    </a:lnB>
-                    <a:solidFill>
-                      <a:srgbClr val="FDE5CC"/>
-                    </a:solidFill>
-                  </a:tcPr>
-                </a:tc>
-                <a:tc>
-                  <a:txBody>
-                    <a:bodyPr/>
-                    <a:lstStyle/>
-                    <a:p>
-                      <a:pPr algn="ctr" indent="0" marL="0">
-                        <a:buNone/>
-                      </a:pPr>
-                      <a:r>
-                        <a:rPr lang="en-US" sz="1400" i="1" dirty="0">
-                          <a:solidFill>
-                            <a:srgbClr val="B3561A"/>
-                          </a:solidFill>
-                        </a:rPr>
-                        <a:t>[add]</a:t>
-                      </a:r>
-                      <a:endParaRPr lang="en-US" sz="1400" dirty="0"/>
-                    </a:p>
-                  </a:txBody>
-                  <a:tcPr marL="73152" marR="73152" marT="73152" marB="73152" anchor="ctr">
-                    <a:lnL w="12700" cap="flat" cmpd="sng" algn="ctr">
-                      <a:solidFill>
-                        <a:srgbClr val="FFF7EC"/>
-                      </a:solidFill>
-                      <a:prstDash val="solid"/>
-                      <a:round/>
-                      <a:headEnd type="none" w="med" len="med"/>
-                      <a:tailEnd type="none" w="med" len="med"/>
-                    </a:lnL>
-                    <a:lnR w="12700" cap="flat" cmpd="sng" algn="ctr">
-                      <a:solidFill>
-                        <a:srgbClr val="FFF7EC"/>
-                      </a:solidFill>
-                      <a:prstDash val="solid"/>
-                      <a:round/>
-                      <a:headEnd type="none" w="med" len="med"/>
-                      <a:tailEnd type="none" w="med" len="med"/>
-                    </a:lnR>
-                    <a:lnT w="12700" cap="flat" cmpd="sng" algn="ctr">
-                      <a:solidFill>
-                        <a:srgbClr val="FFF7EC"/>
-                      </a:solidFill>
-                      <a:prstDash val="solid"/>
-                      <a:round/>
-                      <a:headEnd type="none" w="med" len="med"/>
-                      <a:tailEnd type="none" w="med" len="med"/>
-                    </a:lnT>
-                    <a:lnB w="12700" cap="flat" cmpd="sng" algn="ctr">
-                      <a:solidFill>
-                        <a:srgbClr val="FFF7EC"/>
-                      </a:solidFill>
-                      <a:prstDash val="solid"/>
-                      <a:round/>
-                      <a:headEnd type="none" w="med" len="med"/>
-                      <a:tailEnd type="none" w="med" len="med"/>
-                    </a:lnB>
-                    <a:solidFill>
-                      <a:srgbClr val="FDE5CC"/>
-                    </a:solidFill>
-                  </a:tcPr>
-                </a:tc>
-              </a:tr>
-            </a:tbl>
-          </a:graphicData>
-        </a:graphic>
-      </p:graphicFrame>
       <p:sp>
         <p:nvSpPr>
           <p:cNvPr id="25" name="Slide Number Placeholder 0"/>
